--- a/demo/slides.pptx
+++ b/demo/slides.pptx
@@ -15,6 +15,7 @@
     <p:sldId id="263" r:id="rId14"/>
     <p:sldId id="264" r:id="rId15"/>
     <p:sldId id="265" r:id="rId16"/>
+    <p:sldId id="266" r:id="rId17"/>
   </p:sldIdLst>
   <p:sldSz cx="12188952" cy="6858000" type="screen4x3"/>
   <p:notesSz cx="6858000" cy="9144000"/>
@@ -3795,6 +3796,2030 @@
         </p:nvSpPr>
         <p:spPr>
           <a:xfrm>
+            <a:off x="457200" y="274320"/>
+            <a:ext cx="9144000" cy="274320"/>
+          </a:xfrm>
+          <a:prstGeom prst="rect">
+            <a:avLst/>
+          </a:prstGeom>
+          <a:noFill/>
+        </p:spPr>
+        <p:txBody>
+          <a:bodyPr wrap="square">
+            <a:spAutoFit/>
+          </a:bodyPr>
+          <a:lstStyle/>
+          <a:p>
+            <a:pPr algn="ctr"/>
+            <a:r>
+              <a:rPr sz="1000" b="1">
+                <a:solidFill>
+                  <a:srgbClr val="58A6FF"/>
+                </a:solidFill>
+              </a:rPr>
+              <a:t>SETUP</a:t>
+            </a:r>
+          </a:p>
+        </p:txBody>
+      </p:sp>
+      <p:sp>
+        <p:nvSpPr>
+          <p:cNvPr id="3" name="TextBox 2"/>
+          <p:cNvSpPr txBox="1"/>
+          <p:nvPr/>
+        </p:nvSpPr>
+        <p:spPr>
+          <a:xfrm>
+            <a:off x="457200" y="548640"/>
+            <a:ext cx="11247120" cy="457200"/>
+          </a:xfrm>
+          <a:prstGeom prst="rect">
+            <a:avLst/>
+          </a:prstGeom>
+          <a:noFill/>
+        </p:spPr>
+        <p:txBody>
+          <a:bodyPr wrap="square">
+            <a:spAutoFit/>
+          </a:bodyPr>
+          <a:lstStyle/>
+          <a:p>
+            <a:pPr algn="ctr"/>
+            <a:r>
+              <a:rPr sz="2800" b="1">
+                <a:solidFill>
+                  <a:srgbClr val="F0F6FC"/>
+                </a:solidFill>
+              </a:rPr>
+              <a:t>What the user does — once</a:t>
+            </a:r>
+          </a:p>
+        </p:txBody>
+      </p:sp>
+      <p:sp>
+        <p:nvSpPr>
+          <p:cNvPr id="4" name="Rectangle 3"/>
+          <p:cNvSpPr/>
+          <p:nvPr/>
+        </p:nvSpPr>
+        <p:spPr>
+          <a:xfrm>
+            <a:off x="365760" y="1280160"/>
+            <a:ext cx="347472" cy="438912"/>
+          </a:xfrm>
+          <a:prstGeom prst="rect">
+            <a:avLst/>
+          </a:prstGeom>
+          <a:solidFill>
+            <a:srgbClr val="1F3A5F"/>
+          </a:solidFill>
+          <a:ln w="9525">
+            <a:solidFill>
+              <a:srgbClr val="58A6FF"/>
+            </a:solidFill>
+          </a:ln>
+        </p:spPr>
+        <p:style>
+          <a:lnRef idx="1">
+            <a:schemeClr val="accent1"/>
+          </a:lnRef>
+          <a:fillRef idx="3">
+            <a:schemeClr val="accent1"/>
+          </a:fillRef>
+          <a:effectRef idx="2">
+            <a:schemeClr val="accent1"/>
+          </a:effectRef>
+          <a:fontRef idx="minor">
+            <a:schemeClr val="lt1"/>
+          </a:fontRef>
+        </p:style>
+        <p:txBody>
+          <a:bodyPr rtlCol="0" anchor="ctr"/>
+          <a:lstStyle/>
+          <a:p>
+            <a:pPr algn="ctr"/>
+          </a:p>
+        </p:txBody>
+      </p:sp>
+      <p:sp>
+        <p:nvSpPr>
+          <p:cNvPr id="5" name="TextBox 4"/>
+          <p:cNvSpPr txBox="1"/>
+          <p:nvPr/>
+        </p:nvSpPr>
+        <p:spPr>
+          <a:xfrm>
+            <a:off x="475488" y="1389888"/>
+            <a:ext cx="128016" cy="219456"/>
+          </a:xfrm>
+          <a:prstGeom prst="rect">
+            <a:avLst/>
+          </a:prstGeom>
+          <a:noFill/>
+        </p:spPr>
+        <p:txBody>
+          <a:bodyPr wrap="square">
+            <a:spAutoFit/>
+          </a:bodyPr>
+          <a:lstStyle/>
+          <a:p>
+            <a:pPr algn="ctr"/>
+            <a:r>
+              <a:rPr sz="1200" b="1">
+                <a:solidFill>
+                  <a:srgbClr val="58A6FF"/>
+                </a:solidFill>
+              </a:rPr>
+              <a:t>1</a:t>
+            </a:r>
+          </a:p>
+        </p:txBody>
+      </p:sp>
+      <p:sp>
+        <p:nvSpPr>
+          <p:cNvPr id="6" name="Rectangle 5"/>
+          <p:cNvSpPr/>
+          <p:nvPr/>
+        </p:nvSpPr>
+        <p:spPr>
+          <a:xfrm>
+            <a:off x="804672" y="1280160"/>
+            <a:ext cx="2377440" cy="438912"/>
+          </a:xfrm>
+          <a:prstGeom prst="rect">
+            <a:avLst/>
+          </a:prstGeom>
+          <a:solidFill>
+            <a:srgbClr val="161B22"/>
+          </a:solidFill>
+          <a:ln w="9525">
+            <a:solidFill>
+              <a:srgbClr val="30363D"/>
+            </a:solidFill>
+          </a:ln>
+        </p:spPr>
+        <p:style>
+          <a:lnRef idx="1">
+            <a:schemeClr val="accent1"/>
+          </a:lnRef>
+          <a:fillRef idx="3">
+            <a:schemeClr val="accent1"/>
+          </a:fillRef>
+          <a:effectRef idx="2">
+            <a:schemeClr val="accent1"/>
+          </a:effectRef>
+          <a:fontRef idx="minor">
+            <a:schemeClr val="lt1"/>
+          </a:fontRef>
+        </p:style>
+        <p:txBody>
+          <a:bodyPr rtlCol="0" anchor="ctr"/>
+          <a:lstStyle/>
+          <a:p>
+            <a:pPr algn="ctr"/>
+          </a:p>
+        </p:txBody>
+      </p:sp>
+      <p:sp>
+        <p:nvSpPr>
+          <p:cNvPr id="7" name="TextBox 6"/>
+          <p:cNvSpPr txBox="1"/>
+          <p:nvPr/>
+        </p:nvSpPr>
+        <p:spPr>
+          <a:xfrm>
+            <a:off x="914400" y="1389888"/>
+            <a:ext cx="2157984" cy="219456"/>
+          </a:xfrm>
+          <a:prstGeom prst="rect">
+            <a:avLst/>
+          </a:prstGeom>
+          <a:noFill/>
+        </p:spPr>
+        <p:txBody>
+          <a:bodyPr wrap="square">
+            <a:spAutoFit/>
+          </a:bodyPr>
+          <a:lstStyle/>
+          <a:p>
+            <a:pPr algn="l"/>
+            <a:r>
+              <a:rPr sz="1200" b="1">
+                <a:solidFill>
+                  <a:srgbClr val="F0F6FC"/>
+                </a:solidFill>
+              </a:rPr>
+              <a:t>Clone framework</a:t>
+            </a:r>
+          </a:p>
+        </p:txBody>
+      </p:sp>
+      <p:sp>
+        <p:nvSpPr>
+          <p:cNvPr id="8" name="Rectangle 7"/>
+          <p:cNvSpPr/>
+          <p:nvPr/>
+        </p:nvSpPr>
+        <p:spPr>
+          <a:xfrm>
+            <a:off x="3273552" y="1280160"/>
+            <a:ext cx="8869680" cy="438912"/>
+          </a:xfrm>
+          <a:prstGeom prst="rect">
+            <a:avLst/>
+          </a:prstGeom>
+          <a:solidFill>
+            <a:srgbClr val="0D1117"/>
+          </a:solidFill>
+          <a:ln w="9525">
+            <a:solidFill>
+              <a:srgbClr val="30363D"/>
+            </a:solidFill>
+          </a:ln>
+        </p:spPr>
+        <p:style>
+          <a:lnRef idx="1">
+            <a:schemeClr val="accent1"/>
+          </a:lnRef>
+          <a:fillRef idx="3">
+            <a:schemeClr val="accent1"/>
+          </a:fillRef>
+          <a:effectRef idx="2">
+            <a:schemeClr val="accent1"/>
+          </a:effectRef>
+          <a:fontRef idx="minor">
+            <a:schemeClr val="lt1"/>
+          </a:fontRef>
+        </p:style>
+        <p:txBody>
+          <a:bodyPr rtlCol="0" anchor="ctr"/>
+          <a:lstStyle/>
+          <a:p>
+            <a:pPr algn="ctr"/>
+          </a:p>
+        </p:txBody>
+      </p:sp>
+      <p:sp>
+        <p:nvSpPr>
+          <p:cNvPr id="9" name="TextBox 8"/>
+          <p:cNvSpPr txBox="1"/>
+          <p:nvPr/>
+        </p:nvSpPr>
+        <p:spPr>
+          <a:xfrm>
+            <a:off x="3383280" y="1389888"/>
+            <a:ext cx="8650224" cy="219456"/>
+          </a:xfrm>
+          <a:prstGeom prst="rect">
+            <a:avLst/>
+          </a:prstGeom>
+          <a:noFill/>
+        </p:spPr>
+        <p:txBody>
+          <a:bodyPr wrap="square">
+            <a:spAutoFit/>
+          </a:bodyPr>
+          <a:lstStyle/>
+          <a:p>
+            <a:pPr algn="l"/>
+            <a:r>
+              <a:rPr sz="1100" b="0">
+                <a:solidFill>
+                  <a:srgbClr val="8B949E"/>
+                </a:solidFill>
+              </a:rPr>
+              <a:t>git clone &lt;this repo&gt;</a:t>
+            </a:r>
+          </a:p>
+        </p:txBody>
+      </p:sp>
+      <p:sp>
+        <p:nvSpPr>
+          <p:cNvPr id="10" name="Rectangle 9"/>
+          <p:cNvSpPr/>
+          <p:nvPr/>
+        </p:nvSpPr>
+        <p:spPr>
+          <a:xfrm>
+            <a:off x="365760" y="1783080"/>
+            <a:ext cx="347472" cy="438912"/>
+          </a:xfrm>
+          <a:prstGeom prst="rect">
+            <a:avLst/>
+          </a:prstGeom>
+          <a:solidFill>
+            <a:srgbClr val="1F3A5F"/>
+          </a:solidFill>
+          <a:ln w="9525">
+            <a:solidFill>
+              <a:srgbClr val="58A6FF"/>
+            </a:solidFill>
+          </a:ln>
+        </p:spPr>
+        <p:style>
+          <a:lnRef idx="1">
+            <a:schemeClr val="accent1"/>
+          </a:lnRef>
+          <a:fillRef idx="3">
+            <a:schemeClr val="accent1"/>
+          </a:fillRef>
+          <a:effectRef idx="2">
+            <a:schemeClr val="accent1"/>
+          </a:effectRef>
+          <a:fontRef idx="minor">
+            <a:schemeClr val="lt1"/>
+          </a:fontRef>
+        </p:style>
+        <p:txBody>
+          <a:bodyPr rtlCol="0" anchor="ctr"/>
+          <a:lstStyle/>
+          <a:p>
+            <a:pPr algn="ctr"/>
+          </a:p>
+        </p:txBody>
+      </p:sp>
+      <p:sp>
+        <p:nvSpPr>
+          <p:cNvPr id="11" name="TextBox 10"/>
+          <p:cNvSpPr txBox="1"/>
+          <p:nvPr/>
+        </p:nvSpPr>
+        <p:spPr>
+          <a:xfrm>
+            <a:off x="475488" y="1892808"/>
+            <a:ext cx="128016" cy="219456"/>
+          </a:xfrm>
+          <a:prstGeom prst="rect">
+            <a:avLst/>
+          </a:prstGeom>
+          <a:noFill/>
+        </p:spPr>
+        <p:txBody>
+          <a:bodyPr wrap="square">
+            <a:spAutoFit/>
+          </a:bodyPr>
+          <a:lstStyle/>
+          <a:p>
+            <a:pPr algn="ctr"/>
+            <a:r>
+              <a:rPr sz="1200" b="1">
+                <a:solidFill>
+                  <a:srgbClr val="58A6FF"/>
+                </a:solidFill>
+              </a:rPr>
+              <a:t>2</a:t>
+            </a:r>
+          </a:p>
+        </p:txBody>
+      </p:sp>
+      <p:sp>
+        <p:nvSpPr>
+          <p:cNvPr id="12" name="Rectangle 11"/>
+          <p:cNvSpPr/>
+          <p:nvPr/>
+        </p:nvSpPr>
+        <p:spPr>
+          <a:xfrm>
+            <a:off x="804672" y="1783080"/>
+            <a:ext cx="2377440" cy="438912"/>
+          </a:xfrm>
+          <a:prstGeom prst="rect">
+            <a:avLst/>
+          </a:prstGeom>
+          <a:solidFill>
+            <a:srgbClr val="161B22"/>
+          </a:solidFill>
+          <a:ln w="9525">
+            <a:solidFill>
+              <a:srgbClr val="30363D"/>
+            </a:solidFill>
+          </a:ln>
+        </p:spPr>
+        <p:style>
+          <a:lnRef idx="1">
+            <a:schemeClr val="accent1"/>
+          </a:lnRef>
+          <a:fillRef idx="3">
+            <a:schemeClr val="accent1"/>
+          </a:fillRef>
+          <a:effectRef idx="2">
+            <a:schemeClr val="accent1"/>
+          </a:effectRef>
+          <a:fontRef idx="minor">
+            <a:schemeClr val="lt1"/>
+          </a:fontRef>
+        </p:style>
+        <p:txBody>
+          <a:bodyPr rtlCol="0" anchor="ctr"/>
+          <a:lstStyle/>
+          <a:p>
+            <a:pPr algn="ctr"/>
+          </a:p>
+        </p:txBody>
+      </p:sp>
+      <p:sp>
+        <p:nvSpPr>
+          <p:cNvPr id="13" name="TextBox 12"/>
+          <p:cNvSpPr txBox="1"/>
+          <p:nvPr/>
+        </p:nvSpPr>
+        <p:spPr>
+          <a:xfrm>
+            <a:off x="914400" y="1892808"/>
+            <a:ext cx="2157984" cy="219456"/>
+          </a:xfrm>
+          <a:prstGeom prst="rect">
+            <a:avLst/>
+          </a:prstGeom>
+          <a:noFill/>
+        </p:spPr>
+        <p:txBody>
+          <a:bodyPr wrap="square">
+            <a:spAutoFit/>
+          </a:bodyPr>
+          <a:lstStyle/>
+          <a:p>
+            <a:pPr algn="l"/>
+            <a:r>
+              <a:rPr sz="1200" b="1">
+                <a:solidFill>
+                  <a:srgbClr val="F0F6FC"/>
+                </a:solidFill>
+              </a:rPr>
+              <a:t>Copy embedding model</a:t>
+            </a:r>
+          </a:p>
+        </p:txBody>
+      </p:sp>
+      <p:sp>
+        <p:nvSpPr>
+          <p:cNvPr id="14" name="Rectangle 13"/>
+          <p:cNvSpPr/>
+          <p:nvPr/>
+        </p:nvSpPr>
+        <p:spPr>
+          <a:xfrm>
+            <a:off x="3273552" y="1783080"/>
+            <a:ext cx="8869680" cy="438912"/>
+          </a:xfrm>
+          <a:prstGeom prst="rect">
+            <a:avLst/>
+          </a:prstGeom>
+          <a:solidFill>
+            <a:srgbClr val="0D1117"/>
+          </a:solidFill>
+          <a:ln w="9525">
+            <a:solidFill>
+              <a:srgbClr val="30363D"/>
+            </a:solidFill>
+          </a:ln>
+        </p:spPr>
+        <p:style>
+          <a:lnRef idx="1">
+            <a:schemeClr val="accent1"/>
+          </a:lnRef>
+          <a:fillRef idx="3">
+            <a:schemeClr val="accent1"/>
+          </a:fillRef>
+          <a:effectRef idx="2">
+            <a:schemeClr val="accent1"/>
+          </a:effectRef>
+          <a:fontRef idx="minor">
+            <a:schemeClr val="lt1"/>
+          </a:fontRef>
+        </p:style>
+        <p:txBody>
+          <a:bodyPr rtlCol="0" anchor="ctr"/>
+          <a:lstStyle/>
+          <a:p>
+            <a:pPr algn="ctr"/>
+          </a:p>
+        </p:txBody>
+      </p:sp>
+      <p:sp>
+        <p:nvSpPr>
+          <p:cNvPr id="15" name="TextBox 14"/>
+          <p:cNvSpPr txBox="1"/>
+          <p:nvPr/>
+        </p:nvSpPr>
+        <p:spPr>
+          <a:xfrm>
+            <a:off x="3383280" y="1892808"/>
+            <a:ext cx="8650224" cy="219456"/>
+          </a:xfrm>
+          <a:prstGeom prst="rect">
+            <a:avLst/>
+          </a:prstGeom>
+          <a:noFill/>
+        </p:spPr>
+        <p:txBody>
+          <a:bodyPr wrap="square">
+            <a:spAutoFit/>
+          </a:bodyPr>
+          <a:lstStyle/>
+          <a:p>
+            <a:pPr algn="l"/>
+            <a:r>
+              <a:rPr sz="1100" b="0">
+                <a:solidFill>
+                  <a:srgbClr val="8B949E"/>
+                </a:solidFill>
+              </a:rPr>
+              <a:t>Copy models/all-MiniLM-L6-v2/ into repo root  (offline, ~90 MB)</a:t>
+            </a:r>
+          </a:p>
+        </p:txBody>
+      </p:sp>
+      <p:sp>
+        <p:nvSpPr>
+          <p:cNvPr id="16" name="Rectangle 15"/>
+          <p:cNvSpPr/>
+          <p:nvPr/>
+        </p:nvSpPr>
+        <p:spPr>
+          <a:xfrm>
+            <a:off x="365760" y="2286000"/>
+            <a:ext cx="347472" cy="438912"/>
+          </a:xfrm>
+          <a:prstGeom prst="rect">
+            <a:avLst/>
+          </a:prstGeom>
+          <a:solidFill>
+            <a:srgbClr val="1F3A5F"/>
+          </a:solidFill>
+          <a:ln w="9525">
+            <a:solidFill>
+              <a:srgbClr val="58A6FF"/>
+            </a:solidFill>
+          </a:ln>
+        </p:spPr>
+        <p:style>
+          <a:lnRef idx="1">
+            <a:schemeClr val="accent1"/>
+          </a:lnRef>
+          <a:fillRef idx="3">
+            <a:schemeClr val="accent1"/>
+          </a:fillRef>
+          <a:effectRef idx="2">
+            <a:schemeClr val="accent1"/>
+          </a:effectRef>
+          <a:fontRef idx="minor">
+            <a:schemeClr val="lt1"/>
+          </a:fontRef>
+        </p:style>
+        <p:txBody>
+          <a:bodyPr rtlCol="0" anchor="ctr"/>
+          <a:lstStyle/>
+          <a:p>
+            <a:pPr algn="ctr"/>
+          </a:p>
+        </p:txBody>
+      </p:sp>
+      <p:sp>
+        <p:nvSpPr>
+          <p:cNvPr id="17" name="TextBox 16"/>
+          <p:cNvSpPr txBox="1"/>
+          <p:nvPr/>
+        </p:nvSpPr>
+        <p:spPr>
+          <a:xfrm>
+            <a:off x="475488" y="2395728"/>
+            <a:ext cx="128016" cy="219456"/>
+          </a:xfrm>
+          <a:prstGeom prst="rect">
+            <a:avLst/>
+          </a:prstGeom>
+          <a:noFill/>
+        </p:spPr>
+        <p:txBody>
+          <a:bodyPr wrap="square">
+            <a:spAutoFit/>
+          </a:bodyPr>
+          <a:lstStyle/>
+          <a:p>
+            <a:pPr algn="ctr"/>
+            <a:r>
+              <a:rPr sz="1200" b="1">
+                <a:solidFill>
+                  <a:srgbClr val="58A6FF"/>
+                </a:solidFill>
+              </a:rPr>
+              <a:t>3</a:t>
+            </a:r>
+          </a:p>
+        </p:txBody>
+      </p:sp>
+      <p:sp>
+        <p:nvSpPr>
+          <p:cNvPr id="18" name="Rectangle 17"/>
+          <p:cNvSpPr/>
+          <p:nvPr/>
+        </p:nvSpPr>
+        <p:spPr>
+          <a:xfrm>
+            <a:off x="804672" y="2286000"/>
+            <a:ext cx="2377440" cy="438912"/>
+          </a:xfrm>
+          <a:prstGeom prst="rect">
+            <a:avLst/>
+          </a:prstGeom>
+          <a:solidFill>
+            <a:srgbClr val="161B22"/>
+          </a:solidFill>
+          <a:ln w="9525">
+            <a:solidFill>
+              <a:srgbClr val="30363D"/>
+            </a:solidFill>
+          </a:ln>
+        </p:spPr>
+        <p:style>
+          <a:lnRef idx="1">
+            <a:schemeClr val="accent1"/>
+          </a:lnRef>
+          <a:fillRef idx="3">
+            <a:schemeClr val="accent1"/>
+          </a:fillRef>
+          <a:effectRef idx="2">
+            <a:schemeClr val="accent1"/>
+          </a:effectRef>
+          <a:fontRef idx="minor">
+            <a:schemeClr val="lt1"/>
+          </a:fontRef>
+        </p:style>
+        <p:txBody>
+          <a:bodyPr rtlCol="0" anchor="ctr"/>
+          <a:lstStyle/>
+          <a:p>
+            <a:pPr algn="ctr"/>
+          </a:p>
+        </p:txBody>
+      </p:sp>
+      <p:sp>
+        <p:nvSpPr>
+          <p:cNvPr id="19" name="TextBox 18"/>
+          <p:cNvSpPr txBox="1"/>
+          <p:nvPr/>
+        </p:nvSpPr>
+        <p:spPr>
+          <a:xfrm>
+            <a:off x="914400" y="2395728"/>
+            <a:ext cx="2157984" cy="219456"/>
+          </a:xfrm>
+          <a:prstGeom prst="rect">
+            <a:avLst/>
+          </a:prstGeom>
+          <a:noFill/>
+        </p:spPr>
+        <p:txBody>
+          <a:bodyPr wrap="square">
+            <a:spAutoFit/>
+          </a:bodyPr>
+          <a:lstStyle/>
+          <a:p>
+            <a:pPr algn="l"/>
+            <a:r>
+              <a:rPr sz="1200" b="1">
+                <a:solidFill>
+                  <a:srgbClr val="F0F6FC"/>
+                </a:solidFill>
+              </a:rPr>
+              <a:t>Install dependencies</a:t>
+            </a:r>
+          </a:p>
+        </p:txBody>
+      </p:sp>
+      <p:sp>
+        <p:nvSpPr>
+          <p:cNvPr id="20" name="Rectangle 19"/>
+          <p:cNvSpPr/>
+          <p:nvPr/>
+        </p:nvSpPr>
+        <p:spPr>
+          <a:xfrm>
+            <a:off x="3273552" y="2286000"/>
+            <a:ext cx="8869680" cy="438912"/>
+          </a:xfrm>
+          <a:prstGeom prst="rect">
+            <a:avLst/>
+          </a:prstGeom>
+          <a:solidFill>
+            <a:srgbClr val="0D1117"/>
+          </a:solidFill>
+          <a:ln w="9525">
+            <a:solidFill>
+              <a:srgbClr val="30363D"/>
+            </a:solidFill>
+          </a:ln>
+        </p:spPr>
+        <p:style>
+          <a:lnRef idx="1">
+            <a:schemeClr val="accent1"/>
+          </a:lnRef>
+          <a:fillRef idx="3">
+            <a:schemeClr val="accent1"/>
+          </a:fillRef>
+          <a:effectRef idx="2">
+            <a:schemeClr val="accent1"/>
+          </a:effectRef>
+          <a:fontRef idx="minor">
+            <a:schemeClr val="lt1"/>
+          </a:fontRef>
+        </p:style>
+        <p:txBody>
+          <a:bodyPr rtlCol="0" anchor="ctr"/>
+          <a:lstStyle/>
+          <a:p>
+            <a:pPr algn="ctr"/>
+          </a:p>
+        </p:txBody>
+      </p:sp>
+      <p:sp>
+        <p:nvSpPr>
+          <p:cNvPr id="21" name="TextBox 20"/>
+          <p:cNvSpPr txBox="1"/>
+          <p:nvPr/>
+        </p:nvSpPr>
+        <p:spPr>
+          <a:xfrm>
+            <a:off x="3383280" y="2395728"/>
+            <a:ext cx="8650224" cy="219456"/>
+          </a:xfrm>
+          <a:prstGeom prst="rect">
+            <a:avLst/>
+          </a:prstGeom>
+          <a:noFill/>
+        </p:spPr>
+        <p:txBody>
+          <a:bodyPr wrap="square">
+            <a:spAutoFit/>
+          </a:bodyPr>
+          <a:lstStyle/>
+          <a:p>
+            <a:pPr algn="l"/>
+            <a:r>
+              <a:rPr sz="1100" b="0">
+                <a:solidFill>
+                  <a:srgbClr val="8B949E"/>
+                </a:solidFill>
+              </a:rPr>
+              <a:t>pip install -r requirements.txt</a:t>
+            </a:r>
+          </a:p>
+        </p:txBody>
+      </p:sp>
+      <p:sp>
+        <p:nvSpPr>
+          <p:cNvPr id="22" name="Rectangle 21"/>
+          <p:cNvSpPr/>
+          <p:nvPr/>
+        </p:nvSpPr>
+        <p:spPr>
+          <a:xfrm>
+            <a:off x="365760" y="2788920"/>
+            <a:ext cx="347472" cy="438912"/>
+          </a:xfrm>
+          <a:prstGeom prst="rect">
+            <a:avLst/>
+          </a:prstGeom>
+          <a:solidFill>
+            <a:srgbClr val="1F3A5F"/>
+          </a:solidFill>
+          <a:ln w="9525">
+            <a:solidFill>
+              <a:srgbClr val="58A6FF"/>
+            </a:solidFill>
+          </a:ln>
+        </p:spPr>
+        <p:style>
+          <a:lnRef idx="1">
+            <a:schemeClr val="accent1"/>
+          </a:lnRef>
+          <a:fillRef idx="3">
+            <a:schemeClr val="accent1"/>
+          </a:fillRef>
+          <a:effectRef idx="2">
+            <a:schemeClr val="accent1"/>
+          </a:effectRef>
+          <a:fontRef idx="minor">
+            <a:schemeClr val="lt1"/>
+          </a:fontRef>
+        </p:style>
+        <p:txBody>
+          <a:bodyPr rtlCol="0" anchor="ctr"/>
+          <a:lstStyle/>
+          <a:p>
+            <a:pPr algn="ctr"/>
+          </a:p>
+        </p:txBody>
+      </p:sp>
+      <p:sp>
+        <p:nvSpPr>
+          <p:cNvPr id="23" name="TextBox 22"/>
+          <p:cNvSpPr txBox="1"/>
+          <p:nvPr/>
+        </p:nvSpPr>
+        <p:spPr>
+          <a:xfrm>
+            <a:off x="475488" y="2898648"/>
+            <a:ext cx="128016" cy="219456"/>
+          </a:xfrm>
+          <a:prstGeom prst="rect">
+            <a:avLst/>
+          </a:prstGeom>
+          <a:noFill/>
+        </p:spPr>
+        <p:txBody>
+          <a:bodyPr wrap="square">
+            <a:spAutoFit/>
+          </a:bodyPr>
+          <a:lstStyle/>
+          <a:p>
+            <a:pPr algn="ctr"/>
+            <a:r>
+              <a:rPr sz="1200" b="1">
+                <a:solidFill>
+                  <a:srgbClr val="58A6FF"/>
+                </a:solidFill>
+              </a:rPr>
+              <a:t>4</a:t>
+            </a:r>
+          </a:p>
+        </p:txBody>
+      </p:sp>
+      <p:sp>
+        <p:nvSpPr>
+          <p:cNvPr id="24" name="Rectangle 23"/>
+          <p:cNvSpPr/>
+          <p:nvPr/>
+        </p:nvSpPr>
+        <p:spPr>
+          <a:xfrm>
+            <a:off x="804672" y="2788920"/>
+            <a:ext cx="2377440" cy="438912"/>
+          </a:xfrm>
+          <a:prstGeom prst="rect">
+            <a:avLst/>
+          </a:prstGeom>
+          <a:solidFill>
+            <a:srgbClr val="161B22"/>
+          </a:solidFill>
+          <a:ln w="9525">
+            <a:solidFill>
+              <a:srgbClr val="30363D"/>
+            </a:solidFill>
+          </a:ln>
+        </p:spPr>
+        <p:style>
+          <a:lnRef idx="1">
+            <a:schemeClr val="accent1"/>
+          </a:lnRef>
+          <a:fillRef idx="3">
+            <a:schemeClr val="accent1"/>
+          </a:fillRef>
+          <a:effectRef idx="2">
+            <a:schemeClr val="accent1"/>
+          </a:effectRef>
+          <a:fontRef idx="minor">
+            <a:schemeClr val="lt1"/>
+          </a:fontRef>
+        </p:style>
+        <p:txBody>
+          <a:bodyPr rtlCol="0" anchor="ctr"/>
+          <a:lstStyle/>
+          <a:p>
+            <a:pPr algn="ctr"/>
+          </a:p>
+        </p:txBody>
+      </p:sp>
+      <p:sp>
+        <p:nvSpPr>
+          <p:cNvPr id="25" name="TextBox 24"/>
+          <p:cNvSpPr txBox="1"/>
+          <p:nvPr/>
+        </p:nvSpPr>
+        <p:spPr>
+          <a:xfrm>
+            <a:off x="914400" y="2898648"/>
+            <a:ext cx="2157984" cy="219456"/>
+          </a:xfrm>
+          <a:prstGeom prst="rect">
+            <a:avLst/>
+          </a:prstGeom>
+          <a:noFill/>
+        </p:spPr>
+        <p:txBody>
+          <a:bodyPr wrap="square">
+            <a:spAutoFit/>
+          </a:bodyPr>
+          <a:lstStyle/>
+          <a:p>
+            <a:pPr algn="l"/>
+            <a:r>
+              <a:rPr sz="1200" b="1">
+                <a:solidFill>
+                  <a:srgbClr val="F0F6FC"/>
+                </a:solidFill>
+              </a:rPr>
+              <a:t>Configure orchestrator</a:t>
+            </a:r>
+          </a:p>
+        </p:txBody>
+      </p:sp>
+      <p:sp>
+        <p:nvSpPr>
+          <p:cNvPr id="26" name="Rectangle 25"/>
+          <p:cNvSpPr/>
+          <p:nvPr/>
+        </p:nvSpPr>
+        <p:spPr>
+          <a:xfrm>
+            <a:off x="3273552" y="2788920"/>
+            <a:ext cx="8869680" cy="438912"/>
+          </a:xfrm>
+          <a:prstGeom prst="rect">
+            <a:avLst/>
+          </a:prstGeom>
+          <a:solidFill>
+            <a:srgbClr val="0D1117"/>
+          </a:solidFill>
+          <a:ln w="9525">
+            <a:solidFill>
+              <a:srgbClr val="30363D"/>
+            </a:solidFill>
+          </a:ln>
+        </p:spPr>
+        <p:style>
+          <a:lnRef idx="1">
+            <a:schemeClr val="accent1"/>
+          </a:lnRef>
+          <a:fillRef idx="3">
+            <a:schemeClr val="accent1"/>
+          </a:fillRef>
+          <a:effectRef idx="2">
+            <a:schemeClr val="accent1"/>
+          </a:effectRef>
+          <a:fontRef idx="minor">
+            <a:schemeClr val="lt1"/>
+          </a:fontRef>
+        </p:style>
+        <p:txBody>
+          <a:bodyPr rtlCol="0" anchor="ctr"/>
+          <a:lstStyle/>
+          <a:p>
+            <a:pPr algn="ctr"/>
+          </a:p>
+        </p:txBody>
+      </p:sp>
+      <p:sp>
+        <p:nvSpPr>
+          <p:cNvPr id="27" name="TextBox 26"/>
+          <p:cNvSpPr txBox="1"/>
+          <p:nvPr/>
+        </p:nvSpPr>
+        <p:spPr>
+          <a:xfrm>
+            <a:off x="3383280" y="2898648"/>
+            <a:ext cx="8650224" cy="219456"/>
+          </a:xfrm>
+          <a:prstGeom prst="rect">
+            <a:avLst/>
+          </a:prstGeom>
+          <a:noFill/>
+        </p:spPr>
+        <p:txBody>
+          <a:bodyPr wrap="square">
+            <a:spAutoFit/>
+          </a:bodyPr>
+          <a:lstStyle/>
+          <a:p>
+            <a:pPr algn="l"/>
+            <a:r>
+              <a:rPr sz="1100" b="0">
+                <a:solidFill>
+                  <a:srgbClr val="8B949E"/>
+                </a:solidFill>
+              </a:rPr>
+              <a:t>Edit orchestrator/mcp/config.yaml — list all subsystem repos + paths</a:t>
+            </a:r>
+          </a:p>
+        </p:txBody>
+      </p:sp>
+      <p:sp>
+        <p:nvSpPr>
+          <p:cNvPr id="28" name="Rectangle 27"/>
+          <p:cNvSpPr/>
+          <p:nvPr/>
+        </p:nvSpPr>
+        <p:spPr>
+          <a:xfrm>
+            <a:off x="365760" y="3291840"/>
+            <a:ext cx="347472" cy="438912"/>
+          </a:xfrm>
+          <a:prstGeom prst="rect">
+            <a:avLst/>
+          </a:prstGeom>
+          <a:solidFill>
+            <a:srgbClr val="1F3A5F"/>
+          </a:solidFill>
+          <a:ln w="9525">
+            <a:solidFill>
+              <a:srgbClr val="58A6FF"/>
+            </a:solidFill>
+          </a:ln>
+        </p:spPr>
+        <p:style>
+          <a:lnRef idx="1">
+            <a:schemeClr val="accent1"/>
+          </a:lnRef>
+          <a:fillRef idx="3">
+            <a:schemeClr val="accent1"/>
+          </a:fillRef>
+          <a:effectRef idx="2">
+            <a:schemeClr val="accent1"/>
+          </a:effectRef>
+          <a:fontRef idx="minor">
+            <a:schemeClr val="lt1"/>
+          </a:fontRef>
+        </p:style>
+        <p:txBody>
+          <a:bodyPr rtlCol="0" anchor="ctr"/>
+          <a:lstStyle/>
+          <a:p>
+            <a:pPr algn="ctr"/>
+          </a:p>
+        </p:txBody>
+      </p:sp>
+      <p:sp>
+        <p:nvSpPr>
+          <p:cNvPr id="29" name="TextBox 28"/>
+          <p:cNvSpPr txBox="1"/>
+          <p:nvPr/>
+        </p:nvSpPr>
+        <p:spPr>
+          <a:xfrm>
+            <a:off x="475488" y="3401568"/>
+            <a:ext cx="128016" cy="219456"/>
+          </a:xfrm>
+          <a:prstGeom prst="rect">
+            <a:avLst/>
+          </a:prstGeom>
+          <a:noFill/>
+        </p:spPr>
+        <p:txBody>
+          <a:bodyPr wrap="square">
+            <a:spAutoFit/>
+          </a:bodyPr>
+          <a:lstStyle/>
+          <a:p>
+            <a:pPr algn="ctr"/>
+            <a:r>
+              <a:rPr sz="1200" b="1">
+                <a:solidFill>
+                  <a:srgbClr val="58A6FF"/>
+                </a:solidFill>
+              </a:rPr>
+              <a:t>5</a:t>
+            </a:r>
+          </a:p>
+        </p:txBody>
+      </p:sp>
+      <p:sp>
+        <p:nvSpPr>
+          <p:cNvPr id="30" name="Rectangle 29"/>
+          <p:cNvSpPr/>
+          <p:nvPr/>
+        </p:nvSpPr>
+        <p:spPr>
+          <a:xfrm>
+            <a:off x="804672" y="3291840"/>
+            <a:ext cx="2377440" cy="438912"/>
+          </a:xfrm>
+          <a:prstGeom prst="rect">
+            <a:avLst/>
+          </a:prstGeom>
+          <a:solidFill>
+            <a:srgbClr val="161B22"/>
+          </a:solidFill>
+          <a:ln w="9525">
+            <a:solidFill>
+              <a:srgbClr val="30363D"/>
+            </a:solidFill>
+          </a:ln>
+        </p:spPr>
+        <p:style>
+          <a:lnRef idx="1">
+            <a:schemeClr val="accent1"/>
+          </a:lnRef>
+          <a:fillRef idx="3">
+            <a:schemeClr val="accent1"/>
+          </a:fillRef>
+          <a:effectRef idx="2">
+            <a:schemeClr val="accent1"/>
+          </a:effectRef>
+          <a:fontRef idx="minor">
+            <a:schemeClr val="lt1"/>
+          </a:fontRef>
+        </p:style>
+        <p:txBody>
+          <a:bodyPr rtlCol="0" anchor="ctr"/>
+          <a:lstStyle/>
+          <a:p>
+            <a:pPr algn="ctr"/>
+          </a:p>
+        </p:txBody>
+      </p:sp>
+      <p:sp>
+        <p:nvSpPr>
+          <p:cNvPr id="31" name="TextBox 30"/>
+          <p:cNvSpPr txBox="1"/>
+          <p:nvPr/>
+        </p:nvSpPr>
+        <p:spPr>
+          <a:xfrm>
+            <a:off x="914400" y="3401568"/>
+            <a:ext cx="2157984" cy="219456"/>
+          </a:xfrm>
+          <a:prstGeom prst="rect">
+            <a:avLst/>
+          </a:prstGeom>
+          <a:noFill/>
+        </p:spPr>
+        <p:txBody>
+          <a:bodyPr wrap="square">
+            <a:spAutoFit/>
+          </a:bodyPr>
+          <a:lstStyle/>
+          <a:p>
+            <a:pPr algn="l"/>
+            <a:r>
+              <a:rPr sz="1200" b="1">
+                <a:solidFill>
+                  <a:srgbClr val="F0F6FC"/>
+                </a:solidFill>
+              </a:rPr>
+              <a:t>Add agent files</a:t>
+            </a:r>
+          </a:p>
+        </p:txBody>
+      </p:sp>
+      <p:sp>
+        <p:nvSpPr>
+          <p:cNvPr id="32" name="Rectangle 31"/>
+          <p:cNvSpPr/>
+          <p:nvPr/>
+        </p:nvSpPr>
+        <p:spPr>
+          <a:xfrm>
+            <a:off x="3273552" y="3291840"/>
+            <a:ext cx="8869680" cy="438912"/>
+          </a:xfrm>
+          <a:prstGeom prst="rect">
+            <a:avLst/>
+          </a:prstGeom>
+          <a:solidFill>
+            <a:srgbClr val="0D1117"/>
+          </a:solidFill>
+          <a:ln w="9525">
+            <a:solidFill>
+              <a:srgbClr val="30363D"/>
+            </a:solidFill>
+          </a:ln>
+        </p:spPr>
+        <p:style>
+          <a:lnRef idx="1">
+            <a:schemeClr val="accent1"/>
+          </a:lnRef>
+          <a:fillRef idx="3">
+            <a:schemeClr val="accent1"/>
+          </a:fillRef>
+          <a:effectRef idx="2">
+            <a:schemeClr val="accent1"/>
+          </a:effectRef>
+          <a:fontRef idx="minor">
+            <a:schemeClr val="lt1"/>
+          </a:fontRef>
+        </p:style>
+        <p:txBody>
+          <a:bodyPr rtlCol="0" anchor="ctr"/>
+          <a:lstStyle/>
+          <a:p>
+            <a:pPr algn="ctr"/>
+          </a:p>
+        </p:txBody>
+      </p:sp>
+      <p:sp>
+        <p:nvSpPr>
+          <p:cNvPr id="33" name="TextBox 32"/>
+          <p:cNvSpPr txBox="1"/>
+          <p:nvPr/>
+        </p:nvSpPr>
+        <p:spPr>
+          <a:xfrm>
+            <a:off x="3383280" y="3401568"/>
+            <a:ext cx="8650224" cy="219456"/>
+          </a:xfrm>
+          <a:prstGeom prst="rect">
+            <a:avLst/>
+          </a:prstGeom>
+          <a:noFill/>
+        </p:spPr>
+        <p:txBody>
+          <a:bodyPr wrap="square">
+            <a:spAutoFit/>
+          </a:bodyPr>
+          <a:lstStyle/>
+          <a:p>
+            <a:pPr algn="l"/>
+            <a:r>
+              <a:rPr sz="1100" b="0">
+                <a:solidFill>
+                  <a:srgbClr val="8B949E"/>
+                </a:solidFill>
+              </a:rPr>
+              <a:t>cp repo-agent/mcp/ knowledge/ .github/  into each subsystem repo</a:t>
+            </a:r>
+          </a:p>
+        </p:txBody>
+      </p:sp>
+      <p:sp>
+        <p:nvSpPr>
+          <p:cNvPr id="34" name="Rectangle 33"/>
+          <p:cNvSpPr/>
+          <p:nvPr/>
+        </p:nvSpPr>
+        <p:spPr>
+          <a:xfrm>
+            <a:off x="365760" y="3794760"/>
+            <a:ext cx="347472" cy="438912"/>
+          </a:xfrm>
+          <a:prstGeom prst="rect">
+            <a:avLst/>
+          </a:prstGeom>
+          <a:solidFill>
+            <a:srgbClr val="1F3A5F"/>
+          </a:solidFill>
+          <a:ln w="9525">
+            <a:solidFill>
+              <a:srgbClr val="58A6FF"/>
+            </a:solidFill>
+          </a:ln>
+        </p:spPr>
+        <p:style>
+          <a:lnRef idx="1">
+            <a:schemeClr val="accent1"/>
+          </a:lnRef>
+          <a:fillRef idx="3">
+            <a:schemeClr val="accent1"/>
+          </a:fillRef>
+          <a:effectRef idx="2">
+            <a:schemeClr val="accent1"/>
+          </a:effectRef>
+          <a:fontRef idx="minor">
+            <a:schemeClr val="lt1"/>
+          </a:fontRef>
+        </p:style>
+        <p:txBody>
+          <a:bodyPr rtlCol="0" anchor="ctr"/>
+          <a:lstStyle/>
+          <a:p>
+            <a:pPr algn="ctr"/>
+          </a:p>
+        </p:txBody>
+      </p:sp>
+      <p:sp>
+        <p:nvSpPr>
+          <p:cNvPr id="35" name="TextBox 34"/>
+          <p:cNvSpPr txBox="1"/>
+          <p:nvPr/>
+        </p:nvSpPr>
+        <p:spPr>
+          <a:xfrm>
+            <a:off x="475488" y="3904488"/>
+            <a:ext cx="128016" cy="219456"/>
+          </a:xfrm>
+          <a:prstGeom prst="rect">
+            <a:avLst/>
+          </a:prstGeom>
+          <a:noFill/>
+        </p:spPr>
+        <p:txBody>
+          <a:bodyPr wrap="square">
+            <a:spAutoFit/>
+          </a:bodyPr>
+          <a:lstStyle/>
+          <a:p>
+            <a:pPr algn="ctr"/>
+            <a:r>
+              <a:rPr sz="1200" b="1">
+                <a:solidFill>
+                  <a:srgbClr val="58A6FF"/>
+                </a:solidFill>
+              </a:rPr>
+              <a:t>6</a:t>
+            </a:r>
+          </a:p>
+        </p:txBody>
+      </p:sp>
+      <p:sp>
+        <p:nvSpPr>
+          <p:cNvPr id="36" name="Rectangle 35"/>
+          <p:cNvSpPr/>
+          <p:nvPr/>
+        </p:nvSpPr>
+        <p:spPr>
+          <a:xfrm>
+            <a:off x="804672" y="3794760"/>
+            <a:ext cx="2377440" cy="438912"/>
+          </a:xfrm>
+          <a:prstGeom prst="rect">
+            <a:avLst/>
+          </a:prstGeom>
+          <a:solidFill>
+            <a:srgbClr val="161B22"/>
+          </a:solidFill>
+          <a:ln w="9525">
+            <a:solidFill>
+              <a:srgbClr val="30363D"/>
+            </a:solidFill>
+          </a:ln>
+        </p:spPr>
+        <p:style>
+          <a:lnRef idx="1">
+            <a:schemeClr val="accent1"/>
+          </a:lnRef>
+          <a:fillRef idx="3">
+            <a:schemeClr val="accent1"/>
+          </a:fillRef>
+          <a:effectRef idx="2">
+            <a:schemeClr val="accent1"/>
+          </a:effectRef>
+          <a:fontRef idx="minor">
+            <a:schemeClr val="lt1"/>
+          </a:fontRef>
+        </p:style>
+        <p:txBody>
+          <a:bodyPr rtlCol="0" anchor="ctr"/>
+          <a:lstStyle/>
+          <a:p>
+            <a:pPr algn="ctr"/>
+          </a:p>
+        </p:txBody>
+      </p:sp>
+      <p:sp>
+        <p:nvSpPr>
+          <p:cNvPr id="37" name="TextBox 36"/>
+          <p:cNvSpPr txBox="1"/>
+          <p:nvPr/>
+        </p:nvSpPr>
+        <p:spPr>
+          <a:xfrm>
+            <a:off x="914400" y="3904488"/>
+            <a:ext cx="2157984" cy="219456"/>
+          </a:xfrm>
+          <a:prstGeom prst="rect">
+            <a:avLst/>
+          </a:prstGeom>
+          <a:noFill/>
+        </p:spPr>
+        <p:txBody>
+          <a:bodyPr wrap="square">
+            <a:spAutoFit/>
+          </a:bodyPr>
+          <a:lstStyle/>
+          <a:p>
+            <a:pPr algn="l"/>
+            <a:r>
+              <a:rPr sz="1200" b="1">
+                <a:solidFill>
+                  <a:srgbClr val="F0F6FC"/>
+                </a:solidFill>
+              </a:rPr>
+              <a:t>Configure each repo</a:t>
+            </a:r>
+          </a:p>
+        </p:txBody>
+      </p:sp>
+      <p:sp>
+        <p:nvSpPr>
+          <p:cNvPr id="38" name="Rectangle 37"/>
+          <p:cNvSpPr/>
+          <p:nvPr/>
+        </p:nvSpPr>
+        <p:spPr>
+          <a:xfrm>
+            <a:off x="3273552" y="3794760"/>
+            <a:ext cx="8869680" cy="438912"/>
+          </a:xfrm>
+          <a:prstGeom prst="rect">
+            <a:avLst/>
+          </a:prstGeom>
+          <a:solidFill>
+            <a:srgbClr val="0D1117"/>
+          </a:solidFill>
+          <a:ln w="9525">
+            <a:solidFill>
+              <a:srgbClr val="30363D"/>
+            </a:solidFill>
+          </a:ln>
+        </p:spPr>
+        <p:style>
+          <a:lnRef idx="1">
+            <a:schemeClr val="accent1"/>
+          </a:lnRef>
+          <a:fillRef idx="3">
+            <a:schemeClr val="accent1"/>
+          </a:fillRef>
+          <a:effectRef idx="2">
+            <a:schemeClr val="accent1"/>
+          </a:effectRef>
+          <a:fontRef idx="minor">
+            <a:schemeClr val="lt1"/>
+          </a:fontRef>
+        </p:style>
+        <p:txBody>
+          <a:bodyPr rtlCol="0" anchor="ctr"/>
+          <a:lstStyle/>
+          <a:p>
+            <a:pPr algn="ctr"/>
+          </a:p>
+        </p:txBody>
+      </p:sp>
+      <p:sp>
+        <p:nvSpPr>
+          <p:cNvPr id="39" name="TextBox 38"/>
+          <p:cNvSpPr txBox="1"/>
+          <p:nvPr/>
+        </p:nvSpPr>
+        <p:spPr>
+          <a:xfrm>
+            <a:off x="3383280" y="3904488"/>
+            <a:ext cx="8650224" cy="219456"/>
+          </a:xfrm>
+          <a:prstGeom prst="rect">
+            <a:avLst/>
+          </a:prstGeom>
+          <a:noFill/>
+        </p:spPr>
+        <p:txBody>
+          <a:bodyPr wrap="square">
+            <a:spAutoFit/>
+          </a:bodyPr>
+          <a:lstStyle/>
+          <a:p>
+            <a:pPr algn="l"/>
+            <a:r>
+              <a:rPr sz="1100" b="0">
+                <a:solidFill>
+                  <a:srgbClr val="8B949E"/>
+                </a:solidFill>
+              </a:rPr>
+              <a:t>Edit each repo's mcp/config.yaml — set repo_name and src_path (glob ok)</a:t>
+            </a:r>
+          </a:p>
+        </p:txBody>
+      </p:sp>
+      <p:sp>
+        <p:nvSpPr>
+          <p:cNvPr id="40" name="Rectangle 39"/>
+          <p:cNvSpPr/>
+          <p:nvPr/>
+        </p:nvSpPr>
+        <p:spPr>
+          <a:xfrm>
+            <a:off x="365760" y="4297680"/>
+            <a:ext cx="347472" cy="438912"/>
+          </a:xfrm>
+          <a:prstGeom prst="rect">
+            <a:avLst/>
+          </a:prstGeom>
+          <a:solidFill>
+            <a:srgbClr val="1F3A5F"/>
+          </a:solidFill>
+          <a:ln w="9525">
+            <a:solidFill>
+              <a:srgbClr val="58A6FF"/>
+            </a:solidFill>
+          </a:ln>
+        </p:spPr>
+        <p:style>
+          <a:lnRef idx="1">
+            <a:schemeClr val="accent1"/>
+          </a:lnRef>
+          <a:fillRef idx="3">
+            <a:schemeClr val="accent1"/>
+          </a:fillRef>
+          <a:effectRef idx="2">
+            <a:schemeClr val="accent1"/>
+          </a:effectRef>
+          <a:fontRef idx="minor">
+            <a:schemeClr val="lt1"/>
+          </a:fontRef>
+        </p:style>
+        <p:txBody>
+          <a:bodyPr rtlCol="0" anchor="ctr"/>
+          <a:lstStyle/>
+          <a:p>
+            <a:pPr algn="ctr"/>
+          </a:p>
+        </p:txBody>
+      </p:sp>
+      <p:sp>
+        <p:nvSpPr>
+          <p:cNvPr id="41" name="TextBox 40"/>
+          <p:cNvSpPr txBox="1"/>
+          <p:nvPr/>
+        </p:nvSpPr>
+        <p:spPr>
+          <a:xfrm>
+            <a:off x="475488" y="4407408"/>
+            <a:ext cx="128016" cy="219456"/>
+          </a:xfrm>
+          <a:prstGeom prst="rect">
+            <a:avLst/>
+          </a:prstGeom>
+          <a:noFill/>
+        </p:spPr>
+        <p:txBody>
+          <a:bodyPr wrap="square">
+            <a:spAutoFit/>
+          </a:bodyPr>
+          <a:lstStyle/>
+          <a:p>
+            <a:pPr algn="ctr"/>
+            <a:r>
+              <a:rPr sz="1200" b="1">
+                <a:solidFill>
+                  <a:srgbClr val="58A6FF"/>
+                </a:solidFill>
+              </a:rPr>
+              <a:t>7</a:t>
+            </a:r>
+          </a:p>
+        </p:txBody>
+      </p:sp>
+      <p:sp>
+        <p:nvSpPr>
+          <p:cNvPr id="42" name="Rectangle 41"/>
+          <p:cNvSpPr/>
+          <p:nvPr/>
+        </p:nvSpPr>
+        <p:spPr>
+          <a:xfrm>
+            <a:off x="804672" y="4297680"/>
+            <a:ext cx="2377440" cy="438912"/>
+          </a:xfrm>
+          <a:prstGeom prst="rect">
+            <a:avLst/>
+          </a:prstGeom>
+          <a:solidFill>
+            <a:srgbClr val="161B22"/>
+          </a:solidFill>
+          <a:ln w="9525">
+            <a:solidFill>
+              <a:srgbClr val="30363D"/>
+            </a:solidFill>
+          </a:ln>
+        </p:spPr>
+        <p:style>
+          <a:lnRef idx="1">
+            <a:schemeClr val="accent1"/>
+          </a:lnRef>
+          <a:fillRef idx="3">
+            <a:schemeClr val="accent1"/>
+          </a:fillRef>
+          <a:effectRef idx="2">
+            <a:schemeClr val="accent1"/>
+          </a:effectRef>
+          <a:fontRef idx="minor">
+            <a:schemeClr val="lt1"/>
+          </a:fontRef>
+        </p:style>
+        <p:txBody>
+          <a:bodyPr rtlCol="0" anchor="ctr"/>
+          <a:lstStyle/>
+          <a:p>
+            <a:pPr algn="ctr"/>
+          </a:p>
+        </p:txBody>
+      </p:sp>
+      <p:sp>
+        <p:nvSpPr>
+          <p:cNvPr id="43" name="TextBox 42"/>
+          <p:cNvSpPr txBox="1"/>
+          <p:nvPr/>
+        </p:nvSpPr>
+        <p:spPr>
+          <a:xfrm>
+            <a:off x="914400" y="4407408"/>
+            <a:ext cx="2157984" cy="219456"/>
+          </a:xfrm>
+          <a:prstGeom prst="rect">
+            <a:avLst/>
+          </a:prstGeom>
+          <a:noFill/>
+        </p:spPr>
+        <p:txBody>
+          <a:bodyPr wrap="square">
+            <a:spAutoFit/>
+          </a:bodyPr>
+          <a:lstStyle/>
+          <a:p>
+            <a:pPr algn="l"/>
+            <a:r>
+              <a:rPr sz="1200" b="1">
+                <a:solidFill>
+                  <a:srgbClr val="F0F6FC"/>
+                </a:solidFill>
+              </a:rPr>
+              <a:t>Run setup</a:t>
+            </a:r>
+          </a:p>
+        </p:txBody>
+      </p:sp>
+      <p:sp>
+        <p:nvSpPr>
+          <p:cNvPr id="44" name="Rectangle 43"/>
+          <p:cNvSpPr/>
+          <p:nvPr/>
+        </p:nvSpPr>
+        <p:spPr>
+          <a:xfrm>
+            <a:off x="3273552" y="4297680"/>
+            <a:ext cx="8869680" cy="438912"/>
+          </a:xfrm>
+          <a:prstGeom prst="rect">
+            <a:avLst/>
+          </a:prstGeom>
+          <a:solidFill>
+            <a:srgbClr val="0D1117"/>
+          </a:solidFill>
+          <a:ln w="9525">
+            <a:solidFill>
+              <a:srgbClr val="30363D"/>
+            </a:solidFill>
+          </a:ln>
+        </p:spPr>
+        <p:style>
+          <a:lnRef idx="1">
+            <a:schemeClr val="accent1"/>
+          </a:lnRef>
+          <a:fillRef idx="3">
+            <a:schemeClr val="accent1"/>
+          </a:fillRef>
+          <a:effectRef idx="2">
+            <a:schemeClr val="accent1"/>
+          </a:effectRef>
+          <a:fontRef idx="minor">
+            <a:schemeClr val="lt1"/>
+          </a:fontRef>
+        </p:style>
+        <p:txBody>
+          <a:bodyPr rtlCol="0" anchor="ctr"/>
+          <a:lstStyle/>
+          <a:p>
+            <a:pPr algn="ctr"/>
+          </a:p>
+        </p:txBody>
+      </p:sp>
+      <p:sp>
+        <p:nvSpPr>
+          <p:cNvPr id="45" name="TextBox 44"/>
+          <p:cNvSpPr txBox="1"/>
+          <p:nvPr/>
+        </p:nvSpPr>
+        <p:spPr>
+          <a:xfrm>
+            <a:off x="3383280" y="4407408"/>
+            <a:ext cx="8650224" cy="219456"/>
+          </a:xfrm>
+          <a:prstGeom prst="rect">
+            <a:avLst/>
+          </a:prstGeom>
+          <a:noFill/>
+        </p:spPr>
+        <p:txBody>
+          <a:bodyPr wrap="square">
+            <a:spAutoFit/>
+          </a:bodyPr>
+          <a:lstStyle/>
+          <a:p>
+            <a:pPr algn="l"/>
+            <a:r>
+              <a:rPr sz="1100" b="0">
+                <a:solidFill>
+                  <a:srgbClr val="8B949E"/>
+                </a:solidFill>
+              </a:rPr>
+              <a:t>python orchestrator/setup.py — generates mcp.json + copilot-instructions.md</a:t>
+            </a:r>
+          </a:p>
+        </p:txBody>
+      </p:sp>
+      <p:sp>
+        <p:nvSpPr>
+          <p:cNvPr id="46" name="Rectangle 45"/>
+          <p:cNvSpPr/>
+          <p:nvPr/>
+        </p:nvSpPr>
+        <p:spPr>
+          <a:xfrm>
+            <a:off x="365760" y="4800600"/>
+            <a:ext cx="347472" cy="438912"/>
+          </a:xfrm>
+          <a:prstGeom prst="rect">
+            <a:avLst/>
+          </a:prstGeom>
+          <a:solidFill>
+            <a:srgbClr val="1F3A5F"/>
+          </a:solidFill>
+          <a:ln w="9525">
+            <a:solidFill>
+              <a:srgbClr val="58A6FF"/>
+            </a:solidFill>
+          </a:ln>
+        </p:spPr>
+        <p:style>
+          <a:lnRef idx="1">
+            <a:schemeClr val="accent1"/>
+          </a:lnRef>
+          <a:fillRef idx="3">
+            <a:schemeClr val="accent1"/>
+          </a:fillRef>
+          <a:effectRef idx="2">
+            <a:schemeClr val="accent1"/>
+          </a:effectRef>
+          <a:fontRef idx="minor">
+            <a:schemeClr val="lt1"/>
+          </a:fontRef>
+        </p:style>
+        <p:txBody>
+          <a:bodyPr rtlCol="0" anchor="ctr"/>
+          <a:lstStyle/>
+          <a:p>
+            <a:pPr algn="ctr"/>
+          </a:p>
+        </p:txBody>
+      </p:sp>
+      <p:sp>
+        <p:nvSpPr>
+          <p:cNvPr id="47" name="TextBox 46"/>
+          <p:cNvSpPr txBox="1"/>
+          <p:nvPr/>
+        </p:nvSpPr>
+        <p:spPr>
+          <a:xfrm>
+            <a:off x="475488" y="4910328"/>
+            <a:ext cx="128016" cy="219456"/>
+          </a:xfrm>
+          <a:prstGeom prst="rect">
+            <a:avLst/>
+          </a:prstGeom>
+          <a:noFill/>
+        </p:spPr>
+        <p:txBody>
+          <a:bodyPr wrap="square">
+            <a:spAutoFit/>
+          </a:bodyPr>
+          <a:lstStyle/>
+          <a:p>
+            <a:pPr algn="ctr"/>
+            <a:r>
+              <a:rPr sz="1200" b="1">
+                <a:solidFill>
+                  <a:srgbClr val="58A6FF"/>
+                </a:solidFill>
+              </a:rPr>
+              <a:t>8</a:t>
+            </a:r>
+          </a:p>
+        </p:txBody>
+      </p:sp>
+      <p:sp>
+        <p:nvSpPr>
+          <p:cNvPr id="48" name="Rectangle 47"/>
+          <p:cNvSpPr/>
+          <p:nvPr/>
+        </p:nvSpPr>
+        <p:spPr>
+          <a:xfrm>
+            <a:off x="804672" y="4800600"/>
+            <a:ext cx="2377440" cy="438912"/>
+          </a:xfrm>
+          <a:prstGeom prst="rect">
+            <a:avLst/>
+          </a:prstGeom>
+          <a:solidFill>
+            <a:srgbClr val="161B22"/>
+          </a:solidFill>
+          <a:ln w="9525">
+            <a:solidFill>
+              <a:srgbClr val="30363D"/>
+            </a:solidFill>
+          </a:ln>
+        </p:spPr>
+        <p:style>
+          <a:lnRef idx="1">
+            <a:schemeClr val="accent1"/>
+          </a:lnRef>
+          <a:fillRef idx="3">
+            <a:schemeClr val="accent1"/>
+          </a:fillRef>
+          <a:effectRef idx="2">
+            <a:schemeClr val="accent1"/>
+          </a:effectRef>
+          <a:fontRef idx="minor">
+            <a:schemeClr val="lt1"/>
+          </a:fontRef>
+        </p:style>
+        <p:txBody>
+          <a:bodyPr rtlCol="0" anchor="ctr"/>
+          <a:lstStyle/>
+          <a:p>
+            <a:pPr algn="ctr"/>
+          </a:p>
+        </p:txBody>
+      </p:sp>
+      <p:sp>
+        <p:nvSpPr>
+          <p:cNvPr id="49" name="TextBox 48"/>
+          <p:cNvSpPr txBox="1"/>
+          <p:nvPr/>
+        </p:nvSpPr>
+        <p:spPr>
+          <a:xfrm>
+            <a:off x="914400" y="4910328"/>
+            <a:ext cx="2157984" cy="219456"/>
+          </a:xfrm>
+          <a:prstGeom prst="rect">
+            <a:avLst/>
+          </a:prstGeom>
+          <a:noFill/>
+        </p:spPr>
+        <p:txBody>
+          <a:bodyPr wrap="square">
+            <a:spAutoFit/>
+          </a:bodyPr>
+          <a:lstStyle/>
+          <a:p>
+            <a:pPr algn="l"/>
+            <a:r>
+              <a:rPr sz="1200" b="1">
+                <a:solidFill>
+                  <a:srgbClr val="F0F6FC"/>
+                </a:solidFill>
+              </a:rPr>
+              <a:t>Open in VS Code</a:t>
+            </a:r>
+          </a:p>
+        </p:txBody>
+      </p:sp>
+      <p:sp>
+        <p:nvSpPr>
+          <p:cNvPr id="50" name="Rectangle 49"/>
+          <p:cNvSpPr/>
+          <p:nvPr/>
+        </p:nvSpPr>
+        <p:spPr>
+          <a:xfrm>
+            <a:off x="3273552" y="4800600"/>
+            <a:ext cx="8869680" cy="438912"/>
+          </a:xfrm>
+          <a:prstGeom prst="rect">
+            <a:avLst/>
+          </a:prstGeom>
+          <a:solidFill>
+            <a:srgbClr val="0D1117"/>
+          </a:solidFill>
+          <a:ln w="9525">
+            <a:solidFill>
+              <a:srgbClr val="30363D"/>
+            </a:solidFill>
+          </a:ln>
+        </p:spPr>
+        <p:style>
+          <a:lnRef idx="1">
+            <a:schemeClr val="accent1"/>
+          </a:lnRef>
+          <a:fillRef idx="3">
+            <a:schemeClr val="accent1"/>
+          </a:fillRef>
+          <a:effectRef idx="2">
+            <a:schemeClr val="accent1"/>
+          </a:effectRef>
+          <a:fontRef idx="minor">
+            <a:schemeClr val="lt1"/>
+          </a:fontRef>
+        </p:style>
+        <p:txBody>
+          <a:bodyPr rtlCol="0" anchor="ctr"/>
+          <a:lstStyle/>
+          <a:p>
+            <a:pPr algn="ctr"/>
+          </a:p>
+        </p:txBody>
+      </p:sp>
+      <p:sp>
+        <p:nvSpPr>
+          <p:cNvPr id="51" name="TextBox 50"/>
+          <p:cNvSpPr txBox="1"/>
+          <p:nvPr/>
+        </p:nvSpPr>
+        <p:spPr>
+          <a:xfrm>
+            <a:off x="3383280" y="4910328"/>
+            <a:ext cx="8650224" cy="219456"/>
+          </a:xfrm>
+          <a:prstGeom prst="rect">
+            <a:avLst/>
+          </a:prstGeom>
+          <a:noFill/>
+        </p:spPr>
+        <p:txBody>
+          <a:bodyPr wrap="square">
+            <a:spAutoFit/>
+          </a:bodyPr>
+          <a:lstStyle/>
+          <a:p>
+            <a:pPr algn="l"/>
+            <a:r>
+              <a:rPr sz="1100" b="0">
+                <a:solidFill>
+                  <a:srgbClr val="8B949E"/>
+                </a:solidFill>
+              </a:rPr>
+              <a:t>source .venv/bin/activate  &amp;&amp;  code /path/to/repo</a:t>
+            </a:r>
+          </a:p>
+        </p:txBody>
+      </p:sp>
+      <p:sp>
+        <p:nvSpPr>
+          <p:cNvPr id="52" name="TextBox 51"/>
+          <p:cNvSpPr txBox="1"/>
+          <p:nvPr/>
+        </p:nvSpPr>
+        <p:spPr>
+          <a:xfrm>
+            <a:off x="365760" y="6446520"/>
+            <a:ext cx="11430000" cy="320040"/>
+          </a:xfrm>
+          <a:prstGeom prst="rect">
+            <a:avLst/>
+          </a:prstGeom>
+          <a:noFill/>
+        </p:spPr>
+        <p:txBody>
+          <a:bodyPr wrap="square">
+            <a:spAutoFit/>
+          </a:bodyPr>
+          <a:lstStyle/>
+          <a:p>
+            <a:pPr algn="ctr"/>
+            <a:r>
+              <a:rPr sz="1200" b="1">
+                <a:solidFill>
+                  <a:srgbClr val="F0883E"/>
+                </a:solidFill>
+              </a:rPr>
+              <a:t>★  Only config.yaml files are ever edited by the user — everything else is generated</a:t>
+            </a:r>
+          </a:p>
+        </p:txBody>
+      </p:sp>
+    </p:spTree>
+  </p:cSld>
+  <p:clrMapOvr>
+    <a:masterClrMapping/>
+  </p:clrMapOvr>
+</p:sld>
+</file>
+
+<file path=ppt/slides/slide11.xml><?xml version="1.0" encoding="utf-8"?>
+<p:sld xmlns:a="http://schemas.openxmlformats.org/drawingml/2006/main" xmlns:p="http://schemas.openxmlformats.org/presentationml/2006/main" xmlns:r="http://schemas.openxmlformats.org/officeDocument/2006/relationships">
+  <p:cSld>
+    <p:bg>
+      <p:bgPr>
+        <a:solidFill>
+          <a:srgbClr val="0D1117"/>
+        </a:solidFill>
+        <a:effectLst/>
+      </p:bgPr>
+    </p:bg>
+    <p:spTree>
+      <p:nvGrpSpPr>
+        <p:cNvPr id="1" name=""/>
+        <p:cNvGrpSpPr/>
+        <p:nvPr/>
+      </p:nvGrpSpPr>
+      <p:grpSpPr/>
+      <p:sp>
+        <p:nvSpPr>
+          <p:cNvPr id="2" name="TextBox 1"/>
+          <p:cNvSpPr txBox="1"/>
+          <p:nvPr/>
+        </p:nvSpPr>
+        <p:spPr>
+          <a:xfrm>
             <a:off x="457200" y="457200"/>
             <a:ext cx="9144000" cy="274320"/>
           </a:xfrm>
@@ -13067,8 +15092,8 @@
         </p:nvSpPr>
         <p:spPr>
           <a:xfrm>
-            <a:off x="457200" y="274320"/>
-            <a:ext cx="9144000" cy="274320"/>
+            <a:off x="365760" y="137160"/>
+            <a:ext cx="11430000" cy="256032"/>
           </a:xfrm>
           <a:prstGeom prst="rect">
             <a:avLst/>
@@ -13088,7 +15113,7 @@
                   <a:srgbClr val="58A6FF"/>
                 </a:solidFill>
               </a:rPr>
-              <a:t>SETUP</a:t>
+              <a:t>COMPONENT DIAGRAM</a:t>
             </a:r>
           </a:p>
         </p:txBody>
@@ -13101,28 +15126,28 @@
         </p:nvSpPr>
         <p:spPr>
           <a:xfrm>
-            <a:off x="457200" y="548640"/>
-            <a:ext cx="11247120" cy="457200"/>
-          </a:xfrm>
-          <a:prstGeom prst="rect">
-            <a:avLst/>
-          </a:prstGeom>
-          <a:noFill/>
-        </p:spPr>
-        <p:txBody>
-          <a:bodyPr wrap="square">
-            <a:spAutoFit/>
-          </a:bodyPr>
-          <a:lstStyle/>
-          <a:p>
-            <a:pPr algn="ctr"/>
-            <a:r>
-              <a:rPr sz="2800" b="1">
+            <a:off x="365760" y="411480"/>
+            <a:ext cx="11430000" cy="365760"/>
+          </a:xfrm>
+          <a:prstGeom prst="rect">
+            <a:avLst/>
+          </a:prstGeom>
+          <a:noFill/>
+        </p:spPr>
+        <p:txBody>
+          <a:bodyPr wrap="square">
+            <a:spAutoFit/>
+          </a:bodyPr>
+          <a:lstStyle/>
+          <a:p>
+            <a:pPr algn="ctr"/>
+            <a:r>
+              <a:rPr sz="2200" b="1">
                 <a:solidFill>
                   <a:srgbClr val="F0F6FC"/>
                 </a:solidFill>
               </a:rPr>
-              <a:t>What the user does — once</a:t>
+              <a:t>MCP Tool Calling &amp; RAG Knowledge Pipeline</a:t>
             </a:r>
           </a:p>
         </p:txBody>
@@ -13135,14 +15160,174 @@
         </p:nvSpPr>
         <p:spPr>
           <a:xfrm>
-            <a:off x="365760" y="1280160"/>
-            <a:ext cx="347472" cy="438912"/>
+            <a:off x="4206240" y="841248"/>
+            <a:ext cx="2743200" cy="502920"/>
           </a:xfrm>
           <a:prstGeom prst="rect">
             <a:avLst/>
           </a:prstGeom>
           <a:solidFill>
-            <a:srgbClr val="1F3A5F"/>
+            <a:srgbClr val="2D1F47"/>
+          </a:solidFill>
+          <a:ln w="9525">
+            <a:solidFill>
+              <a:srgbClr val="BC8CFF"/>
+            </a:solidFill>
+          </a:ln>
+        </p:spPr>
+        <p:style>
+          <a:lnRef idx="1">
+            <a:schemeClr val="accent1"/>
+          </a:lnRef>
+          <a:fillRef idx="3">
+            <a:schemeClr val="accent1"/>
+          </a:fillRef>
+          <a:effectRef idx="2">
+            <a:schemeClr val="accent1"/>
+          </a:effectRef>
+          <a:fontRef idx="minor">
+            <a:schemeClr val="lt1"/>
+          </a:fontRef>
+        </p:style>
+        <p:txBody>
+          <a:bodyPr rtlCol="0" anchor="ctr"/>
+          <a:lstStyle/>
+          <a:p>
+            <a:pPr algn="ctr"/>
+          </a:p>
+        </p:txBody>
+      </p:sp>
+      <p:sp>
+        <p:nvSpPr>
+          <p:cNvPr id="5" name="TextBox 4"/>
+          <p:cNvSpPr txBox="1"/>
+          <p:nvPr/>
+        </p:nvSpPr>
+        <p:spPr>
+          <a:xfrm>
+            <a:off x="4233672" y="877824"/>
+            <a:ext cx="2688336" cy="420624"/>
+          </a:xfrm>
+          <a:prstGeom prst="rect">
+            <a:avLst/>
+          </a:prstGeom>
+          <a:noFill/>
+        </p:spPr>
+        <p:txBody>
+          <a:bodyPr wrap="square">
+            <a:spAutoFit/>
+          </a:bodyPr>
+          <a:lstStyle/>
+          <a:p>
+            <a:pPr algn="ctr"/>
+            <a:r>
+              <a:rPr sz="1200" b="1">
+                <a:solidFill>
+                  <a:srgbClr val="BC8CFF"/>
+                </a:solidFill>
+              </a:rPr>
+              <a:t>GitHub Copilot  (Agent Mode)</a:t>
+            </a:r>
+          </a:p>
+        </p:txBody>
+      </p:sp>
+      <p:sp>
+        <p:nvSpPr>
+          <p:cNvPr id="6" name="Rectangle 5"/>
+          <p:cNvSpPr/>
+          <p:nvPr/>
+        </p:nvSpPr>
+        <p:spPr>
+          <a:xfrm>
+            <a:off x="274320" y="1965960"/>
+            <a:ext cx="2606040" cy="822960"/>
+          </a:xfrm>
+          <a:prstGeom prst="rect">
+            <a:avLst/>
+          </a:prstGeom>
+          <a:solidFill>
+            <a:srgbClr val="0D1F12"/>
+          </a:solidFill>
+          <a:ln w="9525">
+            <a:solidFill>
+              <a:srgbClr val="3FB950"/>
+            </a:solidFill>
+          </a:ln>
+        </p:spPr>
+        <p:style>
+          <a:lnRef idx="1">
+            <a:schemeClr val="accent1"/>
+          </a:lnRef>
+          <a:fillRef idx="3">
+            <a:schemeClr val="accent1"/>
+          </a:fillRef>
+          <a:effectRef idx="2">
+            <a:schemeClr val="accent1"/>
+          </a:effectRef>
+          <a:fontRef idx="minor">
+            <a:schemeClr val="lt1"/>
+          </a:fontRef>
+        </p:style>
+        <p:txBody>
+          <a:bodyPr rtlCol="0" anchor="ctr"/>
+          <a:lstStyle/>
+          <a:p>
+            <a:pPr algn="ctr"/>
+          </a:p>
+        </p:txBody>
+      </p:sp>
+      <p:sp>
+        <p:nvSpPr>
+          <p:cNvPr id="7" name="TextBox 6"/>
+          <p:cNvSpPr txBox="1"/>
+          <p:nvPr/>
+        </p:nvSpPr>
+        <p:spPr>
+          <a:xfrm>
+            <a:off x="310896" y="2020824"/>
+            <a:ext cx="2532888" cy="713232"/>
+          </a:xfrm>
+          <a:prstGeom prst="rect">
+            <a:avLst/>
+          </a:prstGeom>
+          <a:noFill/>
+        </p:spPr>
+        <p:txBody>
+          <a:bodyPr wrap="square">
+            <a:spAutoFit/>
+          </a:bodyPr>
+          <a:lstStyle/>
+          <a:p>
+            <a:pPr algn="ctr"/>
+            <a:r>
+              <a:rPr sz="1000" b="0">
+                <a:solidFill>
+                  <a:srgbClr val="3FB950"/>
+                </a:solidFill>
+              </a:rPr>
+              <a:t>Orchestrator
+router_mcp_server.py
+« get_relevant_repos »</a:t>
+            </a:r>
+          </a:p>
+        </p:txBody>
+      </p:sp>
+      <p:sp>
+        <p:nvSpPr>
+          <p:cNvPr id="8" name="Rectangle 7"/>
+          <p:cNvSpPr/>
+          <p:nvPr/>
+        </p:nvSpPr>
+        <p:spPr>
+          <a:xfrm>
+            <a:off x="3520440" y="1371600"/>
+            <a:ext cx="2560320" cy="566928"/>
+          </a:xfrm>
+          <a:prstGeom prst="rect">
+            <a:avLst/>
+          </a:prstGeom>
+          <a:solidFill>
+            <a:srgbClr val="0D1F35"/>
           </a:solidFill>
           <a:ln w="9525">
             <a:solidFill>
@@ -13174,212 +15359,88 @@
       </p:sp>
       <p:sp>
         <p:nvSpPr>
-          <p:cNvPr id="5" name="TextBox 4"/>
-          <p:cNvSpPr txBox="1"/>
-          <p:nvPr/>
-        </p:nvSpPr>
-        <p:spPr>
-          <a:xfrm>
-            <a:off x="475488" y="1389888"/>
-            <a:ext cx="128016" cy="219456"/>
-          </a:xfrm>
-          <a:prstGeom prst="rect">
-            <a:avLst/>
-          </a:prstGeom>
-          <a:noFill/>
-        </p:spPr>
-        <p:txBody>
-          <a:bodyPr wrap="square">
-            <a:spAutoFit/>
-          </a:bodyPr>
-          <a:lstStyle/>
-          <a:p>
-            <a:pPr algn="ctr"/>
-            <a:r>
-              <a:rPr sz="1200" b="1">
+          <p:cNvPr id="9" name="TextBox 8"/>
+          <p:cNvSpPr txBox="1"/>
+          <p:nvPr/>
+        </p:nvSpPr>
+        <p:spPr>
+          <a:xfrm>
+            <a:off x="3547872" y="1408176"/>
+            <a:ext cx="2505456" cy="256032"/>
+          </a:xfrm>
+          <a:prstGeom prst="rect">
+            <a:avLst/>
+          </a:prstGeom>
+          <a:noFill/>
+        </p:spPr>
+        <p:txBody>
+          <a:bodyPr wrap="square">
+            <a:spAutoFit/>
+          </a:bodyPr>
+          <a:lstStyle/>
+          <a:p>
+            <a:pPr algn="ctr"/>
+            <a:r>
+              <a:rPr sz="1100" b="1">
                 <a:solidFill>
                   <a:srgbClr val="58A6FF"/>
                 </a:solidFill>
               </a:rPr>
-              <a:t>1</a:t>
-            </a:r>
-          </a:p>
-        </p:txBody>
-      </p:sp>
-      <p:sp>
-        <p:nvSpPr>
-          <p:cNvPr id="6" name="Rectangle 5"/>
+              <a:t>scan_manager</a:t>
+            </a:r>
+          </a:p>
+        </p:txBody>
+      </p:sp>
+      <p:sp>
+        <p:nvSpPr>
+          <p:cNvPr id="10" name="TextBox 9"/>
+          <p:cNvSpPr txBox="1"/>
+          <p:nvPr/>
+        </p:nvSpPr>
+        <p:spPr>
+          <a:xfrm>
+            <a:off x="3547872" y="1682496"/>
+            <a:ext cx="2505456" cy="201168"/>
+          </a:xfrm>
+          <a:prstGeom prst="rect">
+            <a:avLst/>
+          </a:prstGeom>
+          <a:noFill/>
+        </p:spPr>
+        <p:txBody>
+          <a:bodyPr wrap="square">
+            <a:spAutoFit/>
+          </a:bodyPr>
+          <a:lstStyle/>
+          <a:p>
+            <a:pPr algn="ctr"/>
+            <a:r>
+              <a:rPr sz="900" b="0">
+                <a:solidFill>
+                  <a:srgbClr val="58A6FF"/>
+                </a:solidFill>
+              </a:rPr>
+              <a:t>mcp_server.py  « query_repo »</a:t>
+            </a:r>
+          </a:p>
+        </p:txBody>
+      </p:sp>
+      <p:sp>
+        <p:nvSpPr>
+          <p:cNvPr id="11" name="Rectangle 10"/>
           <p:cNvSpPr/>
           <p:nvPr/>
         </p:nvSpPr>
         <p:spPr>
           <a:xfrm>
-            <a:off x="804672" y="1280160"/>
-            <a:ext cx="2377440" cy="438912"/>
+            <a:off x="3520440" y="2286000"/>
+            <a:ext cx="2560320" cy="566928"/>
           </a:xfrm>
           <a:prstGeom prst="rect">
             <a:avLst/>
           </a:prstGeom>
           <a:solidFill>
-            <a:srgbClr val="161B22"/>
-          </a:solidFill>
-          <a:ln w="9525">
-            <a:solidFill>
-              <a:srgbClr val="30363D"/>
-            </a:solidFill>
-          </a:ln>
-        </p:spPr>
-        <p:style>
-          <a:lnRef idx="1">
-            <a:schemeClr val="accent1"/>
-          </a:lnRef>
-          <a:fillRef idx="3">
-            <a:schemeClr val="accent1"/>
-          </a:fillRef>
-          <a:effectRef idx="2">
-            <a:schemeClr val="accent1"/>
-          </a:effectRef>
-          <a:fontRef idx="minor">
-            <a:schemeClr val="lt1"/>
-          </a:fontRef>
-        </p:style>
-        <p:txBody>
-          <a:bodyPr rtlCol="0" anchor="ctr"/>
-          <a:lstStyle/>
-          <a:p>
-            <a:pPr algn="ctr"/>
-          </a:p>
-        </p:txBody>
-      </p:sp>
-      <p:sp>
-        <p:nvSpPr>
-          <p:cNvPr id="7" name="TextBox 6"/>
-          <p:cNvSpPr txBox="1"/>
-          <p:nvPr/>
-        </p:nvSpPr>
-        <p:spPr>
-          <a:xfrm>
-            <a:off x="914400" y="1389888"/>
-            <a:ext cx="2157984" cy="219456"/>
-          </a:xfrm>
-          <a:prstGeom prst="rect">
-            <a:avLst/>
-          </a:prstGeom>
-          <a:noFill/>
-        </p:spPr>
-        <p:txBody>
-          <a:bodyPr wrap="square">
-            <a:spAutoFit/>
-          </a:bodyPr>
-          <a:lstStyle/>
-          <a:p>
-            <a:pPr algn="l"/>
-            <a:r>
-              <a:rPr sz="1200" b="1">
-                <a:solidFill>
-                  <a:srgbClr val="F0F6FC"/>
-                </a:solidFill>
-              </a:rPr>
-              <a:t>Clone framework</a:t>
-            </a:r>
-          </a:p>
-        </p:txBody>
-      </p:sp>
-      <p:sp>
-        <p:nvSpPr>
-          <p:cNvPr id="8" name="Rectangle 7"/>
-          <p:cNvSpPr/>
-          <p:nvPr/>
-        </p:nvSpPr>
-        <p:spPr>
-          <a:xfrm>
-            <a:off x="3273552" y="1280160"/>
-            <a:ext cx="8869680" cy="438912"/>
-          </a:xfrm>
-          <a:prstGeom prst="rect">
-            <a:avLst/>
-          </a:prstGeom>
-          <a:solidFill>
-            <a:srgbClr val="0D1117"/>
-          </a:solidFill>
-          <a:ln w="9525">
-            <a:solidFill>
-              <a:srgbClr val="30363D"/>
-            </a:solidFill>
-          </a:ln>
-        </p:spPr>
-        <p:style>
-          <a:lnRef idx="1">
-            <a:schemeClr val="accent1"/>
-          </a:lnRef>
-          <a:fillRef idx="3">
-            <a:schemeClr val="accent1"/>
-          </a:fillRef>
-          <a:effectRef idx="2">
-            <a:schemeClr val="accent1"/>
-          </a:effectRef>
-          <a:fontRef idx="minor">
-            <a:schemeClr val="lt1"/>
-          </a:fontRef>
-        </p:style>
-        <p:txBody>
-          <a:bodyPr rtlCol="0" anchor="ctr"/>
-          <a:lstStyle/>
-          <a:p>
-            <a:pPr algn="ctr"/>
-          </a:p>
-        </p:txBody>
-      </p:sp>
-      <p:sp>
-        <p:nvSpPr>
-          <p:cNvPr id="9" name="TextBox 8"/>
-          <p:cNvSpPr txBox="1"/>
-          <p:nvPr/>
-        </p:nvSpPr>
-        <p:spPr>
-          <a:xfrm>
-            <a:off x="3383280" y="1389888"/>
-            <a:ext cx="8650224" cy="219456"/>
-          </a:xfrm>
-          <a:prstGeom prst="rect">
-            <a:avLst/>
-          </a:prstGeom>
-          <a:noFill/>
-        </p:spPr>
-        <p:txBody>
-          <a:bodyPr wrap="square">
-            <a:spAutoFit/>
-          </a:bodyPr>
-          <a:lstStyle/>
-          <a:p>
-            <a:pPr algn="l"/>
-            <a:r>
-              <a:rPr sz="1100" b="0">
-                <a:solidFill>
-                  <a:srgbClr val="8B949E"/>
-                </a:solidFill>
-              </a:rPr>
-              <a:t>git clone &lt;this repo&gt;</a:t>
-            </a:r>
-          </a:p>
-        </p:txBody>
-      </p:sp>
-      <p:sp>
-        <p:nvSpPr>
-          <p:cNvPr id="10" name="Rectangle 9"/>
-          <p:cNvSpPr/>
-          <p:nvPr/>
-        </p:nvSpPr>
-        <p:spPr>
-          <a:xfrm>
-            <a:off x="365760" y="1783080"/>
-            <a:ext cx="347472" cy="438912"/>
-          </a:xfrm>
-          <a:prstGeom prst="rect">
-            <a:avLst/>
-          </a:prstGeom>
-          <a:solidFill>
-            <a:srgbClr val="1F3A5F"/>
+            <a:srgbClr val="0D1F35"/>
           </a:solidFill>
           <a:ln w="9525">
             <a:solidFill>
@@ -13411,80 +15472,35 @@
       </p:sp>
       <p:sp>
         <p:nvSpPr>
-          <p:cNvPr id="11" name="TextBox 10"/>
-          <p:cNvSpPr txBox="1"/>
-          <p:nvPr/>
-        </p:nvSpPr>
-        <p:spPr>
-          <a:xfrm>
-            <a:off x="475488" y="1892808"/>
-            <a:ext cx="128016" cy="219456"/>
-          </a:xfrm>
-          <a:prstGeom prst="rect">
-            <a:avLst/>
-          </a:prstGeom>
-          <a:noFill/>
-        </p:spPr>
-        <p:txBody>
-          <a:bodyPr wrap="square">
-            <a:spAutoFit/>
-          </a:bodyPr>
-          <a:lstStyle/>
-          <a:p>
-            <a:pPr algn="ctr"/>
-            <a:r>
-              <a:rPr sz="1200" b="1">
+          <p:cNvPr id="12" name="TextBox 11"/>
+          <p:cNvSpPr txBox="1"/>
+          <p:nvPr/>
+        </p:nvSpPr>
+        <p:spPr>
+          <a:xfrm>
+            <a:off x="3547872" y="2322576"/>
+            <a:ext cx="2505456" cy="256032"/>
+          </a:xfrm>
+          <a:prstGeom prst="rect">
+            <a:avLst/>
+          </a:prstGeom>
+          <a:noFill/>
+        </p:spPr>
+        <p:txBody>
+          <a:bodyPr wrap="square">
+            <a:spAutoFit/>
+          </a:bodyPr>
+          <a:lstStyle/>
+          <a:p>
+            <a:pPr algn="ctr"/>
+            <a:r>
+              <a:rPr sz="1100" b="1">
                 <a:solidFill>
                   <a:srgbClr val="58A6FF"/>
                 </a:solidFill>
               </a:rPr>
-              <a:t>2</a:t>
-            </a:r>
-          </a:p>
-        </p:txBody>
-      </p:sp>
-      <p:sp>
-        <p:nvSpPr>
-          <p:cNvPr id="12" name="Rectangle 11"/>
-          <p:cNvSpPr/>
-          <p:nvPr/>
-        </p:nvSpPr>
-        <p:spPr>
-          <a:xfrm>
-            <a:off x="804672" y="1783080"/>
-            <a:ext cx="2377440" cy="438912"/>
-          </a:xfrm>
-          <a:prstGeom prst="rect">
-            <a:avLst/>
-          </a:prstGeom>
-          <a:solidFill>
-            <a:srgbClr val="161B22"/>
-          </a:solidFill>
-          <a:ln w="9525">
-            <a:solidFill>
-              <a:srgbClr val="30363D"/>
-            </a:solidFill>
-          </a:ln>
-        </p:spPr>
-        <p:style>
-          <a:lnRef idx="1">
-            <a:schemeClr val="accent1"/>
-          </a:lnRef>
-          <a:fillRef idx="3">
-            <a:schemeClr val="accent1"/>
-          </a:fillRef>
-          <a:effectRef idx="2">
-            <a:schemeClr val="accent1"/>
-          </a:effectRef>
-          <a:fontRef idx="minor">
-            <a:schemeClr val="lt1"/>
-          </a:fontRef>
-        </p:style>
-        <p:txBody>
-          <a:bodyPr rtlCol="0" anchor="ctr"/>
-          <a:lstStyle/>
-          <a:p>
-            <a:pPr algn="ctr"/>
+              <a:t>illumination</a:t>
+            </a:r>
           </a:p>
         </p:txBody>
       </p:sp>
@@ -13496,28 +15512,28 @@
         </p:nvSpPr>
         <p:spPr>
           <a:xfrm>
-            <a:off x="914400" y="1892808"/>
-            <a:ext cx="2157984" cy="219456"/>
-          </a:xfrm>
-          <a:prstGeom prst="rect">
-            <a:avLst/>
-          </a:prstGeom>
-          <a:noFill/>
-        </p:spPr>
-        <p:txBody>
-          <a:bodyPr wrap="square">
-            <a:spAutoFit/>
-          </a:bodyPr>
-          <a:lstStyle/>
-          <a:p>
-            <a:pPr algn="l"/>
-            <a:r>
-              <a:rPr sz="1200" b="1">
-                <a:solidFill>
-                  <a:srgbClr val="F0F6FC"/>
-                </a:solidFill>
-              </a:rPr>
-              <a:t>Copy embedding model</a:t>
+            <a:off x="3547872" y="2596896"/>
+            <a:ext cx="2505456" cy="201168"/>
+          </a:xfrm>
+          <a:prstGeom prst="rect">
+            <a:avLst/>
+          </a:prstGeom>
+          <a:noFill/>
+        </p:spPr>
+        <p:txBody>
+          <a:bodyPr wrap="square">
+            <a:spAutoFit/>
+          </a:bodyPr>
+          <a:lstStyle/>
+          <a:p>
+            <a:pPr algn="ctr"/>
+            <a:r>
+              <a:rPr sz="900" b="0">
+                <a:solidFill>
+                  <a:srgbClr val="58A6FF"/>
+                </a:solidFill>
+              </a:rPr>
+              <a:t>mcp_server.py  « query_repo »</a:t>
             </a:r>
           </a:p>
         </p:txBody>
@@ -13530,93 +15546,14 @@
         </p:nvSpPr>
         <p:spPr>
           <a:xfrm>
-            <a:off x="3273552" y="1783080"/>
-            <a:ext cx="8869680" cy="438912"/>
+            <a:off x="3520440" y="3200400"/>
+            <a:ext cx="2560320" cy="566928"/>
           </a:xfrm>
           <a:prstGeom prst="rect">
             <a:avLst/>
           </a:prstGeom>
           <a:solidFill>
-            <a:srgbClr val="0D1117"/>
-          </a:solidFill>
-          <a:ln w="9525">
-            <a:solidFill>
-              <a:srgbClr val="30363D"/>
-            </a:solidFill>
-          </a:ln>
-        </p:spPr>
-        <p:style>
-          <a:lnRef idx="1">
-            <a:schemeClr val="accent1"/>
-          </a:lnRef>
-          <a:fillRef idx="3">
-            <a:schemeClr val="accent1"/>
-          </a:fillRef>
-          <a:effectRef idx="2">
-            <a:schemeClr val="accent1"/>
-          </a:effectRef>
-          <a:fontRef idx="minor">
-            <a:schemeClr val="lt1"/>
-          </a:fontRef>
-        </p:style>
-        <p:txBody>
-          <a:bodyPr rtlCol="0" anchor="ctr"/>
-          <a:lstStyle/>
-          <a:p>
-            <a:pPr algn="ctr"/>
-          </a:p>
-        </p:txBody>
-      </p:sp>
-      <p:sp>
-        <p:nvSpPr>
-          <p:cNvPr id="15" name="TextBox 14"/>
-          <p:cNvSpPr txBox="1"/>
-          <p:nvPr/>
-        </p:nvSpPr>
-        <p:spPr>
-          <a:xfrm>
-            <a:off x="3383280" y="1892808"/>
-            <a:ext cx="8650224" cy="219456"/>
-          </a:xfrm>
-          <a:prstGeom prst="rect">
-            <a:avLst/>
-          </a:prstGeom>
-          <a:noFill/>
-        </p:spPr>
-        <p:txBody>
-          <a:bodyPr wrap="square">
-            <a:spAutoFit/>
-          </a:bodyPr>
-          <a:lstStyle/>
-          <a:p>
-            <a:pPr algn="l"/>
-            <a:r>
-              <a:rPr sz="1100" b="0">
-                <a:solidFill>
-                  <a:srgbClr val="8B949E"/>
-                </a:solidFill>
-              </a:rPr>
-              <a:t>Copy models/all-MiniLM-L6-v2/ into repo root  (offline, ~90 MB)</a:t>
-            </a:r>
-          </a:p>
-        </p:txBody>
-      </p:sp>
-      <p:sp>
-        <p:nvSpPr>
-          <p:cNvPr id="16" name="Rectangle 15"/>
-          <p:cNvSpPr/>
-          <p:nvPr/>
-        </p:nvSpPr>
-        <p:spPr>
-          <a:xfrm>
-            <a:off x="365760" y="2286000"/>
-            <a:ext cx="347472" cy="438912"/>
-          </a:xfrm>
-          <a:prstGeom prst="rect">
-            <a:avLst/>
-          </a:prstGeom>
-          <a:solidFill>
-            <a:srgbClr val="1F3A5F"/>
+            <a:srgbClr val="0D1F35"/>
           </a:solidFill>
           <a:ln w="9525">
             <a:solidFill>
@@ -13648,48 +15585,243 @@
       </p:sp>
       <p:sp>
         <p:nvSpPr>
-          <p:cNvPr id="17" name="TextBox 16"/>
-          <p:cNvSpPr txBox="1"/>
-          <p:nvPr/>
-        </p:nvSpPr>
-        <p:spPr>
-          <a:xfrm>
-            <a:off x="475488" y="2395728"/>
-            <a:ext cx="128016" cy="219456"/>
-          </a:xfrm>
-          <a:prstGeom prst="rect">
-            <a:avLst/>
-          </a:prstGeom>
-          <a:noFill/>
-        </p:spPr>
-        <p:txBody>
-          <a:bodyPr wrap="square">
-            <a:spAutoFit/>
-          </a:bodyPr>
-          <a:lstStyle/>
-          <a:p>
-            <a:pPr algn="ctr"/>
-            <a:r>
-              <a:rPr sz="1200" b="1">
+          <p:cNvPr id="15" name="TextBox 14"/>
+          <p:cNvSpPr txBox="1"/>
+          <p:nvPr/>
+        </p:nvSpPr>
+        <p:spPr>
+          <a:xfrm>
+            <a:off x="3547872" y="3236976"/>
+            <a:ext cx="2505456" cy="256032"/>
+          </a:xfrm>
+          <a:prstGeom prst="rect">
+            <a:avLst/>
+          </a:prstGeom>
+          <a:noFill/>
+        </p:spPr>
+        <p:txBody>
+          <a:bodyPr wrap="square">
+            <a:spAutoFit/>
+          </a:bodyPr>
+          <a:lstStyle/>
+          <a:p>
+            <a:pPr algn="ctr"/>
+            <a:r>
+              <a:rPr sz="1100" b="1">
                 <a:solidFill>
                   <a:srgbClr val="58A6FF"/>
                 </a:solidFill>
               </a:rPr>
-              <a:t>3</a:t>
-            </a:r>
-          </a:p>
-        </p:txBody>
-      </p:sp>
-      <p:sp>
-        <p:nvSpPr>
-          <p:cNvPr id="18" name="Rectangle 17"/>
+              <a:t>expose_sequence</a:t>
+            </a:r>
+          </a:p>
+        </p:txBody>
+      </p:sp>
+      <p:sp>
+        <p:nvSpPr>
+          <p:cNvPr id="16" name="TextBox 15"/>
+          <p:cNvSpPr txBox="1"/>
+          <p:nvPr/>
+        </p:nvSpPr>
+        <p:spPr>
+          <a:xfrm>
+            <a:off x="3547872" y="3511296"/>
+            <a:ext cx="2505456" cy="201168"/>
+          </a:xfrm>
+          <a:prstGeom prst="rect">
+            <a:avLst/>
+          </a:prstGeom>
+          <a:noFill/>
+        </p:spPr>
+        <p:txBody>
+          <a:bodyPr wrap="square">
+            <a:spAutoFit/>
+          </a:bodyPr>
+          <a:lstStyle/>
+          <a:p>
+            <a:pPr algn="ctr"/>
+            <a:r>
+              <a:rPr sz="900" b="0">
+                <a:solidFill>
+                  <a:srgbClr val="58A6FF"/>
+                </a:solidFill>
+              </a:rPr>
+              <a:t>mcp_server.py  « query_repo »</a:t>
+            </a:r>
+          </a:p>
+        </p:txBody>
+      </p:sp>
+      <p:sp>
+        <p:nvSpPr>
+          <p:cNvPr id="17" name="Rectangle 16"/>
           <p:cNvSpPr/>
           <p:nvPr/>
         </p:nvSpPr>
         <p:spPr>
           <a:xfrm>
-            <a:off x="804672" y="2286000"/>
-            <a:ext cx="2377440" cy="438912"/>
+            <a:off x="6675120" y="1920240"/>
+            <a:ext cx="2377440" cy="960120"/>
+          </a:xfrm>
+          <a:prstGeom prst="rect">
+            <a:avLst/>
+          </a:prstGeom>
+          <a:solidFill>
+            <a:srgbClr val="2A1600"/>
+          </a:solidFill>
+          <a:ln w="9525">
+            <a:solidFill>
+              <a:srgbClr val="F0883E"/>
+            </a:solidFill>
+          </a:ln>
+        </p:spPr>
+        <p:style>
+          <a:lnRef idx="1">
+            <a:schemeClr val="accent1"/>
+          </a:lnRef>
+          <a:fillRef idx="3">
+            <a:schemeClr val="accent1"/>
+          </a:fillRef>
+          <a:effectRef idx="2">
+            <a:schemeClr val="accent1"/>
+          </a:effectRef>
+          <a:fontRef idx="minor">
+            <a:schemeClr val="lt1"/>
+          </a:fontRef>
+        </p:style>
+        <p:txBody>
+          <a:bodyPr rtlCol="0" anchor="ctr"/>
+          <a:lstStyle/>
+          <a:p>
+            <a:pPr algn="ctr"/>
+          </a:p>
+        </p:txBody>
+      </p:sp>
+      <p:sp>
+        <p:nvSpPr>
+          <p:cNvPr id="18" name="TextBox 17"/>
+          <p:cNvSpPr txBox="1"/>
+          <p:nvPr/>
+        </p:nvSpPr>
+        <p:spPr>
+          <a:xfrm>
+            <a:off x="6711696" y="1984248"/>
+            <a:ext cx="2304288" cy="832104"/>
+          </a:xfrm>
+          <a:prstGeom prst="rect">
+            <a:avLst/>
+          </a:prstGeom>
+          <a:noFill/>
+        </p:spPr>
+        <p:txBody>
+          <a:bodyPr wrap="square">
+            <a:spAutoFit/>
+          </a:bodyPr>
+          <a:lstStyle/>
+          <a:p>
+            <a:pPr algn="ctr"/>
+            <a:r>
+              <a:rPr sz="1100" b="0">
+                <a:solidFill>
+                  <a:srgbClr val="F0883E"/>
+                </a:solidFill>
+              </a:rPr>
+              <a:t>RAG Engine
+repo_rag.py
+semantic + keyword search</a:t>
+            </a:r>
+          </a:p>
+        </p:txBody>
+      </p:sp>
+      <p:sp>
+        <p:nvSpPr>
+          <p:cNvPr id="19" name="Rectangle 18"/>
+          <p:cNvSpPr/>
+          <p:nvPr/>
+        </p:nvSpPr>
+        <p:spPr>
+          <a:xfrm>
+            <a:off x="6675120" y="3657600"/>
+            <a:ext cx="2377440" cy="640080"/>
+          </a:xfrm>
+          <a:prstGeom prst="rect">
+            <a:avLst/>
+          </a:prstGeom>
+          <a:solidFill>
+            <a:srgbClr val="0D1F12"/>
+          </a:solidFill>
+          <a:ln w="9525">
+            <a:solidFill>
+              <a:srgbClr val="3FB950"/>
+            </a:solidFill>
+          </a:ln>
+        </p:spPr>
+        <p:style>
+          <a:lnRef idx="1">
+            <a:schemeClr val="accent1"/>
+          </a:lnRef>
+          <a:fillRef idx="3">
+            <a:schemeClr val="accent1"/>
+          </a:fillRef>
+          <a:effectRef idx="2">
+            <a:schemeClr val="accent1"/>
+          </a:effectRef>
+          <a:fontRef idx="minor">
+            <a:schemeClr val="lt1"/>
+          </a:fontRef>
+        </p:style>
+        <p:txBody>
+          <a:bodyPr rtlCol="0" anchor="ctr"/>
+          <a:lstStyle/>
+          <a:p>
+            <a:pPr algn="ctr"/>
+          </a:p>
+        </p:txBody>
+      </p:sp>
+      <p:sp>
+        <p:nvSpPr>
+          <p:cNvPr id="20" name="TextBox 19"/>
+          <p:cNvSpPr txBox="1"/>
+          <p:nvPr/>
+        </p:nvSpPr>
+        <p:spPr>
+          <a:xfrm>
+            <a:off x="6711696" y="3712463"/>
+            <a:ext cx="2304288" cy="530352"/>
+          </a:xfrm>
+          <a:prstGeom prst="rect">
+            <a:avLst/>
+          </a:prstGeom>
+          <a:noFill/>
+        </p:spPr>
+        <p:txBody>
+          <a:bodyPr wrap="square">
+            <a:spAutoFit/>
+          </a:bodyPr>
+          <a:lstStyle/>
+          <a:p>
+            <a:pPr algn="ctr"/>
+            <a:r>
+              <a:rPr sz="1100" b="0">
+                <a:solidFill>
+                  <a:srgbClr val="3FB950"/>
+                </a:solidFill>
+              </a:rPr>
+              <a:t>ChromaDB  •  .chroma_db/
+vector store  (L2 distance)</a:t>
+            </a:r>
+          </a:p>
+        </p:txBody>
+      </p:sp>
+      <p:sp>
+        <p:nvSpPr>
+          <p:cNvPr id="21" name="Rectangle 20"/>
+          <p:cNvSpPr/>
+          <p:nvPr/>
+        </p:nvSpPr>
+        <p:spPr>
+          <a:xfrm>
+            <a:off x="6263640" y="4892040"/>
+            <a:ext cx="1783080" cy="548640"/>
           </a:xfrm>
           <a:prstGeom prst="rect">
             <a:avLst/>
@@ -13699,7 +15831,7 @@
           </a:solidFill>
           <a:ln w="9525">
             <a:solidFill>
-              <a:srgbClr val="30363D"/>
+              <a:srgbClr val="8B949E"/>
             </a:solidFill>
           </a:ln>
         </p:spPr>
@@ -13727,58 +15859,59 @@
       </p:sp>
       <p:sp>
         <p:nvSpPr>
-          <p:cNvPr id="19" name="TextBox 18"/>
-          <p:cNvSpPr txBox="1"/>
-          <p:nvPr/>
-        </p:nvSpPr>
-        <p:spPr>
-          <a:xfrm>
-            <a:off x="914400" y="2395728"/>
-            <a:ext cx="2157984" cy="219456"/>
-          </a:xfrm>
-          <a:prstGeom prst="rect">
-            <a:avLst/>
-          </a:prstGeom>
-          <a:noFill/>
-        </p:spPr>
-        <p:txBody>
-          <a:bodyPr wrap="square">
-            <a:spAutoFit/>
-          </a:bodyPr>
-          <a:lstStyle/>
-          <a:p>
-            <a:pPr algn="l"/>
-            <a:r>
-              <a:rPr sz="1200" b="1">
-                <a:solidFill>
-                  <a:srgbClr val="F0F6FC"/>
-                </a:solidFill>
-              </a:rPr>
-              <a:t>Install dependencies</a:t>
-            </a:r>
-          </a:p>
-        </p:txBody>
-      </p:sp>
-      <p:sp>
-        <p:nvSpPr>
-          <p:cNvPr id="20" name="Rectangle 19"/>
+          <p:cNvPr id="22" name="TextBox 21"/>
+          <p:cNvSpPr txBox="1"/>
+          <p:nvPr/>
+        </p:nvSpPr>
+        <p:spPr>
+          <a:xfrm>
+            <a:off x="6281928" y="4937760"/>
+            <a:ext cx="1746504" cy="457200"/>
+          </a:xfrm>
+          <a:prstGeom prst="rect">
+            <a:avLst/>
+          </a:prstGeom>
+          <a:noFill/>
+        </p:spPr>
+        <p:txBody>
+          <a:bodyPr wrap="square">
+            <a:spAutoFit/>
+          </a:bodyPr>
+          <a:lstStyle/>
+          <a:p>
+            <a:pPr algn="ctr"/>
+            <a:r>
+              <a:rPr sz="1000" b="0">
+                <a:solidFill>
+                  <a:srgbClr val="8B949E"/>
+                </a:solidFill>
+              </a:rPr>
+              <a:t>.md Docs
+knowledge/</a:t>
+            </a:r>
+          </a:p>
+        </p:txBody>
+      </p:sp>
+      <p:sp>
+        <p:nvSpPr>
+          <p:cNvPr id="23" name="Rectangle 22"/>
           <p:cNvSpPr/>
           <p:nvPr/>
         </p:nvSpPr>
         <p:spPr>
           <a:xfrm>
-            <a:off x="3273552" y="2286000"/>
-            <a:ext cx="8869680" cy="438912"/>
+            <a:off x="8275320" y="4892040"/>
+            <a:ext cx="1783080" cy="548640"/>
           </a:xfrm>
           <a:prstGeom prst="rect">
             <a:avLst/>
           </a:prstGeom>
           <a:solidFill>
-            <a:srgbClr val="0D1117"/>
+            <a:srgbClr val="161B22"/>
           </a:solidFill>
           <a:ln w="9525">
             <a:solidFill>
-              <a:srgbClr val="30363D"/>
+              <a:srgbClr val="8B949E"/>
             </a:solidFill>
           </a:ln>
         </p:spPr>
@@ -13806,14 +15939,694 @@
       </p:sp>
       <p:sp>
         <p:nvSpPr>
-          <p:cNvPr id="21" name="TextBox 20"/>
-          <p:cNvSpPr txBox="1"/>
-          <p:nvPr/>
-        </p:nvSpPr>
-        <p:spPr>
-          <a:xfrm>
-            <a:off x="3383280" y="2395728"/>
-            <a:ext cx="8650224" cy="219456"/>
+          <p:cNvPr id="24" name="TextBox 23"/>
+          <p:cNvSpPr txBox="1"/>
+          <p:nvPr/>
+        </p:nvSpPr>
+        <p:spPr>
+          <a:xfrm>
+            <a:off x="8293608" y="4937760"/>
+            <a:ext cx="1746504" cy="457200"/>
+          </a:xfrm>
+          <a:prstGeom prst="rect">
+            <a:avLst/>
+          </a:prstGeom>
+          <a:noFill/>
+        </p:spPr>
+        <p:txBody>
+          <a:bodyPr wrap="square">
+            <a:spAutoFit/>
+          </a:bodyPr>
+          <a:lstStyle/>
+          <a:p>
+            <a:pPr algn="ctr"/>
+            <a:r>
+              <a:rPr sz="1000" b="0">
+                <a:solidFill>
+                  <a:srgbClr val="8B949E"/>
+                </a:solidFill>
+              </a:rPr>
+              <a:t>Source Code
+./src  (12 languages)</a:t>
+            </a:r>
+          </a:p>
+        </p:txBody>
+      </p:sp>
+      <p:cxnSp>
+        <p:nvCxnSpPr>
+          <p:cNvPr id="25" name="Connector 24"/>
+          <p:cNvCxnSpPr/>
+          <p:nvPr/>
+        </p:nvCxnSpPr>
+        <p:spPr>
+          <a:xfrm flipH="1">
+            <a:off x="1572768" y="1344168"/>
+            <a:ext cx="3364992" cy="621792"/>
+          </a:xfrm>
+          <a:prstGeom prst="line">
+            <a:avLst/>
+          </a:prstGeom>
+          <a:ln w="15876">
+            <a:solidFill>
+              <a:srgbClr val="BC8CFF"/>
+            </a:solidFill>
+            <a:tailEnd type="arrow" w="med" len="med"/>
+          </a:ln>
+        </p:spPr>
+        <p:style>
+          <a:lnRef idx="2">
+            <a:schemeClr val="accent1"/>
+          </a:lnRef>
+          <a:fillRef idx="0">
+            <a:schemeClr val="accent1"/>
+          </a:fillRef>
+          <a:effectRef idx="1">
+            <a:schemeClr val="accent1"/>
+          </a:effectRef>
+          <a:fontRef idx="minor">
+            <a:schemeClr val="tx1"/>
+          </a:fontRef>
+        </p:style>
+      </p:cxnSp>
+      <p:sp>
+        <p:nvSpPr>
+          <p:cNvPr id="26" name="TextBox 25"/>
+          <p:cNvSpPr txBox="1"/>
+          <p:nvPr/>
+        </p:nvSpPr>
+        <p:spPr>
+          <a:xfrm>
+            <a:off x="2432304" y="1499616"/>
+            <a:ext cx="1645920" cy="292608"/>
+          </a:xfrm>
+          <a:prstGeom prst="rect">
+            <a:avLst/>
+          </a:prstGeom>
+          <a:noFill/>
+        </p:spPr>
+        <p:txBody>
+          <a:bodyPr wrap="square">
+            <a:spAutoFit/>
+          </a:bodyPr>
+          <a:lstStyle/>
+          <a:p>
+            <a:pPr algn="ctr"/>
+            <a:r>
+              <a:rPr sz="800" b="0">
+                <a:solidFill>
+                  <a:srgbClr val="BC8CFF"/>
+                </a:solidFill>
+              </a:rPr>
+              <a:t>get_relevant_repos</a:t>
+            </a:r>
+          </a:p>
+        </p:txBody>
+      </p:sp>
+      <p:cxnSp>
+        <p:nvCxnSpPr>
+          <p:cNvPr id="27" name="Connector 26"/>
+          <p:cNvCxnSpPr/>
+          <p:nvPr/>
+        </p:nvCxnSpPr>
+        <p:spPr>
+          <a:xfrm flipH="1">
+            <a:off x="4800600" y="1344168"/>
+            <a:ext cx="1371600" cy="27432"/>
+          </a:xfrm>
+          <a:prstGeom prst="line">
+            <a:avLst/>
+          </a:prstGeom>
+          <a:ln w="15876">
+            <a:solidFill>
+              <a:srgbClr val="58A6FF"/>
+            </a:solidFill>
+            <a:tailEnd type="arrow" w="med" len="med"/>
+          </a:ln>
+        </p:spPr>
+        <p:style>
+          <a:lnRef idx="2">
+            <a:schemeClr val="accent1"/>
+          </a:lnRef>
+          <a:fillRef idx="0">
+            <a:schemeClr val="accent1"/>
+          </a:fillRef>
+          <a:effectRef idx="1">
+            <a:schemeClr val="accent1"/>
+          </a:effectRef>
+          <a:fontRef idx="minor">
+            <a:schemeClr val="tx1"/>
+          </a:fontRef>
+        </p:style>
+      </p:cxnSp>
+      <p:sp>
+        <p:nvSpPr>
+          <p:cNvPr id="28" name="TextBox 27"/>
+          <p:cNvSpPr txBox="1"/>
+          <p:nvPr/>
+        </p:nvSpPr>
+        <p:spPr>
+          <a:xfrm>
+            <a:off x="4663440" y="1202436"/>
+            <a:ext cx="1645920" cy="292608"/>
+          </a:xfrm>
+          <a:prstGeom prst="rect">
+            <a:avLst/>
+          </a:prstGeom>
+          <a:noFill/>
+        </p:spPr>
+        <p:txBody>
+          <a:bodyPr wrap="square">
+            <a:spAutoFit/>
+          </a:bodyPr>
+          <a:lstStyle/>
+          <a:p>
+            <a:pPr algn="ctr"/>
+            <a:r>
+              <a:rPr sz="800" b="0">
+                <a:solidFill>
+                  <a:srgbClr val="58A6FF"/>
+                </a:solidFill>
+              </a:rPr>
+              <a:t>query_repo (×3)</a:t>
+            </a:r>
+          </a:p>
+        </p:txBody>
+      </p:sp>
+      <p:cxnSp>
+        <p:nvCxnSpPr>
+          <p:cNvPr id="29" name="Connector 28"/>
+          <p:cNvCxnSpPr/>
+          <p:nvPr/>
+        </p:nvCxnSpPr>
+        <p:spPr>
+          <a:xfrm flipV="1">
+            <a:off x="2880360" y="1655064"/>
+            <a:ext cx="640080" cy="649224"/>
+          </a:xfrm>
+          <a:prstGeom prst="line">
+            <a:avLst/>
+          </a:prstGeom>
+          <a:ln w="15876">
+            <a:solidFill>
+              <a:srgbClr val="3FB950"/>
+            </a:solidFill>
+            <a:tailEnd type="arrow" w="med" len="med"/>
+          </a:ln>
+        </p:spPr>
+        <p:style>
+          <a:lnRef idx="2">
+            <a:schemeClr val="accent1"/>
+          </a:lnRef>
+          <a:fillRef idx="0">
+            <a:schemeClr val="accent1"/>
+          </a:fillRef>
+          <a:effectRef idx="1">
+            <a:schemeClr val="accent1"/>
+          </a:effectRef>
+          <a:fontRef idx="minor">
+            <a:schemeClr val="tx1"/>
+          </a:fontRef>
+        </p:style>
+      </p:cxnSp>
+      <p:cxnSp>
+        <p:nvCxnSpPr>
+          <p:cNvPr id="30" name="Connector 29"/>
+          <p:cNvCxnSpPr/>
+          <p:nvPr/>
+        </p:nvCxnSpPr>
+        <p:spPr>
+          <a:xfrm>
+            <a:off x="2880360" y="2377440"/>
+            <a:ext cx="640080" cy="192024"/>
+          </a:xfrm>
+          <a:prstGeom prst="line">
+            <a:avLst/>
+          </a:prstGeom>
+          <a:ln w="15876">
+            <a:solidFill>
+              <a:srgbClr val="3FB950"/>
+            </a:solidFill>
+            <a:tailEnd type="arrow" w="med" len="med"/>
+          </a:ln>
+        </p:spPr>
+        <p:style>
+          <a:lnRef idx="2">
+            <a:schemeClr val="accent1"/>
+          </a:lnRef>
+          <a:fillRef idx="0">
+            <a:schemeClr val="accent1"/>
+          </a:fillRef>
+          <a:effectRef idx="1">
+            <a:schemeClr val="accent1"/>
+          </a:effectRef>
+          <a:fontRef idx="minor">
+            <a:schemeClr val="tx1"/>
+          </a:fontRef>
+        </p:style>
+      </p:cxnSp>
+      <p:cxnSp>
+        <p:nvCxnSpPr>
+          <p:cNvPr id="31" name="Connector 30"/>
+          <p:cNvCxnSpPr/>
+          <p:nvPr/>
+        </p:nvCxnSpPr>
+        <p:spPr>
+          <a:xfrm>
+            <a:off x="2880360" y="2450592"/>
+            <a:ext cx="640080" cy="1033272"/>
+          </a:xfrm>
+          <a:prstGeom prst="line">
+            <a:avLst/>
+          </a:prstGeom>
+          <a:ln w="15876">
+            <a:solidFill>
+              <a:srgbClr val="3FB950"/>
+            </a:solidFill>
+            <a:tailEnd type="arrow" w="med" len="med"/>
+          </a:ln>
+        </p:spPr>
+        <p:style>
+          <a:lnRef idx="2">
+            <a:schemeClr val="accent1"/>
+          </a:lnRef>
+          <a:fillRef idx="0">
+            <a:schemeClr val="accent1"/>
+          </a:fillRef>
+          <a:effectRef idx="1">
+            <a:schemeClr val="accent1"/>
+          </a:effectRef>
+          <a:fontRef idx="minor">
+            <a:schemeClr val="tx1"/>
+          </a:fontRef>
+        </p:style>
+      </p:cxnSp>
+      <p:cxnSp>
+        <p:nvCxnSpPr>
+          <p:cNvPr id="32" name="Connector 31"/>
+          <p:cNvCxnSpPr/>
+          <p:nvPr/>
+        </p:nvCxnSpPr>
+        <p:spPr>
+          <a:xfrm>
+            <a:off x="6080760" y="1655064"/>
+            <a:ext cx="594360" cy="521208"/>
+          </a:xfrm>
+          <a:prstGeom prst="line">
+            <a:avLst/>
+          </a:prstGeom>
+          <a:ln w="15876">
+            <a:solidFill>
+              <a:srgbClr val="58A6FF"/>
+            </a:solidFill>
+            <a:tailEnd type="arrow" w="med" len="med"/>
+          </a:ln>
+        </p:spPr>
+        <p:style>
+          <a:lnRef idx="2">
+            <a:schemeClr val="accent1"/>
+          </a:lnRef>
+          <a:fillRef idx="0">
+            <a:schemeClr val="accent1"/>
+          </a:fillRef>
+          <a:effectRef idx="1">
+            <a:schemeClr val="accent1"/>
+          </a:effectRef>
+          <a:fontRef idx="minor">
+            <a:schemeClr val="tx1"/>
+          </a:fontRef>
+        </p:style>
+      </p:cxnSp>
+      <p:cxnSp>
+        <p:nvCxnSpPr>
+          <p:cNvPr id="33" name="Connector 32"/>
+          <p:cNvCxnSpPr/>
+          <p:nvPr/>
+        </p:nvCxnSpPr>
+        <p:spPr>
+          <a:xfrm flipV="1">
+            <a:off x="6080760" y="2395728"/>
+            <a:ext cx="594360" cy="173736"/>
+          </a:xfrm>
+          <a:prstGeom prst="line">
+            <a:avLst/>
+          </a:prstGeom>
+          <a:ln w="15876">
+            <a:solidFill>
+              <a:srgbClr val="58A6FF"/>
+            </a:solidFill>
+            <a:tailEnd type="arrow" w="med" len="med"/>
+          </a:ln>
+        </p:spPr>
+        <p:style>
+          <a:lnRef idx="2">
+            <a:schemeClr val="accent1"/>
+          </a:lnRef>
+          <a:fillRef idx="0">
+            <a:schemeClr val="accent1"/>
+          </a:fillRef>
+          <a:effectRef idx="1">
+            <a:schemeClr val="accent1"/>
+          </a:effectRef>
+          <a:fontRef idx="minor">
+            <a:schemeClr val="tx1"/>
+          </a:fontRef>
+        </p:style>
+      </p:cxnSp>
+      <p:cxnSp>
+        <p:nvCxnSpPr>
+          <p:cNvPr id="34" name="Connector 33"/>
+          <p:cNvCxnSpPr/>
+          <p:nvPr/>
+        </p:nvCxnSpPr>
+        <p:spPr>
+          <a:xfrm flipV="1">
+            <a:off x="6080760" y="2624328"/>
+            <a:ext cx="594360" cy="859536"/>
+          </a:xfrm>
+          <a:prstGeom prst="line">
+            <a:avLst/>
+          </a:prstGeom>
+          <a:ln w="15876">
+            <a:solidFill>
+              <a:srgbClr val="58A6FF"/>
+            </a:solidFill>
+            <a:tailEnd type="arrow" w="med" len="med"/>
+          </a:ln>
+        </p:spPr>
+        <p:style>
+          <a:lnRef idx="2">
+            <a:schemeClr val="accent1"/>
+          </a:lnRef>
+          <a:fillRef idx="0">
+            <a:schemeClr val="accent1"/>
+          </a:fillRef>
+          <a:effectRef idx="1">
+            <a:schemeClr val="accent1"/>
+          </a:effectRef>
+          <a:fontRef idx="minor">
+            <a:schemeClr val="tx1"/>
+          </a:fontRef>
+        </p:style>
+      </p:cxnSp>
+      <p:sp>
+        <p:nvSpPr>
+          <p:cNvPr id="35" name="TextBox 34"/>
+          <p:cNvSpPr txBox="1"/>
+          <p:nvPr/>
+        </p:nvSpPr>
+        <p:spPr>
+          <a:xfrm>
+            <a:off x="5554979" y="2327148"/>
+            <a:ext cx="1645920" cy="292608"/>
+          </a:xfrm>
+          <a:prstGeom prst="rect">
+            <a:avLst/>
+          </a:prstGeom>
+          <a:noFill/>
+        </p:spPr>
+        <p:txBody>
+          <a:bodyPr wrap="square">
+            <a:spAutoFit/>
+          </a:bodyPr>
+          <a:lstStyle/>
+          <a:p>
+            <a:pPr algn="ctr"/>
+            <a:r>
+              <a:rPr sz="800" b="0">
+                <a:solidFill>
+                  <a:srgbClr val="58A6FF"/>
+                </a:solidFill>
+              </a:rPr>
+              <a:t>query()</a:t>
+            </a:r>
+          </a:p>
+        </p:txBody>
+      </p:sp>
+      <p:cxnSp>
+        <p:nvCxnSpPr>
+          <p:cNvPr id="36" name="Connector 35"/>
+          <p:cNvCxnSpPr/>
+          <p:nvPr/>
+        </p:nvCxnSpPr>
+        <p:spPr>
+          <a:xfrm>
+            <a:off x="7863840" y="2880360"/>
+            <a:ext cx="0" cy="777240"/>
+          </a:xfrm>
+          <a:prstGeom prst="line">
+            <a:avLst/>
+          </a:prstGeom>
+          <a:ln w="15876">
+            <a:solidFill>
+              <a:srgbClr val="F0883E"/>
+            </a:solidFill>
+            <a:tailEnd type="arrow" w="med" len="med"/>
+          </a:ln>
+        </p:spPr>
+        <p:style>
+          <a:lnRef idx="2">
+            <a:schemeClr val="accent1"/>
+          </a:lnRef>
+          <a:fillRef idx="0">
+            <a:schemeClr val="accent1"/>
+          </a:fillRef>
+          <a:effectRef idx="1">
+            <a:schemeClr val="accent1"/>
+          </a:effectRef>
+          <a:fontRef idx="minor">
+            <a:schemeClr val="tx1"/>
+          </a:fontRef>
+        </p:style>
+      </p:cxnSp>
+      <p:sp>
+        <p:nvSpPr>
+          <p:cNvPr id="37" name="TextBox 36"/>
+          <p:cNvSpPr txBox="1"/>
+          <p:nvPr/>
+        </p:nvSpPr>
+        <p:spPr>
+          <a:xfrm>
+            <a:off x="7040879" y="3113532"/>
+            <a:ext cx="1645920" cy="292608"/>
+          </a:xfrm>
+          <a:prstGeom prst="rect">
+            <a:avLst/>
+          </a:prstGeom>
+          <a:noFill/>
+        </p:spPr>
+        <p:txBody>
+          <a:bodyPr wrap="square">
+            <a:spAutoFit/>
+          </a:bodyPr>
+          <a:lstStyle/>
+          <a:p>
+            <a:pPr algn="ctr"/>
+            <a:r>
+              <a:rPr sz="800" b="0">
+                <a:solidFill>
+                  <a:srgbClr val="F0883E"/>
+                </a:solidFill>
+              </a:rPr>
+              <a:t>vector search</a:t>
+            </a:r>
+          </a:p>
+        </p:txBody>
+      </p:sp>
+      <p:cxnSp>
+        <p:nvCxnSpPr>
+          <p:cNvPr id="38" name="Connector 37"/>
+          <p:cNvCxnSpPr/>
+          <p:nvPr/>
+        </p:nvCxnSpPr>
+        <p:spPr>
+          <a:xfrm flipH="1">
+            <a:off x="7150608" y="4297680"/>
+            <a:ext cx="118872" cy="594360"/>
+          </a:xfrm>
+          <a:prstGeom prst="line">
+            <a:avLst/>
+          </a:prstGeom>
+          <a:ln w="15876">
+            <a:solidFill>
+              <a:srgbClr val="8B949E"/>
+            </a:solidFill>
+            <a:tailEnd type="arrow" w="med" len="med"/>
+          </a:ln>
+        </p:spPr>
+        <p:style>
+          <a:lnRef idx="2">
+            <a:schemeClr val="accent1"/>
+          </a:lnRef>
+          <a:fillRef idx="0">
+            <a:schemeClr val="accent1"/>
+          </a:fillRef>
+          <a:effectRef idx="1">
+            <a:schemeClr val="accent1"/>
+          </a:effectRef>
+          <a:fontRef idx="minor">
+            <a:schemeClr val="tx1"/>
+          </a:fontRef>
+        </p:style>
+      </p:cxnSp>
+      <p:cxnSp>
+        <p:nvCxnSpPr>
+          <p:cNvPr id="39" name="Connector 38"/>
+          <p:cNvCxnSpPr/>
+          <p:nvPr/>
+        </p:nvCxnSpPr>
+        <p:spPr>
+          <a:xfrm>
+            <a:off x="8458200" y="4297680"/>
+            <a:ext cx="749808" cy="594360"/>
+          </a:xfrm>
+          <a:prstGeom prst="line">
+            <a:avLst/>
+          </a:prstGeom>
+          <a:ln w="15876">
+            <a:solidFill>
+              <a:srgbClr val="8B949E"/>
+            </a:solidFill>
+            <a:tailEnd type="arrow" w="med" len="med"/>
+          </a:ln>
+        </p:spPr>
+        <p:style>
+          <a:lnRef idx="2">
+            <a:schemeClr val="accent1"/>
+          </a:lnRef>
+          <a:fillRef idx="0">
+            <a:schemeClr val="accent1"/>
+          </a:fillRef>
+          <a:effectRef idx="1">
+            <a:schemeClr val="accent1"/>
+          </a:effectRef>
+          <a:fontRef idx="minor">
+            <a:schemeClr val="tx1"/>
+          </a:fontRef>
+        </p:style>
+      </p:cxnSp>
+      <p:sp>
+        <p:nvSpPr>
+          <p:cNvPr id="40" name="TextBox 39"/>
+          <p:cNvSpPr txBox="1"/>
+          <p:nvPr/>
+        </p:nvSpPr>
+        <p:spPr>
+          <a:xfrm>
+            <a:off x="7200899" y="4439412"/>
+            <a:ext cx="1645920" cy="292608"/>
+          </a:xfrm>
+          <a:prstGeom prst="rect">
+            <a:avLst/>
+          </a:prstGeom>
+          <a:noFill/>
+        </p:spPr>
+        <p:txBody>
+          <a:bodyPr wrap="square">
+            <a:spAutoFit/>
+          </a:bodyPr>
+          <a:lstStyle/>
+          <a:p>
+            <a:pPr algn="ctr"/>
+            <a:r>
+              <a:rPr sz="800" b="0">
+                <a:solidFill>
+                  <a:srgbClr val="8B949E"/>
+                </a:solidFill>
+              </a:rPr>
+              <a:t>indexed</a:t>
+            </a:r>
+          </a:p>
+        </p:txBody>
+      </p:sp>
+      <p:sp>
+        <p:nvSpPr>
+          <p:cNvPr id="41" name="TextBox 40"/>
+          <p:cNvSpPr txBox="1"/>
+          <p:nvPr/>
+        </p:nvSpPr>
+        <p:spPr>
+          <a:xfrm>
+            <a:off x="365760" y="6492240"/>
+            <a:ext cx="11430000" cy="256032"/>
+          </a:xfrm>
+          <a:prstGeom prst="rect">
+            <a:avLst/>
+          </a:prstGeom>
+          <a:noFill/>
+        </p:spPr>
+        <p:txBody>
+          <a:bodyPr wrap="square">
+            <a:spAutoFit/>
+          </a:bodyPr>
+          <a:lstStyle/>
+          <a:p>
+            <a:pPr algn="ctr"/>
+            <a:r>
+              <a:rPr sz="900" b="0">
+                <a:solidFill>
+                  <a:srgbClr val="8B949E"/>
+                </a:solidFill>
+              </a:rPr>
+              <a:t>All MCP communication via stdio  —  JSON-RPC 2.0  —  no network ports, no cloud</a:t>
+            </a:r>
+          </a:p>
+        </p:txBody>
+      </p:sp>
+      <p:sp>
+        <p:nvSpPr>
+          <p:cNvPr id="42" name="Rectangle 41"/>
+          <p:cNvSpPr/>
+          <p:nvPr/>
+        </p:nvSpPr>
+        <p:spPr>
+          <a:xfrm>
+            <a:off x="365760" y="6144768"/>
+            <a:ext cx="164592" cy="164592"/>
+          </a:xfrm>
+          <a:prstGeom prst="rect">
+            <a:avLst/>
+          </a:prstGeom>
+          <a:solidFill>
+            <a:srgbClr val="BC8CFF"/>
+          </a:solidFill>
+          <a:ln w="9525">
+            <a:solidFill>
+              <a:srgbClr val="BC8CFF"/>
+            </a:solidFill>
+          </a:ln>
+        </p:spPr>
+        <p:style>
+          <a:lnRef idx="1">
+            <a:schemeClr val="accent1"/>
+          </a:lnRef>
+          <a:fillRef idx="3">
+            <a:schemeClr val="accent1"/>
+          </a:fillRef>
+          <a:effectRef idx="2">
+            <a:schemeClr val="accent1"/>
+          </a:effectRef>
+          <a:fontRef idx="minor">
+            <a:schemeClr val="lt1"/>
+          </a:fontRef>
+        </p:style>
+        <p:txBody>
+          <a:bodyPr rtlCol="0" anchor="ctr"/>
+          <a:lstStyle/>
+          <a:p>
+            <a:pPr algn="ctr"/>
+          </a:p>
+        </p:txBody>
+      </p:sp>
+      <p:sp>
+        <p:nvSpPr>
+          <p:cNvPr id="43" name="TextBox 42"/>
+          <p:cNvSpPr txBox="1"/>
+          <p:nvPr/>
+        </p:nvSpPr>
+        <p:spPr>
+          <a:xfrm>
+            <a:off x="566928" y="6135624"/>
+            <a:ext cx="1920240" cy="201168"/>
           </a:xfrm>
           <a:prstGeom prst="rect">
             <a:avLst/>
@@ -13828,32 +16641,111 @@
           <a:p>
             <a:pPr algn="l"/>
             <a:r>
-              <a:rPr sz="1100" b="0">
+              <a:rPr sz="900" b="0">
                 <a:solidFill>
                   <a:srgbClr val="8B949E"/>
                 </a:solidFill>
               </a:rPr>
-              <a:t>pip install -r requirements.txt</a:t>
-            </a:r>
-          </a:p>
-        </p:txBody>
-      </p:sp>
-      <p:sp>
-        <p:nvSpPr>
-          <p:cNvPr id="22" name="Rectangle 21"/>
+              <a:t>AI Interface</a:t>
+            </a:r>
+          </a:p>
+        </p:txBody>
+      </p:sp>
+      <p:sp>
+        <p:nvSpPr>
+          <p:cNvPr id="44" name="Rectangle 43"/>
           <p:cNvSpPr/>
           <p:nvPr/>
         </p:nvSpPr>
         <p:spPr>
           <a:xfrm>
-            <a:off x="365760" y="2788920"/>
-            <a:ext cx="347472" cy="438912"/>
+            <a:off x="2697480" y="6144768"/>
+            <a:ext cx="164592" cy="164592"/>
           </a:xfrm>
           <a:prstGeom prst="rect">
             <a:avLst/>
           </a:prstGeom>
           <a:solidFill>
-            <a:srgbClr val="1F3A5F"/>
+            <a:srgbClr val="3FB950"/>
+          </a:solidFill>
+          <a:ln w="9525">
+            <a:solidFill>
+              <a:srgbClr val="3FB950"/>
+            </a:solidFill>
+          </a:ln>
+        </p:spPr>
+        <p:style>
+          <a:lnRef idx="1">
+            <a:schemeClr val="accent1"/>
+          </a:lnRef>
+          <a:fillRef idx="3">
+            <a:schemeClr val="accent1"/>
+          </a:fillRef>
+          <a:effectRef idx="2">
+            <a:schemeClr val="accent1"/>
+          </a:effectRef>
+          <a:fontRef idx="minor">
+            <a:schemeClr val="lt1"/>
+          </a:fontRef>
+        </p:style>
+        <p:txBody>
+          <a:bodyPr rtlCol="0" anchor="ctr"/>
+          <a:lstStyle/>
+          <a:p>
+            <a:pPr algn="ctr"/>
+          </a:p>
+        </p:txBody>
+      </p:sp>
+      <p:sp>
+        <p:nvSpPr>
+          <p:cNvPr id="45" name="TextBox 44"/>
+          <p:cNvSpPr txBox="1"/>
+          <p:nvPr/>
+        </p:nvSpPr>
+        <p:spPr>
+          <a:xfrm>
+            <a:off x="2898648" y="6135624"/>
+            <a:ext cx="1920240" cy="201168"/>
+          </a:xfrm>
+          <a:prstGeom prst="rect">
+            <a:avLst/>
+          </a:prstGeom>
+          <a:noFill/>
+        </p:spPr>
+        <p:txBody>
+          <a:bodyPr wrap="square">
+            <a:spAutoFit/>
+          </a:bodyPr>
+          <a:lstStyle/>
+          <a:p>
+            <a:pPr algn="l"/>
+            <a:r>
+              <a:rPr sz="900" b="0">
+                <a:solidFill>
+                  <a:srgbClr val="8B949E"/>
+                </a:solidFill>
+              </a:rPr>
+              <a:t>Orchestrator / Storage</a:t>
+            </a:r>
+          </a:p>
+        </p:txBody>
+      </p:sp>
+      <p:sp>
+        <p:nvSpPr>
+          <p:cNvPr id="46" name="Rectangle 45"/>
+          <p:cNvSpPr/>
+          <p:nvPr/>
+        </p:nvSpPr>
+        <p:spPr>
+          <a:xfrm>
+            <a:off x="5029200" y="6144768"/>
+            <a:ext cx="164592" cy="164592"/>
+          </a:xfrm>
+          <a:prstGeom prst="rect">
+            <a:avLst/>
+          </a:prstGeom>
+          <a:solidFill>
+            <a:srgbClr val="58A6FF"/>
           </a:solidFill>
           <a:ln w="9525">
             <a:solidFill>
@@ -13885,58 +16777,58 @@
       </p:sp>
       <p:sp>
         <p:nvSpPr>
-          <p:cNvPr id="23" name="TextBox 22"/>
-          <p:cNvSpPr txBox="1"/>
-          <p:nvPr/>
-        </p:nvSpPr>
-        <p:spPr>
-          <a:xfrm>
-            <a:off x="475488" y="2898648"/>
-            <a:ext cx="128016" cy="219456"/>
-          </a:xfrm>
-          <a:prstGeom prst="rect">
-            <a:avLst/>
-          </a:prstGeom>
-          <a:noFill/>
-        </p:spPr>
-        <p:txBody>
-          <a:bodyPr wrap="square">
-            <a:spAutoFit/>
-          </a:bodyPr>
-          <a:lstStyle/>
-          <a:p>
-            <a:pPr algn="ctr"/>
-            <a:r>
-              <a:rPr sz="1200" b="1">
-                <a:solidFill>
-                  <a:srgbClr val="58A6FF"/>
-                </a:solidFill>
-              </a:rPr>
-              <a:t>4</a:t>
-            </a:r>
-          </a:p>
-        </p:txBody>
-      </p:sp>
-      <p:sp>
-        <p:nvSpPr>
-          <p:cNvPr id="24" name="Rectangle 23"/>
+          <p:cNvPr id="47" name="TextBox 46"/>
+          <p:cNvSpPr txBox="1"/>
+          <p:nvPr/>
+        </p:nvSpPr>
+        <p:spPr>
+          <a:xfrm>
+            <a:off x="5230368" y="6135624"/>
+            <a:ext cx="1920240" cy="201168"/>
+          </a:xfrm>
+          <a:prstGeom prst="rect">
+            <a:avLst/>
+          </a:prstGeom>
+          <a:noFill/>
+        </p:spPr>
+        <p:txBody>
+          <a:bodyPr wrap="square">
+            <a:spAutoFit/>
+          </a:bodyPr>
+          <a:lstStyle/>
+          <a:p>
+            <a:pPr algn="l"/>
+            <a:r>
+              <a:rPr sz="900" b="0">
+                <a:solidFill>
+                  <a:srgbClr val="8B949E"/>
+                </a:solidFill>
+              </a:rPr>
+              <a:t>Repo Agent  (MCP server)</a:t>
+            </a:r>
+          </a:p>
+        </p:txBody>
+      </p:sp>
+      <p:sp>
+        <p:nvSpPr>
+          <p:cNvPr id="48" name="Rectangle 47"/>
           <p:cNvSpPr/>
           <p:nvPr/>
         </p:nvSpPr>
         <p:spPr>
           <a:xfrm>
-            <a:off x="804672" y="2788920"/>
-            <a:ext cx="2377440" cy="438912"/>
+            <a:off x="7360920" y="6144768"/>
+            <a:ext cx="164592" cy="164592"/>
           </a:xfrm>
           <a:prstGeom prst="rect">
             <a:avLst/>
           </a:prstGeom>
           <a:solidFill>
-            <a:srgbClr val="161B22"/>
+            <a:srgbClr val="F0883E"/>
           </a:solidFill>
           <a:ln w="9525">
             <a:solidFill>
-              <a:srgbClr val="30363D"/>
+              <a:srgbClr val="F0883E"/>
             </a:solidFill>
           </a:ln>
         </p:spPr>
@@ -13964,14 +16856,14 @@
       </p:sp>
       <p:sp>
         <p:nvSpPr>
-          <p:cNvPr id="25" name="TextBox 24"/>
-          <p:cNvSpPr txBox="1"/>
-          <p:nvPr/>
-        </p:nvSpPr>
-        <p:spPr>
-          <a:xfrm>
-            <a:off x="914400" y="2898648"/>
-            <a:ext cx="2157984" cy="219456"/>
+          <p:cNvPr id="49" name="TextBox 48"/>
+          <p:cNvSpPr txBox="1"/>
+          <p:nvPr/>
+        </p:nvSpPr>
+        <p:spPr>
+          <a:xfrm>
+            <a:off x="7562088" y="6135624"/>
+            <a:ext cx="1920240" cy="201168"/>
           </a:xfrm>
           <a:prstGeom prst="rect">
             <a:avLst/>
@@ -13986,36 +16878,36 @@
           <a:p>
             <a:pPr algn="l"/>
             <a:r>
-              <a:rPr sz="1200" b="1">
-                <a:solidFill>
-                  <a:srgbClr val="F0F6FC"/>
-                </a:solidFill>
-              </a:rPr>
-              <a:t>Configure orchestrator</a:t>
-            </a:r>
-          </a:p>
-        </p:txBody>
-      </p:sp>
-      <p:sp>
-        <p:nvSpPr>
-          <p:cNvPr id="26" name="Rectangle 25"/>
+              <a:rPr sz="900" b="0">
+                <a:solidFill>
+                  <a:srgbClr val="8B949E"/>
+                </a:solidFill>
+              </a:rPr>
+              <a:t>RAG Engine</a:t>
+            </a:r>
+          </a:p>
+        </p:txBody>
+      </p:sp>
+      <p:sp>
+        <p:nvSpPr>
+          <p:cNvPr id="50" name="Rectangle 49"/>
           <p:cNvSpPr/>
           <p:nvPr/>
         </p:nvSpPr>
         <p:spPr>
           <a:xfrm>
-            <a:off x="3273552" y="2788920"/>
-            <a:ext cx="8869680" cy="438912"/>
+            <a:off x="9692640" y="6144768"/>
+            <a:ext cx="164592" cy="164592"/>
           </a:xfrm>
           <a:prstGeom prst="rect">
             <a:avLst/>
           </a:prstGeom>
           <a:solidFill>
-            <a:srgbClr val="0D1117"/>
+            <a:srgbClr val="8B949E"/>
           </a:solidFill>
           <a:ln w="9525">
             <a:solidFill>
-              <a:srgbClr val="30363D"/>
+              <a:srgbClr val="8B949E"/>
             </a:solidFill>
           </a:ln>
         </p:spPr>
@@ -14043,14 +16935,14 @@
       </p:sp>
       <p:sp>
         <p:nvSpPr>
-          <p:cNvPr id="27" name="TextBox 26"/>
-          <p:cNvSpPr txBox="1"/>
-          <p:nvPr/>
-        </p:nvSpPr>
-        <p:spPr>
-          <a:xfrm>
-            <a:off x="3383280" y="2898648"/>
-            <a:ext cx="8650224" cy="219456"/>
+          <p:cNvPr id="51" name="TextBox 50"/>
+          <p:cNvSpPr txBox="1"/>
+          <p:nvPr/>
+        </p:nvSpPr>
+        <p:spPr>
+          <a:xfrm>
+            <a:off x="9893808" y="6135624"/>
+            <a:ext cx="1920240" cy="201168"/>
           </a:xfrm>
           <a:prstGeom prst="rect">
             <a:avLst/>
@@ -14065,994 +16957,12 @@
           <a:p>
             <a:pPr algn="l"/>
             <a:r>
-              <a:rPr sz="1100" b="0">
+              <a:rPr sz="900" b="0">
                 <a:solidFill>
                   <a:srgbClr val="8B949E"/>
                 </a:solidFill>
               </a:rPr>
-              <a:t>Edit orchestrator/mcp/config.yaml — list all subsystem repos + paths</a:t>
-            </a:r>
-          </a:p>
-        </p:txBody>
-      </p:sp>
-      <p:sp>
-        <p:nvSpPr>
-          <p:cNvPr id="28" name="Rectangle 27"/>
-          <p:cNvSpPr/>
-          <p:nvPr/>
-        </p:nvSpPr>
-        <p:spPr>
-          <a:xfrm>
-            <a:off x="365760" y="3291840"/>
-            <a:ext cx="347472" cy="438912"/>
-          </a:xfrm>
-          <a:prstGeom prst="rect">
-            <a:avLst/>
-          </a:prstGeom>
-          <a:solidFill>
-            <a:srgbClr val="1F3A5F"/>
-          </a:solidFill>
-          <a:ln w="9525">
-            <a:solidFill>
-              <a:srgbClr val="58A6FF"/>
-            </a:solidFill>
-          </a:ln>
-        </p:spPr>
-        <p:style>
-          <a:lnRef idx="1">
-            <a:schemeClr val="accent1"/>
-          </a:lnRef>
-          <a:fillRef idx="3">
-            <a:schemeClr val="accent1"/>
-          </a:fillRef>
-          <a:effectRef idx="2">
-            <a:schemeClr val="accent1"/>
-          </a:effectRef>
-          <a:fontRef idx="minor">
-            <a:schemeClr val="lt1"/>
-          </a:fontRef>
-        </p:style>
-        <p:txBody>
-          <a:bodyPr rtlCol="0" anchor="ctr"/>
-          <a:lstStyle/>
-          <a:p>
-            <a:pPr algn="ctr"/>
-          </a:p>
-        </p:txBody>
-      </p:sp>
-      <p:sp>
-        <p:nvSpPr>
-          <p:cNvPr id="29" name="TextBox 28"/>
-          <p:cNvSpPr txBox="1"/>
-          <p:nvPr/>
-        </p:nvSpPr>
-        <p:spPr>
-          <a:xfrm>
-            <a:off x="475488" y="3401568"/>
-            <a:ext cx="128016" cy="219456"/>
-          </a:xfrm>
-          <a:prstGeom prst="rect">
-            <a:avLst/>
-          </a:prstGeom>
-          <a:noFill/>
-        </p:spPr>
-        <p:txBody>
-          <a:bodyPr wrap="square">
-            <a:spAutoFit/>
-          </a:bodyPr>
-          <a:lstStyle/>
-          <a:p>
-            <a:pPr algn="ctr"/>
-            <a:r>
-              <a:rPr sz="1200" b="1">
-                <a:solidFill>
-                  <a:srgbClr val="58A6FF"/>
-                </a:solidFill>
-              </a:rPr>
-              <a:t>5</a:t>
-            </a:r>
-          </a:p>
-        </p:txBody>
-      </p:sp>
-      <p:sp>
-        <p:nvSpPr>
-          <p:cNvPr id="30" name="Rectangle 29"/>
-          <p:cNvSpPr/>
-          <p:nvPr/>
-        </p:nvSpPr>
-        <p:spPr>
-          <a:xfrm>
-            <a:off x="804672" y="3291840"/>
-            <a:ext cx="2377440" cy="438912"/>
-          </a:xfrm>
-          <a:prstGeom prst="rect">
-            <a:avLst/>
-          </a:prstGeom>
-          <a:solidFill>
-            <a:srgbClr val="161B22"/>
-          </a:solidFill>
-          <a:ln w="9525">
-            <a:solidFill>
-              <a:srgbClr val="30363D"/>
-            </a:solidFill>
-          </a:ln>
-        </p:spPr>
-        <p:style>
-          <a:lnRef idx="1">
-            <a:schemeClr val="accent1"/>
-          </a:lnRef>
-          <a:fillRef idx="3">
-            <a:schemeClr val="accent1"/>
-          </a:fillRef>
-          <a:effectRef idx="2">
-            <a:schemeClr val="accent1"/>
-          </a:effectRef>
-          <a:fontRef idx="minor">
-            <a:schemeClr val="lt1"/>
-          </a:fontRef>
-        </p:style>
-        <p:txBody>
-          <a:bodyPr rtlCol="0" anchor="ctr"/>
-          <a:lstStyle/>
-          <a:p>
-            <a:pPr algn="ctr"/>
-          </a:p>
-        </p:txBody>
-      </p:sp>
-      <p:sp>
-        <p:nvSpPr>
-          <p:cNvPr id="31" name="TextBox 30"/>
-          <p:cNvSpPr txBox="1"/>
-          <p:nvPr/>
-        </p:nvSpPr>
-        <p:spPr>
-          <a:xfrm>
-            <a:off x="914400" y="3401568"/>
-            <a:ext cx="2157984" cy="219456"/>
-          </a:xfrm>
-          <a:prstGeom prst="rect">
-            <a:avLst/>
-          </a:prstGeom>
-          <a:noFill/>
-        </p:spPr>
-        <p:txBody>
-          <a:bodyPr wrap="square">
-            <a:spAutoFit/>
-          </a:bodyPr>
-          <a:lstStyle/>
-          <a:p>
-            <a:pPr algn="l"/>
-            <a:r>
-              <a:rPr sz="1200" b="1">
-                <a:solidFill>
-                  <a:srgbClr val="F0F6FC"/>
-                </a:solidFill>
-              </a:rPr>
-              <a:t>Add agent files</a:t>
-            </a:r>
-          </a:p>
-        </p:txBody>
-      </p:sp>
-      <p:sp>
-        <p:nvSpPr>
-          <p:cNvPr id="32" name="Rectangle 31"/>
-          <p:cNvSpPr/>
-          <p:nvPr/>
-        </p:nvSpPr>
-        <p:spPr>
-          <a:xfrm>
-            <a:off x="3273552" y="3291840"/>
-            <a:ext cx="8869680" cy="438912"/>
-          </a:xfrm>
-          <a:prstGeom prst="rect">
-            <a:avLst/>
-          </a:prstGeom>
-          <a:solidFill>
-            <a:srgbClr val="0D1117"/>
-          </a:solidFill>
-          <a:ln w="9525">
-            <a:solidFill>
-              <a:srgbClr val="30363D"/>
-            </a:solidFill>
-          </a:ln>
-        </p:spPr>
-        <p:style>
-          <a:lnRef idx="1">
-            <a:schemeClr val="accent1"/>
-          </a:lnRef>
-          <a:fillRef idx="3">
-            <a:schemeClr val="accent1"/>
-          </a:fillRef>
-          <a:effectRef idx="2">
-            <a:schemeClr val="accent1"/>
-          </a:effectRef>
-          <a:fontRef idx="minor">
-            <a:schemeClr val="lt1"/>
-          </a:fontRef>
-        </p:style>
-        <p:txBody>
-          <a:bodyPr rtlCol="0" anchor="ctr"/>
-          <a:lstStyle/>
-          <a:p>
-            <a:pPr algn="ctr"/>
-          </a:p>
-        </p:txBody>
-      </p:sp>
-      <p:sp>
-        <p:nvSpPr>
-          <p:cNvPr id="33" name="TextBox 32"/>
-          <p:cNvSpPr txBox="1"/>
-          <p:nvPr/>
-        </p:nvSpPr>
-        <p:spPr>
-          <a:xfrm>
-            <a:off x="3383280" y="3401568"/>
-            <a:ext cx="8650224" cy="219456"/>
-          </a:xfrm>
-          <a:prstGeom prst="rect">
-            <a:avLst/>
-          </a:prstGeom>
-          <a:noFill/>
-        </p:spPr>
-        <p:txBody>
-          <a:bodyPr wrap="square">
-            <a:spAutoFit/>
-          </a:bodyPr>
-          <a:lstStyle/>
-          <a:p>
-            <a:pPr algn="l"/>
-            <a:r>
-              <a:rPr sz="1100" b="0">
-                <a:solidFill>
-                  <a:srgbClr val="8B949E"/>
-                </a:solidFill>
-              </a:rPr>
-              <a:t>cp repo-agent/mcp/ knowledge/ .github/  into each subsystem repo</a:t>
-            </a:r>
-          </a:p>
-        </p:txBody>
-      </p:sp>
-      <p:sp>
-        <p:nvSpPr>
-          <p:cNvPr id="34" name="Rectangle 33"/>
-          <p:cNvSpPr/>
-          <p:nvPr/>
-        </p:nvSpPr>
-        <p:spPr>
-          <a:xfrm>
-            <a:off x="365760" y="3794760"/>
-            <a:ext cx="347472" cy="438912"/>
-          </a:xfrm>
-          <a:prstGeom prst="rect">
-            <a:avLst/>
-          </a:prstGeom>
-          <a:solidFill>
-            <a:srgbClr val="1F3A5F"/>
-          </a:solidFill>
-          <a:ln w="9525">
-            <a:solidFill>
-              <a:srgbClr val="58A6FF"/>
-            </a:solidFill>
-          </a:ln>
-        </p:spPr>
-        <p:style>
-          <a:lnRef idx="1">
-            <a:schemeClr val="accent1"/>
-          </a:lnRef>
-          <a:fillRef idx="3">
-            <a:schemeClr val="accent1"/>
-          </a:fillRef>
-          <a:effectRef idx="2">
-            <a:schemeClr val="accent1"/>
-          </a:effectRef>
-          <a:fontRef idx="minor">
-            <a:schemeClr val="lt1"/>
-          </a:fontRef>
-        </p:style>
-        <p:txBody>
-          <a:bodyPr rtlCol="0" anchor="ctr"/>
-          <a:lstStyle/>
-          <a:p>
-            <a:pPr algn="ctr"/>
-          </a:p>
-        </p:txBody>
-      </p:sp>
-      <p:sp>
-        <p:nvSpPr>
-          <p:cNvPr id="35" name="TextBox 34"/>
-          <p:cNvSpPr txBox="1"/>
-          <p:nvPr/>
-        </p:nvSpPr>
-        <p:spPr>
-          <a:xfrm>
-            <a:off x="475488" y="3904488"/>
-            <a:ext cx="128016" cy="219456"/>
-          </a:xfrm>
-          <a:prstGeom prst="rect">
-            <a:avLst/>
-          </a:prstGeom>
-          <a:noFill/>
-        </p:spPr>
-        <p:txBody>
-          <a:bodyPr wrap="square">
-            <a:spAutoFit/>
-          </a:bodyPr>
-          <a:lstStyle/>
-          <a:p>
-            <a:pPr algn="ctr"/>
-            <a:r>
-              <a:rPr sz="1200" b="1">
-                <a:solidFill>
-                  <a:srgbClr val="58A6FF"/>
-                </a:solidFill>
-              </a:rPr>
-              <a:t>6</a:t>
-            </a:r>
-          </a:p>
-        </p:txBody>
-      </p:sp>
-      <p:sp>
-        <p:nvSpPr>
-          <p:cNvPr id="36" name="Rectangle 35"/>
-          <p:cNvSpPr/>
-          <p:nvPr/>
-        </p:nvSpPr>
-        <p:spPr>
-          <a:xfrm>
-            <a:off x="804672" y="3794760"/>
-            <a:ext cx="2377440" cy="438912"/>
-          </a:xfrm>
-          <a:prstGeom prst="rect">
-            <a:avLst/>
-          </a:prstGeom>
-          <a:solidFill>
-            <a:srgbClr val="161B22"/>
-          </a:solidFill>
-          <a:ln w="9525">
-            <a:solidFill>
-              <a:srgbClr val="30363D"/>
-            </a:solidFill>
-          </a:ln>
-        </p:spPr>
-        <p:style>
-          <a:lnRef idx="1">
-            <a:schemeClr val="accent1"/>
-          </a:lnRef>
-          <a:fillRef idx="3">
-            <a:schemeClr val="accent1"/>
-          </a:fillRef>
-          <a:effectRef idx="2">
-            <a:schemeClr val="accent1"/>
-          </a:effectRef>
-          <a:fontRef idx="minor">
-            <a:schemeClr val="lt1"/>
-          </a:fontRef>
-        </p:style>
-        <p:txBody>
-          <a:bodyPr rtlCol="0" anchor="ctr"/>
-          <a:lstStyle/>
-          <a:p>
-            <a:pPr algn="ctr"/>
-          </a:p>
-        </p:txBody>
-      </p:sp>
-      <p:sp>
-        <p:nvSpPr>
-          <p:cNvPr id="37" name="TextBox 36"/>
-          <p:cNvSpPr txBox="1"/>
-          <p:nvPr/>
-        </p:nvSpPr>
-        <p:spPr>
-          <a:xfrm>
-            <a:off x="914400" y="3904488"/>
-            <a:ext cx="2157984" cy="219456"/>
-          </a:xfrm>
-          <a:prstGeom prst="rect">
-            <a:avLst/>
-          </a:prstGeom>
-          <a:noFill/>
-        </p:spPr>
-        <p:txBody>
-          <a:bodyPr wrap="square">
-            <a:spAutoFit/>
-          </a:bodyPr>
-          <a:lstStyle/>
-          <a:p>
-            <a:pPr algn="l"/>
-            <a:r>
-              <a:rPr sz="1200" b="1">
-                <a:solidFill>
-                  <a:srgbClr val="F0F6FC"/>
-                </a:solidFill>
-              </a:rPr>
-              <a:t>Configure each repo</a:t>
-            </a:r>
-          </a:p>
-        </p:txBody>
-      </p:sp>
-      <p:sp>
-        <p:nvSpPr>
-          <p:cNvPr id="38" name="Rectangle 37"/>
-          <p:cNvSpPr/>
-          <p:nvPr/>
-        </p:nvSpPr>
-        <p:spPr>
-          <a:xfrm>
-            <a:off x="3273552" y="3794760"/>
-            <a:ext cx="8869680" cy="438912"/>
-          </a:xfrm>
-          <a:prstGeom prst="rect">
-            <a:avLst/>
-          </a:prstGeom>
-          <a:solidFill>
-            <a:srgbClr val="0D1117"/>
-          </a:solidFill>
-          <a:ln w="9525">
-            <a:solidFill>
-              <a:srgbClr val="30363D"/>
-            </a:solidFill>
-          </a:ln>
-        </p:spPr>
-        <p:style>
-          <a:lnRef idx="1">
-            <a:schemeClr val="accent1"/>
-          </a:lnRef>
-          <a:fillRef idx="3">
-            <a:schemeClr val="accent1"/>
-          </a:fillRef>
-          <a:effectRef idx="2">
-            <a:schemeClr val="accent1"/>
-          </a:effectRef>
-          <a:fontRef idx="minor">
-            <a:schemeClr val="lt1"/>
-          </a:fontRef>
-        </p:style>
-        <p:txBody>
-          <a:bodyPr rtlCol="0" anchor="ctr"/>
-          <a:lstStyle/>
-          <a:p>
-            <a:pPr algn="ctr"/>
-          </a:p>
-        </p:txBody>
-      </p:sp>
-      <p:sp>
-        <p:nvSpPr>
-          <p:cNvPr id="39" name="TextBox 38"/>
-          <p:cNvSpPr txBox="1"/>
-          <p:nvPr/>
-        </p:nvSpPr>
-        <p:spPr>
-          <a:xfrm>
-            <a:off x="3383280" y="3904488"/>
-            <a:ext cx="8650224" cy="219456"/>
-          </a:xfrm>
-          <a:prstGeom prst="rect">
-            <a:avLst/>
-          </a:prstGeom>
-          <a:noFill/>
-        </p:spPr>
-        <p:txBody>
-          <a:bodyPr wrap="square">
-            <a:spAutoFit/>
-          </a:bodyPr>
-          <a:lstStyle/>
-          <a:p>
-            <a:pPr algn="l"/>
-            <a:r>
-              <a:rPr sz="1100" b="0">
-                <a:solidFill>
-                  <a:srgbClr val="8B949E"/>
-                </a:solidFill>
-              </a:rPr>
-              <a:t>Edit each repo's mcp/config.yaml — set repo_name and src_path (glob ok)</a:t>
-            </a:r>
-          </a:p>
-        </p:txBody>
-      </p:sp>
-      <p:sp>
-        <p:nvSpPr>
-          <p:cNvPr id="40" name="Rectangle 39"/>
-          <p:cNvSpPr/>
-          <p:nvPr/>
-        </p:nvSpPr>
-        <p:spPr>
-          <a:xfrm>
-            <a:off x="365760" y="4297680"/>
-            <a:ext cx="347472" cy="438912"/>
-          </a:xfrm>
-          <a:prstGeom prst="rect">
-            <a:avLst/>
-          </a:prstGeom>
-          <a:solidFill>
-            <a:srgbClr val="1F3A5F"/>
-          </a:solidFill>
-          <a:ln w="9525">
-            <a:solidFill>
-              <a:srgbClr val="58A6FF"/>
-            </a:solidFill>
-          </a:ln>
-        </p:spPr>
-        <p:style>
-          <a:lnRef idx="1">
-            <a:schemeClr val="accent1"/>
-          </a:lnRef>
-          <a:fillRef idx="3">
-            <a:schemeClr val="accent1"/>
-          </a:fillRef>
-          <a:effectRef idx="2">
-            <a:schemeClr val="accent1"/>
-          </a:effectRef>
-          <a:fontRef idx="minor">
-            <a:schemeClr val="lt1"/>
-          </a:fontRef>
-        </p:style>
-        <p:txBody>
-          <a:bodyPr rtlCol="0" anchor="ctr"/>
-          <a:lstStyle/>
-          <a:p>
-            <a:pPr algn="ctr"/>
-          </a:p>
-        </p:txBody>
-      </p:sp>
-      <p:sp>
-        <p:nvSpPr>
-          <p:cNvPr id="41" name="TextBox 40"/>
-          <p:cNvSpPr txBox="1"/>
-          <p:nvPr/>
-        </p:nvSpPr>
-        <p:spPr>
-          <a:xfrm>
-            <a:off x="475488" y="4407408"/>
-            <a:ext cx="128016" cy="219456"/>
-          </a:xfrm>
-          <a:prstGeom prst="rect">
-            <a:avLst/>
-          </a:prstGeom>
-          <a:noFill/>
-        </p:spPr>
-        <p:txBody>
-          <a:bodyPr wrap="square">
-            <a:spAutoFit/>
-          </a:bodyPr>
-          <a:lstStyle/>
-          <a:p>
-            <a:pPr algn="ctr"/>
-            <a:r>
-              <a:rPr sz="1200" b="1">
-                <a:solidFill>
-                  <a:srgbClr val="58A6FF"/>
-                </a:solidFill>
-              </a:rPr>
-              <a:t>7</a:t>
-            </a:r>
-          </a:p>
-        </p:txBody>
-      </p:sp>
-      <p:sp>
-        <p:nvSpPr>
-          <p:cNvPr id="42" name="Rectangle 41"/>
-          <p:cNvSpPr/>
-          <p:nvPr/>
-        </p:nvSpPr>
-        <p:spPr>
-          <a:xfrm>
-            <a:off x="804672" y="4297680"/>
-            <a:ext cx="2377440" cy="438912"/>
-          </a:xfrm>
-          <a:prstGeom prst="rect">
-            <a:avLst/>
-          </a:prstGeom>
-          <a:solidFill>
-            <a:srgbClr val="161B22"/>
-          </a:solidFill>
-          <a:ln w="9525">
-            <a:solidFill>
-              <a:srgbClr val="30363D"/>
-            </a:solidFill>
-          </a:ln>
-        </p:spPr>
-        <p:style>
-          <a:lnRef idx="1">
-            <a:schemeClr val="accent1"/>
-          </a:lnRef>
-          <a:fillRef idx="3">
-            <a:schemeClr val="accent1"/>
-          </a:fillRef>
-          <a:effectRef idx="2">
-            <a:schemeClr val="accent1"/>
-          </a:effectRef>
-          <a:fontRef idx="minor">
-            <a:schemeClr val="lt1"/>
-          </a:fontRef>
-        </p:style>
-        <p:txBody>
-          <a:bodyPr rtlCol="0" anchor="ctr"/>
-          <a:lstStyle/>
-          <a:p>
-            <a:pPr algn="ctr"/>
-          </a:p>
-        </p:txBody>
-      </p:sp>
-      <p:sp>
-        <p:nvSpPr>
-          <p:cNvPr id="43" name="TextBox 42"/>
-          <p:cNvSpPr txBox="1"/>
-          <p:nvPr/>
-        </p:nvSpPr>
-        <p:spPr>
-          <a:xfrm>
-            <a:off x="914400" y="4407408"/>
-            <a:ext cx="2157984" cy="219456"/>
-          </a:xfrm>
-          <a:prstGeom prst="rect">
-            <a:avLst/>
-          </a:prstGeom>
-          <a:noFill/>
-        </p:spPr>
-        <p:txBody>
-          <a:bodyPr wrap="square">
-            <a:spAutoFit/>
-          </a:bodyPr>
-          <a:lstStyle/>
-          <a:p>
-            <a:pPr algn="l"/>
-            <a:r>
-              <a:rPr sz="1200" b="1">
-                <a:solidFill>
-                  <a:srgbClr val="F0F6FC"/>
-                </a:solidFill>
-              </a:rPr>
-              <a:t>Run setup</a:t>
-            </a:r>
-          </a:p>
-        </p:txBody>
-      </p:sp>
-      <p:sp>
-        <p:nvSpPr>
-          <p:cNvPr id="44" name="Rectangle 43"/>
-          <p:cNvSpPr/>
-          <p:nvPr/>
-        </p:nvSpPr>
-        <p:spPr>
-          <a:xfrm>
-            <a:off x="3273552" y="4297680"/>
-            <a:ext cx="8869680" cy="438912"/>
-          </a:xfrm>
-          <a:prstGeom prst="rect">
-            <a:avLst/>
-          </a:prstGeom>
-          <a:solidFill>
-            <a:srgbClr val="0D1117"/>
-          </a:solidFill>
-          <a:ln w="9525">
-            <a:solidFill>
-              <a:srgbClr val="30363D"/>
-            </a:solidFill>
-          </a:ln>
-        </p:spPr>
-        <p:style>
-          <a:lnRef idx="1">
-            <a:schemeClr val="accent1"/>
-          </a:lnRef>
-          <a:fillRef idx="3">
-            <a:schemeClr val="accent1"/>
-          </a:fillRef>
-          <a:effectRef idx="2">
-            <a:schemeClr val="accent1"/>
-          </a:effectRef>
-          <a:fontRef idx="minor">
-            <a:schemeClr val="lt1"/>
-          </a:fontRef>
-        </p:style>
-        <p:txBody>
-          <a:bodyPr rtlCol="0" anchor="ctr"/>
-          <a:lstStyle/>
-          <a:p>
-            <a:pPr algn="ctr"/>
-          </a:p>
-        </p:txBody>
-      </p:sp>
-      <p:sp>
-        <p:nvSpPr>
-          <p:cNvPr id="45" name="TextBox 44"/>
-          <p:cNvSpPr txBox="1"/>
-          <p:nvPr/>
-        </p:nvSpPr>
-        <p:spPr>
-          <a:xfrm>
-            <a:off x="3383280" y="4407408"/>
-            <a:ext cx="8650224" cy="219456"/>
-          </a:xfrm>
-          <a:prstGeom prst="rect">
-            <a:avLst/>
-          </a:prstGeom>
-          <a:noFill/>
-        </p:spPr>
-        <p:txBody>
-          <a:bodyPr wrap="square">
-            <a:spAutoFit/>
-          </a:bodyPr>
-          <a:lstStyle/>
-          <a:p>
-            <a:pPr algn="l"/>
-            <a:r>
-              <a:rPr sz="1100" b="0">
-                <a:solidFill>
-                  <a:srgbClr val="8B949E"/>
-                </a:solidFill>
-              </a:rPr>
-              <a:t>python orchestrator/setup.py — generates mcp.json + copilot-instructions.md</a:t>
-            </a:r>
-          </a:p>
-        </p:txBody>
-      </p:sp>
-      <p:sp>
-        <p:nvSpPr>
-          <p:cNvPr id="46" name="Rectangle 45"/>
-          <p:cNvSpPr/>
-          <p:nvPr/>
-        </p:nvSpPr>
-        <p:spPr>
-          <a:xfrm>
-            <a:off x="365760" y="4800600"/>
-            <a:ext cx="347472" cy="438912"/>
-          </a:xfrm>
-          <a:prstGeom prst="rect">
-            <a:avLst/>
-          </a:prstGeom>
-          <a:solidFill>
-            <a:srgbClr val="1F3A5F"/>
-          </a:solidFill>
-          <a:ln w="9525">
-            <a:solidFill>
-              <a:srgbClr val="58A6FF"/>
-            </a:solidFill>
-          </a:ln>
-        </p:spPr>
-        <p:style>
-          <a:lnRef idx="1">
-            <a:schemeClr val="accent1"/>
-          </a:lnRef>
-          <a:fillRef idx="3">
-            <a:schemeClr val="accent1"/>
-          </a:fillRef>
-          <a:effectRef idx="2">
-            <a:schemeClr val="accent1"/>
-          </a:effectRef>
-          <a:fontRef idx="minor">
-            <a:schemeClr val="lt1"/>
-          </a:fontRef>
-        </p:style>
-        <p:txBody>
-          <a:bodyPr rtlCol="0" anchor="ctr"/>
-          <a:lstStyle/>
-          <a:p>
-            <a:pPr algn="ctr"/>
-          </a:p>
-        </p:txBody>
-      </p:sp>
-      <p:sp>
-        <p:nvSpPr>
-          <p:cNvPr id="47" name="TextBox 46"/>
-          <p:cNvSpPr txBox="1"/>
-          <p:nvPr/>
-        </p:nvSpPr>
-        <p:spPr>
-          <a:xfrm>
-            <a:off x="475488" y="4910328"/>
-            <a:ext cx="128016" cy="219456"/>
-          </a:xfrm>
-          <a:prstGeom prst="rect">
-            <a:avLst/>
-          </a:prstGeom>
-          <a:noFill/>
-        </p:spPr>
-        <p:txBody>
-          <a:bodyPr wrap="square">
-            <a:spAutoFit/>
-          </a:bodyPr>
-          <a:lstStyle/>
-          <a:p>
-            <a:pPr algn="ctr"/>
-            <a:r>
-              <a:rPr sz="1200" b="1">
-                <a:solidFill>
-                  <a:srgbClr val="58A6FF"/>
-                </a:solidFill>
-              </a:rPr>
-              <a:t>8</a:t>
-            </a:r>
-          </a:p>
-        </p:txBody>
-      </p:sp>
-      <p:sp>
-        <p:nvSpPr>
-          <p:cNvPr id="48" name="Rectangle 47"/>
-          <p:cNvSpPr/>
-          <p:nvPr/>
-        </p:nvSpPr>
-        <p:spPr>
-          <a:xfrm>
-            <a:off x="804672" y="4800600"/>
-            <a:ext cx="2377440" cy="438912"/>
-          </a:xfrm>
-          <a:prstGeom prst="rect">
-            <a:avLst/>
-          </a:prstGeom>
-          <a:solidFill>
-            <a:srgbClr val="161B22"/>
-          </a:solidFill>
-          <a:ln w="9525">
-            <a:solidFill>
-              <a:srgbClr val="30363D"/>
-            </a:solidFill>
-          </a:ln>
-        </p:spPr>
-        <p:style>
-          <a:lnRef idx="1">
-            <a:schemeClr val="accent1"/>
-          </a:lnRef>
-          <a:fillRef idx="3">
-            <a:schemeClr val="accent1"/>
-          </a:fillRef>
-          <a:effectRef idx="2">
-            <a:schemeClr val="accent1"/>
-          </a:effectRef>
-          <a:fontRef idx="minor">
-            <a:schemeClr val="lt1"/>
-          </a:fontRef>
-        </p:style>
-        <p:txBody>
-          <a:bodyPr rtlCol="0" anchor="ctr"/>
-          <a:lstStyle/>
-          <a:p>
-            <a:pPr algn="ctr"/>
-          </a:p>
-        </p:txBody>
-      </p:sp>
-      <p:sp>
-        <p:nvSpPr>
-          <p:cNvPr id="49" name="TextBox 48"/>
-          <p:cNvSpPr txBox="1"/>
-          <p:nvPr/>
-        </p:nvSpPr>
-        <p:spPr>
-          <a:xfrm>
-            <a:off x="914400" y="4910328"/>
-            <a:ext cx="2157984" cy="219456"/>
-          </a:xfrm>
-          <a:prstGeom prst="rect">
-            <a:avLst/>
-          </a:prstGeom>
-          <a:noFill/>
-        </p:spPr>
-        <p:txBody>
-          <a:bodyPr wrap="square">
-            <a:spAutoFit/>
-          </a:bodyPr>
-          <a:lstStyle/>
-          <a:p>
-            <a:pPr algn="l"/>
-            <a:r>
-              <a:rPr sz="1200" b="1">
-                <a:solidFill>
-                  <a:srgbClr val="F0F6FC"/>
-                </a:solidFill>
-              </a:rPr>
-              <a:t>Open in VS Code</a:t>
-            </a:r>
-          </a:p>
-        </p:txBody>
-      </p:sp>
-      <p:sp>
-        <p:nvSpPr>
-          <p:cNvPr id="50" name="Rectangle 49"/>
-          <p:cNvSpPr/>
-          <p:nvPr/>
-        </p:nvSpPr>
-        <p:spPr>
-          <a:xfrm>
-            <a:off x="3273552" y="4800600"/>
-            <a:ext cx="8869680" cy="438912"/>
-          </a:xfrm>
-          <a:prstGeom prst="rect">
-            <a:avLst/>
-          </a:prstGeom>
-          <a:solidFill>
-            <a:srgbClr val="0D1117"/>
-          </a:solidFill>
-          <a:ln w="9525">
-            <a:solidFill>
-              <a:srgbClr val="30363D"/>
-            </a:solidFill>
-          </a:ln>
-        </p:spPr>
-        <p:style>
-          <a:lnRef idx="1">
-            <a:schemeClr val="accent1"/>
-          </a:lnRef>
-          <a:fillRef idx="3">
-            <a:schemeClr val="accent1"/>
-          </a:fillRef>
-          <a:effectRef idx="2">
-            <a:schemeClr val="accent1"/>
-          </a:effectRef>
-          <a:fontRef idx="minor">
-            <a:schemeClr val="lt1"/>
-          </a:fontRef>
-        </p:style>
-        <p:txBody>
-          <a:bodyPr rtlCol="0" anchor="ctr"/>
-          <a:lstStyle/>
-          <a:p>
-            <a:pPr algn="ctr"/>
-          </a:p>
-        </p:txBody>
-      </p:sp>
-      <p:sp>
-        <p:nvSpPr>
-          <p:cNvPr id="51" name="TextBox 50"/>
-          <p:cNvSpPr txBox="1"/>
-          <p:nvPr/>
-        </p:nvSpPr>
-        <p:spPr>
-          <a:xfrm>
-            <a:off x="3383280" y="4910328"/>
-            <a:ext cx="8650224" cy="219456"/>
-          </a:xfrm>
-          <a:prstGeom prst="rect">
-            <a:avLst/>
-          </a:prstGeom>
-          <a:noFill/>
-        </p:spPr>
-        <p:txBody>
-          <a:bodyPr wrap="square">
-            <a:spAutoFit/>
-          </a:bodyPr>
-          <a:lstStyle/>
-          <a:p>
-            <a:pPr algn="l"/>
-            <a:r>
-              <a:rPr sz="1100" b="0">
-                <a:solidFill>
-                  <a:srgbClr val="8B949E"/>
-                </a:solidFill>
-              </a:rPr>
-              <a:t>source .venv/bin/activate  &amp;&amp;  code /path/to/repo</a:t>
-            </a:r>
-          </a:p>
-        </p:txBody>
-      </p:sp>
-      <p:sp>
-        <p:nvSpPr>
-          <p:cNvPr id="52" name="TextBox 51"/>
-          <p:cNvSpPr txBox="1"/>
-          <p:nvPr/>
-        </p:nvSpPr>
-        <p:spPr>
-          <a:xfrm>
-            <a:off x="365760" y="6446520"/>
-            <a:ext cx="11430000" cy="320040"/>
-          </a:xfrm>
-          <a:prstGeom prst="rect">
-            <a:avLst/>
-          </a:prstGeom>
-          <a:noFill/>
-        </p:spPr>
-        <p:txBody>
-          <a:bodyPr wrap="square">
-            <a:spAutoFit/>
-          </a:bodyPr>
-          <a:lstStyle/>
-          <a:p>
-            <a:pPr algn="ctr"/>
-            <a:r>
-              <a:rPr sz="1200" b="1">
-                <a:solidFill>
-                  <a:srgbClr val="F0883E"/>
-                </a:solidFill>
-              </a:rPr>
-              <a:t>★  Only config.yaml files are ever edited by the user — everything else is generated</a:t>
+              <a:t>Data Source</a:t>
             </a:r>
           </a:p>
         </p:txBody>

--- a/demo/slides.pptx
+++ b/demo/slides.pptx
@@ -15092,8 +15092,8 @@
         </p:nvSpPr>
         <p:spPr>
           <a:xfrm>
-            <a:off x="365760" y="137160"/>
-            <a:ext cx="11430000" cy="256032"/>
+            <a:off x="365760" y="91440"/>
+            <a:ext cx="11430000" cy="228600"/>
           </a:xfrm>
           <a:prstGeom prst="rect">
             <a:avLst/>
@@ -15113,7 +15113,7 @@
                   <a:srgbClr val="58A6FF"/>
                 </a:solidFill>
               </a:rPr>
-              <a:t>COMPONENT DIAGRAM</a:t>
+              <a:t>DATA FLOW DIAGRAM</a:t>
             </a:r>
           </a:p>
         </p:txBody>
@@ -15126,7 +15126,7 @@
         </p:nvSpPr>
         <p:spPr>
           <a:xfrm>
-            <a:off x="365760" y="411480"/>
+            <a:off x="365760" y="338328"/>
             <a:ext cx="11430000" cy="365760"/>
           </a:xfrm>
           <a:prstGeom prst="rect">
@@ -15142,12 +15142,12 @@
           <a:p>
             <a:pPr algn="ctr"/>
             <a:r>
-              <a:rPr sz="2200" b="1">
+              <a:rPr sz="1900" b="1">
                 <a:solidFill>
                   <a:srgbClr val="F0F6FC"/>
                 </a:solidFill>
               </a:rPr>
-              <a:t>MCP Tool Calling &amp; RAG Knowledge Pipeline</a:t>
+              <a:t>Agentic Orchestration — Components, Interfaces &amp; Data Flow</a:t>
             </a:r>
           </a:p>
         </p:txBody>
@@ -15160,8 +15160,8 @@
         </p:nvSpPr>
         <p:spPr>
           <a:xfrm>
-            <a:off x="4206240" y="841248"/>
-            <a:ext cx="2743200" cy="502920"/>
+            <a:off x="3931920" y="758952"/>
+            <a:ext cx="3291840" cy="566928"/>
           </a:xfrm>
           <a:prstGeom prst="rect">
             <a:avLst/>
@@ -15205,8 +15205,8 @@
         </p:nvSpPr>
         <p:spPr>
           <a:xfrm>
-            <a:off x="4233672" y="877824"/>
-            <a:ext cx="2688336" cy="420624"/>
+            <a:off x="3977639" y="832103"/>
+            <a:ext cx="3200400" cy="420623"/>
           </a:xfrm>
           <a:prstGeom prst="rect">
             <a:avLst/>
@@ -15226,7 +15226,7 @@
                   <a:srgbClr val="BC8CFF"/>
                 </a:solidFill>
               </a:rPr>
-              <a:t>GitHub Copilot  (Agent Mode)</a:t>
+              <a:t>GitHub Copilot  (Agent Mode  ·  LLM)</a:t>
             </a:r>
           </a:p>
         </p:txBody>
@@ -15239,8 +15239,8 @@
         </p:nvSpPr>
         <p:spPr>
           <a:xfrm>
-            <a:off x="274320" y="1965960"/>
-            <a:ext cx="2606040" cy="822960"/>
+            <a:off x="182880" y="1965960"/>
+            <a:ext cx="2651760" cy="822960"/>
           </a:xfrm>
           <a:prstGeom prst="rect">
             <a:avLst/>
@@ -15284,8 +15284,8 @@
         </p:nvSpPr>
         <p:spPr>
           <a:xfrm>
-            <a:off x="310896" y="2020824"/>
-            <a:ext cx="2532888" cy="713232"/>
+            <a:off x="228600" y="2039112"/>
+            <a:ext cx="2560320" cy="676656"/>
           </a:xfrm>
           <a:prstGeom prst="rect">
             <a:avLst/>
@@ -15307,7 +15307,7 @@
               </a:rPr>
               <a:t>Orchestrator
 router_mcp_server.py
-« get_relevant_repos »</a:t>
+get_relevant_repos</a:t>
             </a:r>
           </a:p>
         </p:txBody>
@@ -15320,8 +15320,8 @@
         </p:nvSpPr>
         <p:spPr>
           <a:xfrm>
-            <a:off x="3520440" y="1371600"/>
-            <a:ext cx="2560320" cy="566928"/>
+            <a:off x="3200400" y="1389888"/>
+            <a:ext cx="2560320" cy="594360"/>
           </a:xfrm>
           <a:prstGeom prst="rect">
             <a:avLst/>
@@ -15365,8 +15365,8 @@
         </p:nvSpPr>
         <p:spPr>
           <a:xfrm>
-            <a:off x="3547872" y="1408176"/>
-            <a:ext cx="2505456" cy="256032"/>
+            <a:off x="3246120" y="1426464"/>
+            <a:ext cx="2468879" cy="256032"/>
           </a:xfrm>
           <a:prstGeom prst="rect">
             <a:avLst/>
@@ -15399,28 +15399,28 @@
         </p:nvSpPr>
         <p:spPr>
           <a:xfrm>
-            <a:off x="3547872" y="1682496"/>
-            <a:ext cx="2505456" cy="201168"/>
-          </a:xfrm>
-          <a:prstGeom prst="rect">
-            <a:avLst/>
-          </a:prstGeom>
-          <a:noFill/>
-        </p:spPr>
-        <p:txBody>
-          <a:bodyPr wrap="square">
-            <a:spAutoFit/>
-          </a:bodyPr>
-          <a:lstStyle/>
-          <a:p>
-            <a:pPr algn="ctr"/>
-            <a:r>
-              <a:rPr sz="900" b="0">
+            <a:off x="3246120" y="1728216"/>
+            <a:ext cx="2468879" cy="182880"/>
+          </a:xfrm>
+          <a:prstGeom prst="rect">
+            <a:avLst/>
+          </a:prstGeom>
+          <a:noFill/>
+        </p:spPr>
+        <p:txBody>
+          <a:bodyPr wrap="square">
+            <a:spAutoFit/>
+          </a:bodyPr>
+          <a:lstStyle/>
+          <a:p>
+            <a:pPr algn="ctr"/>
+            <a:r>
+              <a:rPr sz="800" b="0">
                 <a:solidFill>
                   <a:srgbClr val="58A6FF"/>
                 </a:solidFill>
               </a:rPr>
-              <a:t>mcp_server.py  « query_repo »</a:t>
+              <a:t>mcp_server.py  ·  query_repo</a:t>
             </a:r>
           </a:p>
         </p:txBody>
@@ -15433,8 +15433,8 @@
         </p:nvSpPr>
         <p:spPr>
           <a:xfrm>
-            <a:off x="3520440" y="2286000"/>
-            <a:ext cx="2560320" cy="566928"/>
+            <a:off x="3200400" y="2331720"/>
+            <a:ext cx="2560320" cy="594360"/>
           </a:xfrm>
           <a:prstGeom prst="rect">
             <a:avLst/>
@@ -15478,8 +15478,8 @@
         </p:nvSpPr>
         <p:spPr>
           <a:xfrm>
-            <a:off x="3547872" y="2322576"/>
-            <a:ext cx="2505456" cy="256032"/>
+            <a:off x="3246120" y="2368296"/>
+            <a:ext cx="2468879" cy="256032"/>
           </a:xfrm>
           <a:prstGeom prst="rect">
             <a:avLst/>
@@ -15512,28 +15512,28 @@
         </p:nvSpPr>
         <p:spPr>
           <a:xfrm>
-            <a:off x="3547872" y="2596896"/>
-            <a:ext cx="2505456" cy="201168"/>
-          </a:xfrm>
-          <a:prstGeom prst="rect">
-            <a:avLst/>
-          </a:prstGeom>
-          <a:noFill/>
-        </p:spPr>
-        <p:txBody>
-          <a:bodyPr wrap="square">
-            <a:spAutoFit/>
-          </a:bodyPr>
-          <a:lstStyle/>
-          <a:p>
-            <a:pPr algn="ctr"/>
-            <a:r>
-              <a:rPr sz="900" b="0">
+            <a:off x="3246120" y="2670048"/>
+            <a:ext cx="2468879" cy="182880"/>
+          </a:xfrm>
+          <a:prstGeom prst="rect">
+            <a:avLst/>
+          </a:prstGeom>
+          <a:noFill/>
+        </p:spPr>
+        <p:txBody>
+          <a:bodyPr wrap="square">
+            <a:spAutoFit/>
+          </a:bodyPr>
+          <a:lstStyle/>
+          <a:p>
+            <a:pPr algn="ctr"/>
+            <a:r>
+              <a:rPr sz="800" b="0">
                 <a:solidFill>
                   <a:srgbClr val="58A6FF"/>
                 </a:solidFill>
               </a:rPr>
-              <a:t>mcp_server.py  « query_repo »</a:t>
+              <a:t>mcp_server.py  ·  query_repo</a:t>
             </a:r>
           </a:p>
         </p:txBody>
@@ -15546,8 +15546,8 @@
         </p:nvSpPr>
         <p:spPr>
           <a:xfrm>
-            <a:off x="3520440" y="3200400"/>
-            <a:ext cx="2560320" cy="566928"/>
+            <a:off x="3200400" y="3273552"/>
+            <a:ext cx="2560320" cy="594360"/>
           </a:xfrm>
           <a:prstGeom prst="rect">
             <a:avLst/>
@@ -15591,8 +15591,8 @@
         </p:nvSpPr>
         <p:spPr>
           <a:xfrm>
-            <a:off x="3547872" y="3236976"/>
-            <a:ext cx="2505456" cy="256032"/>
+            <a:off x="3246120" y="3310128"/>
+            <a:ext cx="2468879" cy="256032"/>
           </a:xfrm>
           <a:prstGeom prst="rect">
             <a:avLst/>
@@ -15625,28 +15625,28 @@
         </p:nvSpPr>
         <p:spPr>
           <a:xfrm>
-            <a:off x="3547872" y="3511296"/>
-            <a:ext cx="2505456" cy="201168"/>
-          </a:xfrm>
-          <a:prstGeom prst="rect">
-            <a:avLst/>
-          </a:prstGeom>
-          <a:noFill/>
-        </p:spPr>
-        <p:txBody>
-          <a:bodyPr wrap="square">
-            <a:spAutoFit/>
-          </a:bodyPr>
-          <a:lstStyle/>
-          <a:p>
-            <a:pPr algn="ctr"/>
-            <a:r>
-              <a:rPr sz="900" b="0">
+            <a:off x="3246120" y="3611880"/>
+            <a:ext cx="2468879" cy="182880"/>
+          </a:xfrm>
+          <a:prstGeom prst="rect">
+            <a:avLst/>
+          </a:prstGeom>
+          <a:noFill/>
+        </p:spPr>
+        <p:txBody>
+          <a:bodyPr wrap="square">
+            <a:spAutoFit/>
+          </a:bodyPr>
+          <a:lstStyle/>
+          <a:p>
+            <a:pPr algn="ctr"/>
+            <a:r>
+              <a:rPr sz="800" b="0">
                 <a:solidFill>
                   <a:srgbClr val="58A6FF"/>
                 </a:solidFill>
               </a:rPr>
-              <a:t>mcp_server.py  « query_repo »</a:t>
+              <a:t>mcp_server.py  ·  query_repo</a:t>
             </a:r>
           </a:p>
         </p:txBody>
@@ -15659,8 +15659,8 @@
         </p:nvSpPr>
         <p:spPr>
           <a:xfrm>
-            <a:off x="6675120" y="1920240"/>
-            <a:ext cx="2377440" cy="960120"/>
+            <a:off x="6492240" y="1828800"/>
+            <a:ext cx="2468880" cy="1005840"/>
           </a:xfrm>
           <a:prstGeom prst="rect">
             <a:avLst/>
@@ -15704,8 +15704,8 @@
         </p:nvSpPr>
         <p:spPr>
           <a:xfrm>
-            <a:off x="6711696" y="1984248"/>
-            <a:ext cx="2304288" cy="832104"/>
+            <a:off x="6537959" y="1920240"/>
+            <a:ext cx="2377440" cy="822960"/>
           </a:xfrm>
           <a:prstGeom prst="rect">
             <a:avLst/>
@@ -15727,7 +15727,7 @@
               </a:rPr>
               <a:t>RAG Engine
 repo_rag.py
-semantic + keyword search</a:t>
+hybrid: semantic + keyword</a:t>
             </a:r>
           </a:p>
         </p:txBody>
@@ -15740,8 +15740,89 @@
         </p:nvSpPr>
         <p:spPr>
           <a:xfrm>
-            <a:off x="6675120" y="3657600"/>
-            <a:ext cx="2377440" cy="640080"/>
+            <a:off x="9418320" y="1920240"/>
+            <a:ext cx="2560320" cy="914400"/>
+          </a:xfrm>
+          <a:prstGeom prst="rect">
+            <a:avLst/>
+          </a:prstGeom>
+          <a:solidFill>
+            <a:srgbClr val="101825"/>
+          </a:solidFill>
+          <a:ln w="9525">
+            <a:solidFill>
+              <a:srgbClr val="58A6FF"/>
+            </a:solidFill>
+          </a:ln>
+        </p:spPr>
+        <p:style>
+          <a:lnRef idx="1">
+            <a:schemeClr val="accent1"/>
+          </a:lnRef>
+          <a:fillRef idx="3">
+            <a:schemeClr val="accent1"/>
+          </a:fillRef>
+          <a:effectRef idx="2">
+            <a:schemeClr val="accent1"/>
+          </a:effectRef>
+          <a:fontRef idx="minor">
+            <a:schemeClr val="lt1"/>
+          </a:fontRef>
+        </p:style>
+        <p:txBody>
+          <a:bodyPr rtlCol="0" anchor="ctr"/>
+          <a:lstStyle/>
+          <a:p>
+            <a:pPr algn="ctr"/>
+          </a:p>
+        </p:txBody>
+      </p:sp>
+      <p:sp>
+        <p:nvSpPr>
+          <p:cNvPr id="20" name="TextBox 19"/>
+          <p:cNvSpPr txBox="1"/>
+          <p:nvPr/>
+        </p:nvSpPr>
+        <p:spPr>
+          <a:xfrm>
+            <a:off x="9464040" y="2011680"/>
+            <a:ext cx="2468879" cy="731520"/>
+          </a:xfrm>
+          <a:prstGeom prst="rect">
+            <a:avLst/>
+          </a:prstGeom>
+          <a:noFill/>
+        </p:spPr>
+        <p:txBody>
+          <a:bodyPr wrap="square">
+            <a:spAutoFit/>
+          </a:bodyPr>
+          <a:lstStyle/>
+          <a:p>
+            <a:pPr algn="ctr"/>
+            <a:r>
+              <a:rPr sz="1000" b="0">
+                <a:solidFill>
+                  <a:srgbClr val="F0F6FC"/>
+                </a:solidFill>
+              </a:rPr>
+              <a:t>Embedding Model
+all-MiniLM-L6-v2
+local  ·  offline  ·  ~90 MB</a:t>
+            </a:r>
+          </a:p>
+        </p:txBody>
+      </p:sp>
+      <p:sp>
+        <p:nvSpPr>
+          <p:cNvPr id="21" name="Rectangle 20"/>
+          <p:cNvSpPr/>
+          <p:nvPr/>
+        </p:nvSpPr>
+        <p:spPr>
+          <a:xfrm>
+            <a:off x="6492240" y="3703320"/>
+            <a:ext cx="2468880" cy="658368"/>
           </a:xfrm>
           <a:prstGeom prst="rect">
             <a:avLst/>
@@ -15779,14 +15860,14 @@
       </p:sp>
       <p:sp>
         <p:nvSpPr>
-          <p:cNvPr id="20" name="TextBox 19"/>
-          <p:cNvSpPr txBox="1"/>
-          <p:nvPr/>
-        </p:nvSpPr>
-        <p:spPr>
-          <a:xfrm>
-            <a:off x="6711696" y="3712463"/>
-            <a:ext cx="2304288" cy="530352"/>
+          <p:cNvPr id="22" name="TextBox 21"/>
+          <p:cNvSpPr txBox="1"/>
+          <p:nvPr/>
+        </p:nvSpPr>
+        <p:spPr>
+          <a:xfrm>
+            <a:off x="6537959" y="3776472"/>
+            <a:ext cx="2377440" cy="512063"/>
           </a:xfrm>
           <a:prstGeom prst="rect">
             <a:avLst/>
@@ -15806,22 +15887,22 @@
                   <a:srgbClr val="3FB950"/>
                 </a:solidFill>
               </a:rPr>
-              <a:t>ChromaDB  •  .chroma_db/
-vector store  (L2 distance)</a:t>
-            </a:r>
-          </a:p>
-        </p:txBody>
-      </p:sp>
-      <p:sp>
-        <p:nvSpPr>
-          <p:cNvPr id="21" name="Rectangle 20"/>
+              <a:t>ChromaDB  ·  .chroma_db/
+vector store  ·  L2 distance</a:t>
+            </a:r>
+          </a:p>
+        </p:txBody>
+      </p:sp>
+      <p:sp>
+        <p:nvSpPr>
+          <p:cNvPr id="23" name="Rectangle 22"/>
           <p:cNvSpPr/>
           <p:nvPr/>
         </p:nvSpPr>
         <p:spPr>
           <a:xfrm>
-            <a:off x="6263640" y="4892040"/>
-            <a:ext cx="1783080" cy="548640"/>
+            <a:off x="6080760" y="4709160"/>
+            <a:ext cx="1737360" cy="566928"/>
           </a:xfrm>
           <a:prstGeom prst="rect">
             <a:avLst/>
@@ -15859,14 +15940,14 @@
       </p:sp>
       <p:sp>
         <p:nvSpPr>
-          <p:cNvPr id="22" name="TextBox 21"/>
-          <p:cNvSpPr txBox="1"/>
-          <p:nvPr/>
-        </p:nvSpPr>
-        <p:spPr>
-          <a:xfrm>
-            <a:off x="6281928" y="4937760"/>
-            <a:ext cx="1746504" cy="457200"/>
+          <p:cNvPr id="24" name="TextBox 23"/>
+          <p:cNvSpPr txBox="1"/>
+          <p:nvPr/>
+        </p:nvSpPr>
+        <p:spPr>
+          <a:xfrm>
+            <a:off x="6108192" y="4764024"/>
+            <a:ext cx="1682495" cy="457200"/>
           </a:xfrm>
           <a:prstGeom prst="rect">
             <a:avLst/>
@@ -15894,14 +15975,14 @@
       </p:sp>
       <p:sp>
         <p:nvSpPr>
-          <p:cNvPr id="23" name="Rectangle 22"/>
+          <p:cNvPr id="25" name="Rectangle 24"/>
           <p:cNvSpPr/>
           <p:nvPr/>
         </p:nvSpPr>
         <p:spPr>
           <a:xfrm>
-            <a:off x="8275320" y="4892040"/>
-            <a:ext cx="1783080" cy="548640"/>
+            <a:off x="8092440" y="4709160"/>
+            <a:ext cx="1737360" cy="566928"/>
           </a:xfrm>
           <a:prstGeom prst="rect">
             <a:avLst/>
@@ -15939,14 +16020,14 @@
       </p:sp>
       <p:sp>
         <p:nvSpPr>
-          <p:cNvPr id="24" name="TextBox 23"/>
-          <p:cNvSpPr txBox="1"/>
-          <p:nvPr/>
-        </p:nvSpPr>
-        <p:spPr>
-          <a:xfrm>
-            <a:off x="8293608" y="4937760"/>
-            <a:ext cx="1746504" cy="457200"/>
+          <p:cNvPr id="26" name="TextBox 25"/>
+          <p:cNvSpPr txBox="1"/>
+          <p:nvPr/>
+        </p:nvSpPr>
+        <p:spPr>
+          <a:xfrm>
+            <a:off x="8119871" y="4764024"/>
+            <a:ext cx="1682495" cy="457200"/>
           </a:xfrm>
           <a:prstGeom prst="rect">
             <a:avLst/>
@@ -15972,18 +16053,136 @@
           </a:p>
         </p:txBody>
       </p:sp>
+      <p:sp>
+        <p:nvSpPr>
+          <p:cNvPr id="27" name="Rectangle 26"/>
+          <p:cNvSpPr/>
+          <p:nvPr/>
+        </p:nvSpPr>
+        <p:spPr>
+          <a:xfrm>
+            <a:off x="9418320" y="3611880"/>
+            <a:ext cx="2560320" cy="1463040"/>
+          </a:xfrm>
+          <a:prstGeom prst="rect">
+            <a:avLst/>
+          </a:prstGeom>
+          <a:solidFill>
+            <a:srgbClr val="180707"/>
+          </a:solidFill>
+          <a:ln w="9525">
+            <a:solidFill>
+              <a:srgbClr val="FF7B72"/>
+            </a:solidFill>
+          </a:ln>
+        </p:spPr>
+        <p:style>
+          <a:lnRef idx="1">
+            <a:schemeClr val="accent1"/>
+          </a:lnRef>
+          <a:fillRef idx="3">
+            <a:schemeClr val="accent1"/>
+          </a:fillRef>
+          <a:effectRef idx="2">
+            <a:schemeClr val="accent1"/>
+          </a:effectRef>
+          <a:fontRef idx="minor">
+            <a:schemeClr val="lt1"/>
+          </a:fontRef>
+        </p:style>
+        <p:txBody>
+          <a:bodyPr rtlCol="0" anchor="ctr"/>
+          <a:lstStyle/>
+          <a:p>
+            <a:pPr algn="ctr"/>
+          </a:p>
+        </p:txBody>
+      </p:sp>
+      <p:sp>
+        <p:nvSpPr>
+          <p:cNvPr id="28" name="TextBox 27"/>
+          <p:cNvSpPr txBox="1"/>
+          <p:nvPr/>
+        </p:nvSpPr>
+        <p:spPr>
+          <a:xfrm>
+            <a:off x="9491472" y="3685032"/>
+            <a:ext cx="2414015" cy="228600"/>
+          </a:xfrm>
+          <a:prstGeom prst="rect">
+            <a:avLst/>
+          </a:prstGeom>
+          <a:noFill/>
+        </p:spPr>
+        <p:txBody>
+          <a:bodyPr wrap="square">
+            <a:spAutoFit/>
+          </a:bodyPr>
+          <a:lstStyle/>
+          <a:p>
+            <a:pPr algn="l"/>
+            <a:r>
+              <a:rPr sz="900" b="1">
+                <a:solidFill>
+                  <a:srgbClr val="FF7B72"/>
+                </a:solidFill>
+              </a:rPr>
+              <a:t>⚡  Normally: LLM API calls</a:t>
+            </a:r>
+          </a:p>
+        </p:txBody>
+      </p:sp>
+      <p:sp>
+        <p:nvSpPr>
+          <p:cNvPr id="29" name="TextBox 28"/>
+          <p:cNvSpPr txBox="1"/>
+          <p:nvPr/>
+        </p:nvSpPr>
+        <p:spPr>
+          <a:xfrm>
+            <a:off x="9491472" y="3959352"/>
+            <a:ext cx="2414015" cy="1005840"/>
+          </a:xfrm>
+          <a:prstGeom prst="rect">
+            <a:avLst/>
+          </a:prstGeom>
+          <a:noFill/>
+        </p:spPr>
+        <p:txBody>
+          <a:bodyPr wrap="square">
+            <a:spAutoFit/>
+          </a:bodyPr>
+          <a:lstStyle/>
+          <a:p>
+            <a:pPr algn="l"/>
+            <a:r>
+              <a:rPr sz="800" b="0">
+                <a:solidFill>
+                  <a:srgbClr val="FF7B72"/>
+                </a:solidFill>
+              </a:rPr>
+              <a:t>✗  Embedding API  (text-embedding-ada-002)
+   → replaced by all-MiniLM-L6-v2
+      runs locally, no API key, no cloud
+✗  Answer generation  (GPT-4 / Claude API)
+   → not needed: Copilot IS the LLM
+      receives chunks, synthesises answer</a:t>
+            </a:r>
+          </a:p>
+        </p:txBody>
+      </p:sp>
       <p:cxnSp>
         <p:nvCxnSpPr>
-          <p:cNvPr id="25" name="Connector 24"/>
+          <p:cNvPr id="30" name="Connector 29"/>
           <p:cNvCxnSpPr/>
           <p:nvPr/>
         </p:nvCxnSpPr>
         <p:spPr>
           <a:xfrm flipH="1">
-            <a:off x="1572768" y="1344168"/>
-            <a:ext cx="3364992" cy="621792"/>
-          </a:xfrm>
-          <a:prstGeom prst="line">
+            <a:off x="1508760" y="1325880"/>
+            <a:ext cx="3337560" cy="640080"/>
+          </a:xfrm>
+          <a:prstGeom prst="bentConnector3">
             <a:avLst/>
           </a:prstGeom>
           <a:ln w="15876">
@@ -16010,50 +16209,95 @@
       </p:cxnSp>
       <p:sp>
         <p:nvSpPr>
-          <p:cNvPr id="26" name="TextBox 25"/>
-          <p:cNvSpPr txBox="1"/>
-          <p:nvPr/>
-        </p:nvSpPr>
-        <p:spPr>
-          <a:xfrm>
-            <a:off x="2432304" y="1499616"/>
-            <a:ext cx="1645920" cy="292608"/>
-          </a:xfrm>
-          <a:prstGeom prst="rect">
-            <a:avLst/>
-          </a:prstGeom>
-          <a:noFill/>
-        </p:spPr>
-        <p:txBody>
-          <a:bodyPr wrap="square">
-            <a:spAutoFit/>
-          </a:bodyPr>
-          <a:lstStyle/>
-          <a:p>
-            <a:pPr algn="ctr"/>
-            <a:r>
-              <a:rPr sz="800" b="0">
-                <a:solidFill>
-                  <a:srgbClr val="BC8CFF"/>
-                </a:solidFill>
-              </a:rPr>
-              <a:t>get_relevant_repos</a:t>
+          <p:cNvPr id="31" name="Rectangle 30"/>
+          <p:cNvSpPr/>
+          <p:nvPr/>
+        </p:nvSpPr>
+        <p:spPr>
+          <a:xfrm>
+            <a:off x="3049523" y="1517903"/>
+            <a:ext cx="256032" cy="256032"/>
+          </a:xfrm>
+          <a:prstGeom prst="rect">
+            <a:avLst/>
+          </a:prstGeom>
+          <a:solidFill>
+            <a:srgbClr val="BC8CFF"/>
+          </a:solidFill>
+          <a:ln w="9525">
+            <a:solidFill>
+              <a:srgbClr val="BC8CFF"/>
+            </a:solidFill>
+          </a:ln>
+        </p:spPr>
+        <p:style>
+          <a:lnRef idx="1">
+            <a:schemeClr val="accent1"/>
+          </a:lnRef>
+          <a:fillRef idx="3">
+            <a:schemeClr val="accent1"/>
+          </a:fillRef>
+          <a:effectRef idx="2">
+            <a:schemeClr val="accent1"/>
+          </a:effectRef>
+          <a:fontRef idx="minor">
+            <a:schemeClr val="lt1"/>
+          </a:fontRef>
+        </p:style>
+        <p:txBody>
+          <a:bodyPr rtlCol="0" anchor="ctr"/>
+          <a:lstStyle/>
+          <a:p>
+            <a:pPr algn="ctr"/>
+          </a:p>
+        </p:txBody>
+      </p:sp>
+      <p:sp>
+        <p:nvSpPr>
+          <p:cNvPr id="32" name="TextBox 31"/>
+          <p:cNvSpPr txBox="1"/>
+          <p:nvPr/>
+        </p:nvSpPr>
+        <p:spPr>
+          <a:xfrm>
+            <a:off x="3049523" y="1499616"/>
+            <a:ext cx="256032" cy="256032"/>
+          </a:xfrm>
+          <a:prstGeom prst="rect">
+            <a:avLst/>
+          </a:prstGeom>
+          <a:noFill/>
+        </p:spPr>
+        <p:txBody>
+          <a:bodyPr wrap="square">
+            <a:spAutoFit/>
+          </a:bodyPr>
+          <a:lstStyle/>
+          <a:p>
+            <a:pPr algn="ctr"/>
+            <a:r>
+              <a:rPr sz="800" b="1">
+                <a:solidFill>
+                  <a:srgbClr val="0D1117"/>
+                </a:solidFill>
+              </a:rPr>
+              <a:t>1</a:t>
             </a:r>
           </a:p>
         </p:txBody>
       </p:sp>
       <p:cxnSp>
         <p:nvCxnSpPr>
-          <p:cNvPr id="27" name="Connector 26"/>
+          <p:cNvPr id="33" name="Connector 32"/>
           <p:cNvCxnSpPr/>
           <p:nvPr/>
         </p:nvCxnSpPr>
         <p:spPr>
           <a:xfrm flipH="1">
-            <a:off x="4800600" y="1344168"/>
-            <a:ext cx="1371600" cy="27432"/>
-          </a:xfrm>
-          <a:prstGeom prst="line">
+            <a:off x="4480560" y="1325880"/>
+            <a:ext cx="1645919" cy="64008"/>
+          </a:xfrm>
+          <a:prstGeom prst="bentConnector3">
             <a:avLst/>
           </a:prstGeom>
           <a:ln w="15876">
@@ -16080,50 +16324,129 @@
       </p:cxnSp>
       <p:sp>
         <p:nvSpPr>
-          <p:cNvPr id="28" name="TextBox 27"/>
-          <p:cNvSpPr txBox="1"/>
-          <p:nvPr/>
-        </p:nvSpPr>
-        <p:spPr>
-          <a:xfrm>
-            <a:off x="4663440" y="1202436"/>
-            <a:ext cx="1645920" cy="292608"/>
-          </a:xfrm>
-          <a:prstGeom prst="rect">
-            <a:avLst/>
-          </a:prstGeom>
-          <a:noFill/>
-        </p:spPr>
-        <p:txBody>
-          <a:bodyPr wrap="square">
-            <a:spAutoFit/>
-          </a:bodyPr>
-          <a:lstStyle/>
-          <a:p>
-            <a:pPr algn="ctr"/>
-            <a:r>
-              <a:rPr sz="800" b="0">
+          <p:cNvPr id="34" name="Rectangle 33"/>
+          <p:cNvSpPr/>
+          <p:nvPr/>
+        </p:nvSpPr>
+        <p:spPr>
+          <a:xfrm>
+            <a:off x="5175504" y="1229867"/>
+            <a:ext cx="256032" cy="256032"/>
+          </a:xfrm>
+          <a:prstGeom prst="rect">
+            <a:avLst/>
+          </a:prstGeom>
+          <a:solidFill>
+            <a:srgbClr val="58A6FF"/>
+          </a:solidFill>
+          <a:ln w="9525">
+            <a:solidFill>
+              <a:srgbClr val="58A6FF"/>
+            </a:solidFill>
+          </a:ln>
+        </p:spPr>
+        <p:style>
+          <a:lnRef idx="1">
+            <a:schemeClr val="accent1"/>
+          </a:lnRef>
+          <a:fillRef idx="3">
+            <a:schemeClr val="accent1"/>
+          </a:fillRef>
+          <a:effectRef idx="2">
+            <a:schemeClr val="accent1"/>
+          </a:effectRef>
+          <a:fontRef idx="minor">
+            <a:schemeClr val="lt1"/>
+          </a:fontRef>
+        </p:style>
+        <p:txBody>
+          <a:bodyPr rtlCol="0" anchor="ctr"/>
+          <a:lstStyle/>
+          <a:p>
+            <a:pPr algn="ctr"/>
+          </a:p>
+        </p:txBody>
+      </p:sp>
+      <p:sp>
+        <p:nvSpPr>
+          <p:cNvPr id="35" name="TextBox 34"/>
+          <p:cNvSpPr txBox="1"/>
+          <p:nvPr/>
+        </p:nvSpPr>
+        <p:spPr>
+          <a:xfrm>
+            <a:off x="5175504" y="1211580"/>
+            <a:ext cx="256032" cy="256032"/>
+          </a:xfrm>
+          <a:prstGeom prst="rect">
+            <a:avLst/>
+          </a:prstGeom>
+          <a:noFill/>
+        </p:spPr>
+        <p:txBody>
+          <a:bodyPr wrap="square">
+            <a:spAutoFit/>
+          </a:bodyPr>
+          <a:lstStyle/>
+          <a:p>
+            <a:pPr algn="ctr"/>
+            <a:r>
+              <a:rPr sz="800" b="1">
+                <a:solidFill>
+                  <a:srgbClr val="0D1117"/>
+                </a:solidFill>
+              </a:rPr>
+              <a:t>2</a:t>
+            </a:r>
+          </a:p>
+        </p:txBody>
+      </p:sp>
+      <p:sp>
+        <p:nvSpPr>
+          <p:cNvPr id="36" name="TextBox 35"/>
+          <p:cNvSpPr txBox="1"/>
+          <p:nvPr/>
+        </p:nvSpPr>
+        <p:spPr>
+          <a:xfrm>
+            <a:off x="5413248" y="1266443"/>
+            <a:ext cx="320040" cy="201168"/>
+          </a:xfrm>
+          <a:prstGeom prst="rect">
+            <a:avLst/>
+          </a:prstGeom>
+          <a:noFill/>
+        </p:spPr>
+        <p:txBody>
+          <a:bodyPr wrap="square">
+            <a:spAutoFit/>
+          </a:bodyPr>
+          <a:lstStyle/>
+          <a:p>
+            <a:pPr algn="l"/>
+            <a:r>
+              <a:rPr sz="800" b="1">
                 <a:solidFill>
                   <a:srgbClr val="58A6FF"/>
                 </a:solidFill>
               </a:rPr>
-              <a:t>query_repo (×3)</a:t>
+              <a:t>×3</a:t>
             </a:r>
           </a:p>
         </p:txBody>
       </p:sp>
       <p:cxnSp>
         <p:nvCxnSpPr>
-          <p:cNvPr id="29" name="Connector 28"/>
+          <p:cNvPr id="37" name="Connector 36"/>
           <p:cNvCxnSpPr/>
           <p:nvPr/>
         </p:nvCxnSpPr>
         <p:spPr>
           <a:xfrm flipV="1">
-            <a:off x="2880360" y="1655064"/>
-            <a:ext cx="640080" cy="649224"/>
-          </a:xfrm>
-          <a:prstGeom prst="line">
+            <a:off x="2834640" y="1687068"/>
+            <a:ext cx="365760" cy="690372"/>
+          </a:xfrm>
+          <a:prstGeom prst="bentConnector3">
             <a:avLst/>
           </a:prstGeom>
           <a:ln w="15876">
@@ -16150,305 +16473,21 @@
       </p:cxnSp>
       <p:cxnSp>
         <p:nvCxnSpPr>
-          <p:cNvPr id="30" name="Connector 29"/>
+          <p:cNvPr id="38" name="Connector 37"/>
           <p:cNvCxnSpPr/>
           <p:nvPr/>
         </p:nvCxnSpPr>
         <p:spPr>
           <a:xfrm>
-            <a:off x="2880360" y="2377440"/>
-            <a:ext cx="640080" cy="192024"/>
-          </a:xfrm>
-          <a:prstGeom prst="line">
+            <a:off x="2834640" y="2377440"/>
+            <a:ext cx="365760" cy="251460"/>
+          </a:xfrm>
+          <a:prstGeom prst="bentConnector3">
             <a:avLst/>
           </a:prstGeom>
           <a:ln w="15876">
             <a:solidFill>
               <a:srgbClr val="3FB950"/>
-            </a:solidFill>
-            <a:tailEnd type="arrow" w="med" len="med"/>
-          </a:ln>
-        </p:spPr>
-        <p:style>
-          <a:lnRef idx="2">
-            <a:schemeClr val="accent1"/>
-          </a:lnRef>
-          <a:fillRef idx="0">
-            <a:schemeClr val="accent1"/>
-          </a:fillRef>
-          <a:effectRef idx="1">
-            <a:schemeClr val="accent1"/>
-          </a:effectRef>
-          <a:fontRef idx="minor">
-            <a:schemeClr val="tx1"/>
-          </a:fontRef>
-        </p:style>
-      </p:cxnSp>
-      <p:cxnSp>
-        <p:nvCxnSpPr>
-          <p:cNvPr id="31" name="Connector 30"/>
-          <p:cNvCxnSpPr/>
-          <p:nvPr/>
-        </p:nvCxnSpPr>
-        <p:spPr>
-          <a:xfrm>
-            <a:off x="2880360" y="2450592"/>
-            <a:ext cx="640080" cy="1033272"/>
-          </a:xfrm>
-          <a:prstGeom prst="line">
-            <a:avLst/>
-          </a:prstGeom>
-          <a:ln w="15876">
-            <a:solidFill>
-              <a:srgbClr val="3FB950"/>
-            </a:solidFill>
-            <a:tailEnd type="arrow" w="med" len="med"/>
-          </a:ln>
-        </p:spPr>
-        <p:style>
-          <a:lnRef idx="2">
-            <a:schemeClr val="accent1"/>
-          </a:lnRef>
-          <a:fillRef idx="0">
-            <a:schemeClr val="accent1"/>
-          </a:fillRef>
-          <a:effectRef idx="1">
-            <a:schemeClr val="accent1"/>
-          </a:effectRef>
-          <a:fontRef idx="minor">
-            <a:schemeClr val="tx1"/>
-          </a:fontRef>
-        </p:style>
-      </p:cxnSp>
-      <p:cxnSp>
-        <p:nvCxnSpPr>
-          <p:cNvPr id="32" name="Connector 31"/>
-          <p:cNvCxnSpPr/>
-          <p:nvPr/>
-        </p:nvCxnSpPr>
-        <p:spPr>
-          <a:xfrm>
-            <a:off x="6080760" y="1655064"/>
-            <a:ext cx="594360" cy="521208"/>
-          </a:xfrm>
-          <a:prstGeom prst="line">
-            <a:avLst/>
-          </a:prstGeom>
-          <a:ln w="15876">
-            <a:solidFill>
-              <a:srgbClr val="58A6FF"/>
-            </a:solidFill>
-            <a:tailEnd type="arrow" w="med" len="med"/>
-          </a:ln>
-        </p:spPr>
-        <p:style>
-          <a:lnRef idx="2">
-            <a:schemeClr val="accent1"/>
-          </a:lnRef>
-          <a:fillRef idx="0">
-            <a:schemeClr val="accent1"/>
-          </a:fillRef>
-          <a:effectRef idx="1">
-            <a:schemeClr val="accent1"/>
-          </a:effectRef>
-          <a:fontRef idx="minor">
-            <a:schemeClr val="tx1"/>
-          </a:fontRef>
-        </p:style>
-      </p:cxnSp>
-      <p:cxnSp>
-        <p:nvCxnSpPr>
-          <p:cNvPr id="33" name="Connector 32"/>
-          <p:cNvCxnSpPr/>
-          <p:nvPr/>
-        </p:nvCxnSpPr>
-        <p:spPr>
-          <a:xfrm flipV="1">
-            <a:off x="6080760" y="2395728"/>
-            <a:ext cx="594360" cy="173736"/>
-          </a:xfrm>
-          <a:prstGeom prst="line">
-            <a:avLst/>
-          </a:prstGeom>
-          <a:ln w="15876">
-            <a:solidFill>
-              <a:srgbClr val="58A6FF"/>
-            </a:solidFill>
-            <a:tailEnd type="arrow" w="med" len="med"/>
-          </a:ln>
-        </p:spPr>
-        <p:style>
-          <a:lnRef idx="2">
-            <a:schemeClr val="accent1"/>
-          </a:lnRef>
-          <a:fillRef idx="0">
-            <a:schemeClr val="accent1"/>
-          </a:fillRef>
-          <a:effectRef idx="1">
-            <a:schemeClr val="accent1"/>
-          </a:effectRef>
-          <a:fontRef idx="minor">
-            <a:schemeClr val="tx1"/>
-          </a:fontRef>
-        </p:style>
-      </p:cxnSp>
-      <p:cxnSp>
-        <p:nvCxnSpPr>
-          <p:cNvPr id="34" name="Connector 33"/>
-          <p:cNvCxnSpPr/>
-          <p:nvPr/>
-        </p:nvCxnSpPr>
-        <p:spPr>
-          <a:xfrm flipV="1">
-            <a:off x="6080760" y="2624328"/>
-            <a:ext cx="594360" cy="859536"/>
-          </a:xfrm>
-          <a:prstGeom prst="line">
-            <a:avLst/>
-          </a:prstGeom>
-          <a:ln w="15876">
-            <a:solidFill>
-              <a:srgbClr val="58A6FF"/>
-            </a:solidFill>
-            <a:tailEnd type="arrow" w="med" len="med"/>
-          </a:ln>
-        </p:spPr>
-        <p:style>
-          <a:lnRef idx="2">
-            <a:schemeClr val="accent1"/>
-          </a:lnRef>
-          <a:fillRef idx="0">
-            <a:schemeClr val="accent1"/>
-          </a:fillRef>
-          <a:effectRef idx="1">
-            <a:schemeClr val="accent1"/>
-          </a:effectRef>
-          <a:fontRef idx="minor">
-            <a:schemeClr val="tx1"/>
-          </a:fontRef>
-        </p:style>
-      </p:cxnSp>
-      <p:sp>
-        <p:nvSpPr>
-          <p:cNvPr id="35" name="TextBox 34"/>
-          <p:cNvSpPr txBox="1"/>
-          <p:nvPr/>
-        </p:nvSpPr>
-        <p:spPr>
-          <a:xfrm>
-            <a:off x="5554979" y="2327148"/>
-            <a:ext cx="1645920" cy="292608"/>
-          </a:xfrm>
-          <a:prstGeom prst="rect">
-            <a:avLst/>
-          </a:prstGeom>
-          <a:noFill/>
-        </p:spPr>
-        <p:txBody>
-          <a:bodyPr wrap="square">
-            <a:spAutoFit/>
-          </a:bodyPr>
-          <a:lstStyle/>
-          <a:p>
-            <a:pPr algn="ctr"/>
-            <a:r>
-              <a:rPr sz="800" b="0">
-                <a:solidFill>
-                  <a:srgbClr val="58A6FF"/>
-                </a:solidFill>
-              </a:rPr>
-              <a:t>query()</a:t>
-            </a:r>
-          </a:p>
-        </p:txBody>
-      </p:sp>
-      <p:cxnSp>
-        <p:nvCxnSpPr>
-          <p:cNvPr id="36" name="Connector 35"/>
-          <p:cNvCxnSpPr/>
-          <p:nvPr/>
-        </p:nvCxnSpPr>
-        <p:spPr>
-          <a:xfrm>
-            <a:off x="7863840" y="2880360"/>
-            <a:ext cx="0" cy="777240"/>
-          </a:xfrm>
-          <a:prstGeom prst="line">
-            <a:avLst/>
-          </a:prstGeom>
-          <a:ln w="15876">
-            <a:solidFill>
-              <a:srgbClr val="F0883E"/>
-            </a:solidFill>
-            <a:tailEnd type="arrow" w="med" len="med"/>
-          </a:ln>
-        </p:spPr>
-        <p:style>
-          <a:lnRef idx="2">
-            <a:schemeClr val="accent1"/>
-          </a:lnRef>
-          <a:fillRef idx="0">
-            <a:schemeClr val="accent1"/>
-          </a:fillRef>
-          <a:effectRef idx="1">
-            <a:schemeClr val="accent1"/>
-          </a:effectRef>
-          <a:fontRef idx="minor">
-            <a:schemeClr val="tx1"/>
-          </a:fontRef>
-        </p:style>
-      </p:cxnSp>
-      <p:sp>
-        <p:nvSpPr>
-          <p:cNvPr id="37" name="TextBox 36"/>
-          <p:cNvSpPr txBox="1"/>
-          <p:nvPr/>
-        </p:nvSpPr>
-        <p:spPr>
-          <a:xfrm>
-            <a:off x="7040879" y="3113532"/>
-            <a:ext cx="1645920" cy="292608"/>
-          </a:xfrm>
-          <a:prstGeom prst="rect">
-            <a:avLst/>
-          </a:prstGeom>
-          <a:noFill/>
-        </p:spPr>
-        <p:txBody>
-          <a:bodyPr wrap="square">
-            <a:spAutoFit/>
-          </a:bodyPr>
-          <a:lstStyle/>
-          <a:p>
-            <a:pPr algn="ctr"/>
-            <a:r>
-              <a:rPr sz="800" b="0">
-                <a:solidFill>
-                  <a:srgbClr val="F0883E"/>
-                </a:solidFill>
-              </a:rPr>
-              <a:t>vector search</a:t>
-            </a:r>
-          </a:p>
-        </p:txBody>
-      </p:sp>
-      <p:cxnSp>
-        <p:nvCxnSpPr>
-          <p:cNvPr id="38" name="Connector 37"/>
-          <p:cNvCxnSpPr/>
-          <p:nvPr/>
-        </p:nvCxnSpPr>
-        <p:spPr>
-          <a:xfrm flipH="1">
-            <a:off x="7150608" y="4297680"/>
-            <a:ext cx="118872" cy="594360"/>
-          </a:xfrm>
-          <a:prstGeom prst="line">
-            <a:avLst/>
-          </a:prstGeom>
-          <a:ln w="15876">
-            <a:solidFill>
-              <a:srgbClr val="8B949E"/>
             </a:solidFill>
             <a:tailEnd type="arrow" w="med" len="med"/>
           </a:ln>
@@ -16476,10 +16515,542 @@
         </p:nvCxnSpPr>
         <p:spPr>
           <a:xfrm>
-            <a:off x="8458200" y="4297680"/>
-            <a:ext cx="749808" cy="594360"/>
-          </a:xfrm>
-          <a:prstGeom prst="line">
+            <a:off x="2834640" y="2377440"/>
+            <a:ext cx="365760" cy="1193292"/>
+          </a:xfrm>
+          <a:prstGeom prst="bentConnector3">
+            <a:avLst/>
+          </a:prstGeom>
+          <a:ln w="15876">
+            <a:solidFill>
+              <a:srgbClr val="3FB950"/>
+            </a:solidFill>
+            <a:tailEnd type="arrow" w="med" len="med"/>
+          </a:ln>
+        </p:spPr>
+        <p:style>
+          <a:lnRef idx="2">
+            <a:schemeClr val="accent1"/>
+          </a:lnRef>
+          <a:fillRef idx="0">
+            <a:schemeClr val="accent1"/>
+          </a:fillRef>
+          <a:effectRef idx="1">
+            <a:schemeClr val="accent1"/>
+          </a:effectRef>
+          <a:fontRef idx="minor">
+            <a:schemeClr val="tx1"/>
+          </a:fontRef>
+        </p:style>
+      </p:cxnSp>
+      <p:sp>
+        <p:nvSpPr>
+          <p:cNvPr id="40" name="Rectangle 39"/>
+          <p:cNvSpPr/>
+          <p:nvPr/>
+        </p:nvSpPr>
+        <p:spPr>
+          <a:xfrm>
+            <a:off x="2889503" y="2375153"/>
+            <a:ext cx="256032" cy="256032"/>
+          </a:xfrm>
+          <a:prstGeom prst="rect">
+            <a:avLst/>
+          </a:prstGeom>
+          <a:solidFill>
+            <a:srgbClr val="3FB950"/>
+          </a:solidFill>
+          <a:ln w="9525">
+            <a:solidFill>
+              <a:srgbClr val="3FB950"/>
+            </a:solidFill>
+          </a:ln>
+        </p:spPr>
+        <p:style>
+          <a:lnRef idx="1">
+            <a:schemeClr val="accent1"/>
+          </a:lnRef>
+          <a:fillRef idx="3">
+            <a:schemeClr val="accent1"/>
+          </a:fillRef>
+          <a:effectRef idx="2">
+            <a:schemeClr val="accent1"/>
+          </a:effectRef>
+          <a:fontRef idx="minor">
+            <a:schemeClr val="lt1"/>
+          </a:fontRef>
+        </p:style>
+        <p:txBody>
+          <a:bodyPr rtlCol="0" anchor="ctr"/>
+          <a:lstStyle/>
+          <a:p>
+            <a:pPr algn="ctr"/>
+          </a:p>
+        </p:txBody>
+      </p:sp>
+      <p:sp>
+        <p:nvSpPr>
+          <p:cNvPr id="41" name="TextBox 40"/>
+          <p:cNvSpPr txBox="1"/>
+          <p:nvPr/>
+        </p:nvSpPr>
+        <p:spPr>
+          <a:xfrm>
+            <a:off x="2889503" y="2356865"/>
+            <a:ext cx="256032" cy="256032"/>
+          </a:xfrm>
+          <a:prstGeom prst="rect">
+            <a:avLst/>
+          </a:prstGeom>
+          <a:noFill/>
+        </p:spPr>
+        <p:txBody>
+          <a:bodyPr wrap="square">
+            <a:spAutoFit/>
+          </a:bodyPr>
+          <a:lstStyle/>
+          <a:p>
+            <a:pPr algn="ctr"/>
+            <a:r>
+              <a:rPr sz="800" b="1">
+                <a:solidFill>
+                  <a:srgbClr val="0D1117"/>
+                </a:solidFill>
+              </a:rPr>
+              <a:t>3</a:t>
+            </a:r>
+          </a:p>
+        </p:txBody>
+      </p:sp>
+      <p:cxnSp>
+        <p:nvCxnSpPr>
+          <p:cNvPr id="42" name="Connector 41"/>
+          <p:cNvCxnSpPr/>
+          <p:nvPr/>
+        </p:nvCxnSpPr>
+        <p:spPr>
+          <a:xfrm>
+            <a:off x="5760720" y="1687068"/>
+            <a:ext cx="731520" cy="644652"/>
+          </a:xfrm>
+          <a:prstGeom prst="bentConnector3">
+            <a:avLst/>
+          </a:prstGeom>
+          <a:ln w="15876">
+            <a:solidFill>
+              <a:srgbClr val="58A6FF"/>
+            </a:solidFill>
+            <a:tailEnd type="arrow" w="med" len="med"/>
+          </a:ln>
+        </p:spPr>
+        <p:style>
+          <a:lnRef idx="2">
+            <a:schemeClr val="accent1"/>
+          </a:lnRef>
+          <a:fillRef idx="0">
+            <a:schemeClr val="accent1"/>
+          </a:fillRef>
+          <a:effectRef idx="1">
+            <a:schemeClr val="accent1"/>
+          </a:effectRef>
+          <a:fontRef idx="minor">
+            <a:schemeClr val="tx1"/>
+          </a:fontRef>
+        </p:style>
+      </p:cxnSp>
+      <p:cxnSp>
+        <p:nvCxnSpPr>
+          <p:cNvPr id="43" name="Connector 42"/>
+          <p:cNvCxnSpPr/>
+          <p:nvPr/>
+        </p:nvCxnSpPr>
+        <p:spPr>
+          <a:xfrm flipV="1">
+            <a:off x="5760720" y="2331720"/>
+            <a:ext cx="731520" cy="297180"/>
+          </a:xfrm>
+          <a:prstGeom prst="bentConnector3">
+            <a:avLst/>
+          </a:prstGeom>
+          <a:ln w="15876">
+            <a:solidFill>
+              <a:srgbClr val="58A6FF"/>
+            </a:solidFill>
+            <a:tailEnd type="arrow" w="med" len="med"/>
+          </a:ln>
+        </p:spPr>
+        <p:style>
+          <a:lnRef idx="2">
+            <a:schemeClr val="accent1"/>
+          </a:lnRef>
+          <a:fillRef idx="0">
+            <a:schemeClr val="accent1"/>
+          </a:fillRef>
+          <a:effectRef idx="1">
+            <a:schemeClr val="accent1"/>
+          </a:effectRef>
+          <a:fontRef idx="minor">
+            <a:schemeClr val="tx1"/>
+          </a:fontRef>
+        </p:style>
+      </p:cxnSp>
+      <p:cxnSp>
+        <p:nvCxnSpPr>
+          <p:cNvPr id="44" name="Connector 43"/>
+          <p:cNvCxnSpPr/>
+          <p:nvPr/>
+        </p:nvCxnSpPr>
+        <p:spPr>
+          <a:xfrm flipV="1">
+            <a:off x="5760720" y="2331720"/>
+            <a:ext cx="731520" cy="1239012"/>
+          </a:xfrm>
+          <a:prstGeom prst="bentConnector3">
+            <a:avLst/>
+          </a:prstGeom>
+          <a:ln w="15876">
+            <a:solidFill>
+              <a:srgbClr val="58A6FF"/>
+            </a:solidFill>
+            <a:tailEnd type="arrow" w="med" len="med"/>
+          </a:ln>
+        </p:spPr>
+        <p:style>
+          <a:lnRef idx="2">
+            <a:schemeClr val="accent1"/>
+          </a:lnRef>
+          <a:fillRef idx="0">
+            <a:schemeClr val="accent1"/>
+          </a:fillRef>
+          <a:effectRef idx="1">
+            <a:schemeClr val="accent1"/>
+          </a:effectRef>
+          <a:fontRef idx="minor">
+            <a:schemeClr val="tx1"/>
+          </a:fontRef>
+        </p:style>
+      </p:cxnSp>
+      <p:sp>
+        <p:nvSpPr>
+          <p:cNvPr id="45" name="Rectangle 44"/>
+          <p:cNvSpPr/>
+          <p:nvPr/>
+        </p:nvSpPr>
+        <p:spPr>
+          <a:xfrm>
+            <a:off x="5998464" y="2352294"/>
+            <a:ext cx="256032" cy="256032"/>
+          </a:xfrm>
+          <a:prstGeom prst="rect">
+            <a:avLst/>
+          </a:prstGeom>
+          <a:solidFill>
+            <a:srgbClr val="58A6FF"/>
+          </a:solidFill>
+          <a:ln w="9525">
+            <a:solidFill>
+              <a:srgbClr val="58A6FF"/>
+            </a:solidFill>
+          </a:ln>
+        </p:spPr>
+        <p:style>
+          <a:lnRef idx="1">
+            <a:schemeClr val="accent1"/>
+          </a:lnRef>
+          <a:fillRef idx="3">
+            <a:schemeClr val="accent1"/>
+          </a:fillRef>
+          <a:effectRef idx="2">
+            <a:schemeClr val="accent1"/>
+          </a:effectRef>
+          <a:fontRef idx="minor">
+            <a:schemeClr val="lt1"/>
+          </a:fontRef>
+        </p:style>
+        <p:txBody>
+          <a:bodyPr rtlCol="0" anchor="ctr"/>
+          <a:lstStyle/>
+          <a:p>
+            <a:pPr algn="ctr"/>
+          </a:p>
+        </p:txBody>
+      </p:sp>
+      <p:sp>
+        <p:nvSpPr>
+          <p:cNvPr id="46" name="TextBox 45"/>
+          <p:cNvSpPr txBox="1"/>
+          <p:nvPr/>
+        </p:nvSpPr>
+        <p:spPr>
+          <a:xfrm>
+            <a:off x="5998464" y="2334006"/>
+            <a:ext cx="256032" cy="256032"/>
+          </a:xfrm>
+          <a:prstGeom prst="rect">
+            <a:avLst/>
+          </a:prstGeom>
+          <a:noFill/>
+        </p:spPr>
+        <p:txBody>
+          <a:bodyPr wrap="square">
+            <a:spAutoFit/>
+          </a:bodyPr>
+          <a:lstStyle/>
+          <a:p>
+            <a:pPr algn="ctr"/>
+            <a:r>
+              <a:rPr sz="800" b="1">
+                <a:solidFill>
+                  <a:srgbClr val="0D1117"/>
+                </a:solidFill>
+              </a:rPr>
+              <a:t>4</a:t>
+            </a:r>
+          </a:p>
+        </p:txBody>
+      </p:sp>
+      <p:cxnSp>
+        <p:nvCxnSpPr>
+          <p:cNvPr id="47" name="Connector 46"/>
+          <p:cNvCxnSpPr/>
+          <p:nvPr/>
+        </p:nvCxnSpPr>
+        <p:spPr>
+          <a:xfrm>
+            <a:off x="8961120" y="2331720"/>
+            <a:ext cx="457200" cy="45720"/>
+          </a:xfrm>
+          <a:prstGeom prst="bentConnector3">
+            <a:avLst/>
+          </a:prstGeom>
+          <a:ln w="15876">
+            <a:solidFill>
+              <a:srgbClr val="F0F6FC"/>
+            </a:solidFill>
+            <a:tailEnd type="arrow" w="med" len="med"/>
+          </a:ln>
+        </p:spPr>
+        <p:style>
+          <a:lnRef idx="2">
+            <a:schemeClr val="accent1"/>
+          </a:lnRef>
+          <a:fillRef idx="0">
+            <a:schemeClr val="accent1"/>
+          </a:fillRef>
+          <a:effectRef idx="1">
+            <a:schemeClr val="accent1"/>
+          </a:effectRef>
+          <a:fontRef idx="minor">
+            <a:schemeClr val="tx1"/>
+          </a:fontRef>
+        </p:style>
+      </p:cxnSp>
+      <p:sp>
+        <p:nvSpPr>
+          <p:cNvPr id="48" name="Rectangle 47"/>
+          <p:cNvSpPr/>
+          <p:nvPr/>
+        </p:nvSpPr>
+        <p:spPr>
+          <a:xfrm>
+            <a:off x="9061704" y="2226564"/>
+            <a:ext cx="256032" cy="256032"/>
+          </a:xfrm>
+          <a:prstGeom prst="rect">
+            <a:avLst/>
+          </a:prstGeom>
+          <a:solidFill>
+            <a:srgbClr val="F0F6FC"/>
+          </a:solidFill>
+          <a:ln w="9525">
+            <a:solidFill>
+              <a:srgbClr val="F0F6FC"/>
+            </a:solidFill>
+          </a:ln>
+        </p:spPr>
+        <p:style>
+          <a:lnRef idx="1">
+            <a:schemeClr val="accent1"/>
+          </a:lnRef>
+          <a:fillRef idx="3">
+            <a:schemeClr val="accent1"/>
+          </a:fillRef>
+          <a:effectRef idx="2">
+            <a:schemeClr val="accent1"/>
+          </a:effectRef>
+          <a:fontRef idx="minor">
+            <a:schemeClr val="lt1"/>
+          </a:fontRef>
+        </p:style>
+        <p:txBody>
+          <a:bodyPr rtlCol="0" anchor="ctr"/>
+          <a:lstStyle/>
+          <a:p>
+            <a:pPr algn="ctr"/>
+          </a:p>
+        </p:txBody>
+      </p:sp>
+      <p:sp>
+        <p:nvSpPr>
+          <p:cNvPr id="49" name="TextBox 48"/>
+          <p:cNvSpPr txBox="1"/>
+          <p:nvPr/>
+        </p:nvSpPr>
+        <p:spPr>
+          <a:xfrm>
+            <a:off x="9061704" y="2208276"/>
+            <a:ext cx="256032" cy="256032"/>
+          </a:xfrm>
+          <a:prstGeom prst="rect">
+            <a:avLst/>
+          </a:prstGeom>
+          <a:noFill/>
+        </p:spPr>
+        <p:txBody>
+          <a:bodyPr wrap="square">
+            <a:spAutoFit/>
+          </a:bodyPr>
+          <a:lstStyle/>
+          <a:p>
+            <a:pPr algn="ctr"/>
+            <a:r>
+              <a:rPr sz="800" b="1">
+                <a:solidFill>
+                  <a:srgbClr val="0D1117"/>
+                </a:solidFill>
+              </a:rPr>
+              <a:t>5</a:t>
+            </a:r>
+          </a:p>
+        </p:txBody>
+      </p:sp>
+      <p:cxnSp>
+        <p:nvCxnSpPr>
+          <p:cNvPr id="50" name="Connector 49"/>
+          <p:cNvCxnSpPr/>
+          <p:nvPr/>
+        </p:nvCxnSpPr>
+        <p:spPr>
+          <a:xfrm>
+            <a:off x="7726679" y="2834640"/>
+            <a:ext cx="0" cy="868680"/>
+          </a:xfrm>
+          <a:prstGeom prst="bentConnector3">
+            <a:avLst/>
+          </a:prstGeom>
+          <a:ln w="15876">
+            <a:solidFill>
+              <a:srgbClr val="F0883E"/>
+            </a:solidFill>
+            <a:tailEnd type="arrow" w="med" len="med"/>
+          </a:ln>
+        </p:spPr>
+        <p:style>
+          <a:lnRef idx="2">
+            <a:schemeClr val="accent1"/>
+          </a:lnRef>
+          <a:fillRef idx="0">
+            <a:schemeClr val="accent1"/>
+          </a:fillRef>
+          <a:effectRef idx="1">
+            <a:schemeClr val="accent1"/>
+          </a:effectRef>
+          <a:fontRef idx="minor">
+            <a:schemeClr val="tx1"/>
+          </a:fontRef>
+        </p:style>
+      </p:cxnSp>
+      <p:sp>
+        <p:nvSpPr>
+          <p:cNvPr id="51" name="Rectangle 50"/>
+          <p:cNvSpPr/>
+          <p:nvPr/>
+        </p:nvSpPr>
+        <p:spPr>
+          <a:xfrm>
+            <a:off x="7598663" y="3140964"/>
+            <a:ext cx="256032" cy="256032"/>
+          </a:xfrm>
+          <a:prstGeom prst="rect">
+            <a:avLst/>
+          </a:prstGeom>
+          <a:solidFill>
+            <a:srgbClr val="F0883E"/>
+          </a:solidFill>
+          <a:ln w="9525">
+            <a:solidFill>
+              <a:srgbClr val="F0883E"/>
+            </a:solidFill>
+          </a:ln>
+        </p:spPr>
+        <p:style>
+          <a:lnRef idx="1">
+            <a:schemeClr val="accent1"/>
+          </a:lnRef>
+          <a:fillRef idx="3">
+            <a:schemeClr val="accent1"/>
+          </a:fillRef>
+          <a:effectRef idx="2">
+            <a:schemeClr val="accent1"/>
+          </a:effectRef>
+          <a:fontRef idx="minor">
+            <a:schemeClr val="lt1"/>
+          </a:fontRef>
+        </p:style>
+        <p:txBody>
+          <a:bodyPr rtlCol="0" anchor="ctr"/>
+          <a:lstStyle/>
+          <a:p>
+            <a:pPr algn="ctr"/>
+          </a:p>
+        </p:txBody>
+      </p:sp>
+      <p:sp>
+        <p:nvSpPr>
+          <p:cNvPr id="52" name="TextBox 51"/>
+          <p:cNvSpPr txBox="1"/>
+          <p:nvPr/>
+        </p:nvSpPr>
+        <p:spPr>
+          <a:xfrm>
+            <a:off x="7598663" y="3122676"/>
+            <a:ext cx="256032" cy="256032"/>
+          </a:xfrm>
+          <a:prstGeom prst="rect">
+            <a:avLst/>
+          </a:prstGeom>
+          <a:noFill/>
+        </p:spPr>
+        <p:txBody>
+          <a:bodyPr wrap="square">
+            <a:spAutoFit/>
+          </a:bodyPr>
+          <a:lstStyle/>
+          <a:p>
+            <a:pPr algn="ctr"/>
+            <a:r>
+              <a:rPr sz="800" b="1">
+                <a:solidFill>
+                  <a:srgbClr val="0D1117"/>
+                </a:solidFill>
+              </a:rPr>
+              <a:t>6</a:t>
+            </a:r>
+          </a:p>
+        </p:txBody>
+      </p:sp>
+      <p:cxnSp>
+        <p:nvCxnSpPr>
+          <p:cNvPr id="53" name="Connector 52"/>
+          <p:cNvCxnSpPr/>
+          <p:nvPr/>
+        </p:nvCxnSpPr>
+        <p:spPr>
+          <a:xfrm flipV="1">
+            <a:off x="6949440" y="4361688"/>
+            <a:ext cx="365759" cy="347472"/>
+          </a:xfrm>
+          <a:prstGeom prst="bentConnector3">
             <a:avLst/>
           </a:prstGeom>
           <a:ln w="15876">
@@ -16504,84 +17075,131 @@
           </a:fontRef>
         </p:style>
       </p:cxnSp>
-      <p:sp>
-        <p:nvSpPr>
-          <p:cNvPr id="40" name="TextBox 39"/>
-          <p:cNvSpPr txBox="1"/>
-          <p:nvPr/>
-        </p:nvSpPr>
-        <p:spPr>
-          <a:xfrm>
-            <a:off x="7200899" y="4439412"/>
-            <a:ext cx="1645920" cy="292608"/>
-          </a:xfrm>
-          <a:prstGeom prst="rect">
-            <a:avLst/>
-          </a:prstGeom>
-          <a:noFill/>
-        </p:spPr>
-        <p:txBody>
-          <a:bodyPr wrap="square">
-            <a:spAutoFit/>
-          </a:bodyPr>
-          <a:lstStyle/>
-          <a:p>
-            <a:pPr algn="ctr"/>
-            <a:r>
-              <a:rPr sz="800" b="0">
-                <a:solidFill>
-                  <a:srgbClr val="8B949E"/>
-                </a:solidFill>
-              </a:rPr>
-              <a:t>indexed</a:t>
-            </a:r>
-          </a:p>
-        </p:txBody>
-      </p:sp>
-      <p:sp>
-        <p:nvSpPr>
-          <p:cNvPr id="41" name="TextBox 40"/>
-          <p:cNvSpPr txBox="1"/>
-          <p:nvPr/>
-        </p:nvSpPr>
-        <p:spPr>
-          <a:xfrm>
-            <a:off x="365760" y="6492240"/>
-            <a:ext cx="11430000" cy="256032"/>
-          </a:xfrm>
-          <a:prstGeom prst="rect">
-            <a:avLst/>
-          </a:prstGeom>
-          <a:noFill/>
-        </p:spPr>
-        <p:txBody>
-          <a:bodyPr wrap="square">
-            <a:spAutoFit/>
-          </a:bodyPr>
-          <a:lstStyle/>
-          <a:p>
-            <a:pPr algn="ctr"/>
-            <a:r>
-              <a:rPr sz="900" b="0">
-                <a:solidFill>
-                  <a:srgbClr val="8B949E"/>
-                </a:solidFill>
-              </a:rPr>
-              <a:t>All MCP communication via stdio  —  JSON-RPC 2.0  —  no network ports, no cloud</a:t>
-            </a:r>
-          </a:p>
-        </p:txBody>
-      </p:sp>
-      <p:sp>
-        <p:nvSpPr>
-          <p:cNvPr id="42" name="Rectangle 41"/>
+      <p:cxnSp>
+        <p:nvCxnSpPr>
+          <p:cNvPr id="54" name="Connector 53"/>
+          <p:cNvCxnSpPr/>
+          <p:nvPr/>
+        </p:nvCxnSpPr>
+        <p:spPr>
+          <a:xfrm flipH="1" flipV="1">
+            <a:off x="8138159" y="4361688"/>
+            <a:ext cx="822960" cy="347472"/>
+          </a:xfrm>
+          <a:prstGeom prst="bentConnector3">
+            <a:avLst/>
+          </a:prstGeom>
+          <a:ln w="15876">
+            <a:solidFill>
+              <a:srgbClr val="8B949E"/>
+            </a:solidFill>
+            <a:tailEnd type="arrow" w="med" len="med"/>
+          </a:ln>
+        </p:spPr>
+        <p:style>
+          <a:lnRef idx="2">
+            <a:schemeClr val="accent1"/>
+          </a:lnRef>
+          <a:fillRef idx="0">
+            <a:schemeClr val="accent1"/>
+          </a:fillRef>
+          <a:effectRef idx="1">
+            <a:schemeClr val="accent1"/>
+          </a:effectRef>
+          <a:fontRef idx="minor">
+            <a:schemeClr val="tx1"/>
+          </a:fontRef>
+        </p:style>
+      </p:cxnSp>
+      <p:sp>
+        <p:nvSpPr>
+          <p:cNvPr id="55" name="Rectangle 54"/>
           <p:cNvSpPr/>
           <p:nvPr/>
         </p:nvSpPr>
         <p:spPr>
           <a:xfrm>
-            <a:off x="365760" y="6144768"/>
-            <a:ext cx="164592" cy="164592"/>
+            <a:off x="7004304" y="4407408"/>
+            <a:ext cx="256032" cy="256032"/>
+          </a:xfrm>
+          <a:prstGeom prst="rect">
+            <a:avLst/>
+          </a:prstGeom>
+          <a:solidFill>
+            <a:srgbClr val="8B949E"/>
+          </a:solidFill>
+          <a:ln w="9525">
+            <a:solidFill>
+              <a:srgbClr val="8B949E"/>
+            </a:solidFill>
+          </a:ln>
+        </p:spPr>
+        <p:style>
+          <a:lnRef idx="1">
+            <a:schemeClr val="accent1"/>
+          </a:lnRef>
+          <a:fillRef idx="3">
+            <a:schemeClr val="accent1"/>
+          </a:fillRef>
+          <a:effectRef idx="2">
+            <a:schemeClr val="accent1"/>
+          </a:effectRef>
+          <a:fontRef idx="minor">
+            <a:schemeClr val="lt1"/>
+          </a:fontRef>
+        </p:style>
+        <p:txBody>
+          <a:bodyPr rtlCol="0" anchor="ctr"/>
+          <a:lstStyle/>
+          <a:p>
+            <a:pPr algn="ctr"/>
+          </a:p>
+        </p:txBody>
+      </p:sp>
+      <p:sp>
+        <p:nvSpPr>
+          <p:cNvPr id="56" name="TextBox 55"/>
+          <p:cNvSpPr txBox="1"/>
+          <p:nvPr/>
+        </p:nvSpPr>
+        <p:spPr>
+          <a:xfrm>
+            <a:off x="7004304" y="4389120"/>
+            <a:ext cx="256032" cy="256032"/>
+          </a:xfrm>
+          <a:prstGeom prst="rect">
+            <a:avLst/>
+          </a:prstGeom>
+          <a:noFill/>
+        </p:spPr>
+        <p:txBody>
+          <a:bodyPr wrap="square">
+            <a:spAutoFit/>
+          </a:bodyPr>
+          <a:lstStyle/>
+          <a:p>
+            <a:pPr algn="ctr"/>
+            <a:r>
+              <a:rPr sz="800" b="1">
+                <a:solidFill>
+                  <a:srgbClr val="0D1117"/>
+                </a:solidFill>
+              </a:rPr>
+              <a:t>7</a:t>
+            </a:r>
+          </a:p>
+        </p:txBody>
+      </p:sp>
+      <p:sp>
+        <p:nvSpPr>
+          <p:cNvPr id="57" name="Rectangle 56"/>
+          <p:cNvSpPr/>
+          <p:nvPr/>
+        </p:nvSpPr>
+        <p:spPr>
+          <a:xfrm>
+            <a:off x="228600" y="5650992"/>
+            <a:ext cx="201168" cy="141732"/>
           </a:xfrm>
           <a:prstGeom prst="rect">
             <a:avLst/>
@@ -16619,14 +17237,14 @@
       </p:sp>
       <p:sp>
         <p:nvSpPr>
-          <p:cNvPr id="43" name="TextBox 42"/>
-          <p:cNvSpPr txBox="1"/>
-          <p:nvPr/>
-        </p:nvSpPr>
-        <p:spPr>
-          <a:xfrm>
-            <a:off x="566928" y="6135624"/>
-            <a:ext cx="1920240" cy="201168"/>
+          <p:cNvPr id="58" name="TextBox 57"/>
+          <p:cNvSpPr txBox="1"/>
+          <p:nvPr/>
+        </p:nvSpPr>
+        <p:spPr>
+          <a:xfrm>
+            <a:off x="475488" y="5641848"/>
+            <a:ext cx="5486400" cy="164592"/>
           </a:xfrm>
           <a:prstGeom prst="rect">
             <a:avLst/>
@@ -16641,26 +17259,105 @@
           <a:p>
             <a:pPr algn="l"/>
             <a:r>
-              <a:rPr sz="900" b="0">
+              <a:rPr sz="750" b="0">
                 <a:solidFill>
                   <a:srgbClr val="8B949E"/>
                 </a:solidFill>
               </a:rPr>
-              <a:t>AI Interface</a:t>
-            </a:r>
-          </a:p>
-        </p:txBody>
-      </p:sp>
-      <p:sp>
-        <p:nvSpPr>
-          <p:cNvPr id="44" name="Rectangle 43"/>
+              <a:t>1  get_relevant_repos(query_text)  →  [repo1, repo2]  (MCP/stdio, JSON-RPC 2.0)</a:t>
+            </a:r>
+          </a:p>
+        </p:txBody>
+      </p:sp>
+      <p:sp>
+        <p:nvSpPr>
+          <p:cNvPr id="59" name="Rectangle 58"/>
           <p:cNvSpPr/>
           <p:nvPr/>
         </p:nvSpPr>
         <p:spPr>
           <a:xfrm>
-            <a:off x="2697480" y="6144768"/>
-            <a:ext cx="164592" cy="164592"/>
+            <a:off x="228600" y="5820156"/>
+            <a:ext cx="201168" cy="141732"/>
+          </a:xfrm>
+          <a:prstGeom prst="rect">
+            <a:avLst/>
+          </a:prstGeom>
+          <a:solidFill>
+            <a:srgbClr val="58A6FF"/>
+          </a:solidFill>
+          <a:ln w="9525">
+            <a:solidFill>
+              <a:srgbClr val="58A6FF"/>
+            </a:solidFill>
+          </a:ln>
+        </p:spPr>
+        <p:style>
+          <a:lnRef idx="1">
+            <a:schemeClr val="accent1"/>
+          </a:lnRef>
+          <a:fillRef idx="3">
+            <a:schemeClr val="accent1"/>
+          </a:fillRef>
+          <a:effectRef idx="2">
+            <a:schemeClr val="accent1"/>
+          </a:effectRef>
+          <a:fontRef idx="minor">
+            <a:schemeClr val="lt1"/>
+          </a:fontRef>
+        </p:style>
+        <p:txBody>
+          <a:bodyPr rtlCol="0" anchor="ctr"/>
+          <a:lstStyle/>
+          <a:p>
+            <a:pPr algn="ctr"/>
+          </a:p>
+        </p:txBody>
+      </p:sp>
+      <p:sp>
+        <p:nvSpPr>
+          <p:cNvPr id="60" name="TextBox 59"/>
+          <p:cNvSpPr txBox="1"/>
+          <p:nvPr/>
+        </p:nvSpPr>
+        <p:spPr>
+          <a:xfrm>
+            <a:off x="475488" y="5811012"/>
+            <a:ext cx="5486400" cy="164592"/>
+          </a:xfrm>
+          <a:prstGeom prst="rect">
+            <a:avLst/>
+          </a:prstGeom>
+          <a:noFill/>
+        </p:spPr>
+        <p:txBody>
+          <a:bodyPr wrap="square">
+            <a:spAutoFit/>
+          </a:bodyPr>
+          <a:lstStyle/>
+          <a:p>
+            <a:pPr algn="l"/>
+            <a:r>
+              <a:rPr sz="750" b="0">
+                <a:solidFill>
+                  <a:srgbClr val="8B949E"/>
+                </a:solidFill>
+              </a:rPr>
+              <a:t>2  query_repo(feature_request)  →  RELEVANT KNOWLEDGE:...  (MCP/stdio, ×3 calls)</a:t>
+            </a:r>
+          </a:p>
+        </p:txBody>
+      </p:sp>
+      <p:sp>
+        <p:nvSpPr>
+          <p:cNvPr id="61" name="Rectangle 60"/>
+          <p:cNvSpPr/>
+          <p:nvPr/>
+        </p:nvSpPr>
+        <p:spPr>
+          <a:xfrm>
+            <a:off x="228600" y="5989320"/>
+            <a:ext cx="201168" cy="141732"/>
           </a:xfrm>
           <a:prstGeom prst="rect">
             <a:avLst/>
@@ -16698,14 +17395,14 @@
       </p:sp>
       <p:sp>
         <p:nvSpPr>
-          <p:cNvPr id="45" name="TextBox 44"/>
-          <p:cNvSpPr txBox="1"/>
-          <p:nvPr/>
-        </p:nvSpPr>
-        <p:spPr>
-          <a:xfrm>
-            <a:off x="2898648" y="6135624"/>
-            <a:ext cx="1920240" cy="201168"/>
+          <p:cNvPr id="62" name="TextBox 61"/>
+          <p:cNvSpPr txBox="1"/>
+          <p:nvPr/>
+        </p:nvSpPr>
+        <p:spPr>
+          <a:xfrm>
+            <a:off x="475488" y="5980176"/>
+            <a:ext cx="5486400" cy="164592"/>
           </a:xfrm>
           <a:prstGeom prst="rect">
             <a:avLst/>
@@ -16720,26 +17417,26 @@
           <a:p>
             <a:pPr algn="l"/>
             <a:r>
-              <a:rPr sz="900" b="0">
+              <a:rPr sz="750" b="0">
                 <a:solidFill>
                   <a:srgbClr val="8B949E"/>
                 </a:solidFill>
               </a:rPr>
-              <a:t>Orchestrator / Storage</a:t>
-            </a:r>
-          </a:p>
-        </p:txBody>
-      </p:sp>
-      <p:sp>
-        <p:nvSpPr>
-          <p:cNvPr id="46" name="Rectangle 45"/>
+              <a:t>3  route  →  query_repo on all repos  →  min(len/800, 1.0) score, return top-2</a:t>
+            </a:r>
+          </a:p>
+        </p:txBody>
+      </p:sp>
+      <p:sp>
+        <p:nvSpPr>
+          <p:cNvPr id="63" name="Rectangle 62"/>
           <p:cNvSpPr/>
           <p:nvPr/>
         </p:nvSpPr>
         <p:spPr>
           <a:xfrm>
-            <a:off x="5029200" y="6144768"/>
-            <a:ext cx="164592" cy="164592"/>
+            <a:off x="228600" y="6158484"/>
+            <a:ext cx="201168" cy="141732"/>
           </a:xfrm>
           <a:prstGeom prst="rect">
             <a:avLst/>
@@ -16777,14 +17474,14 @@
       </p:sp>
       <p:sp>
         <p:nvSpPr>
-          <p:cNvPr id="47" name="TextBox 46"/>
-          <p:cNvSpPr txBox="1"/>
-          <p:nvPr/>
-        </p:nvSpPr>
-        <p:spPr>
-          <a:xfrm>
-            <a:off x="5230368" y="6135624"/>
-            <a:ext cx="1920240" cy="201168"/>
+          <p:cNvPr id="64" name="TextBox 63"/>
+          <p:cNvSpPr txBox="1"/>
+          <p:nvPr/>
+        </p:nvSpPr>
+        <p:spPr>
+          <a:xfrm>
+            <a:off x="475488" y="6149340"/>
+            <a:ext cx="5486400" cy="164592"/>
           </a:xfrm>
           <a:prstGeom prst="rect">
             <a:avLst/>
@@ -16799,26 +17496,105 @@
           <a:p>
             <a:pPr algn="l"/>
             <a:r>
-              <a:rPr sz="900" b="0">
+              <a:rPr sz="750" b="0">
                 <a:solidFill>
                   <a:srgbClr val="8B949E"/>
                 </a:solidFill>
               </a:rPr>
-              <a:t>Repo Agent  (MCP server)</a:t>
-            </a:r>
-          </a:p>
-        </p:txBody>
-      </p:sp>
-      <p:sp>
-        <p:nvSpPr>
-          <p:cNvPr id="48" name="Rectangle 47"/>
+              <a:t>4  query(feature_request)  →  chunks + L2 distances  (internal, per-agent)</a:t>
+            </a:r>
+          </a:p>
+        </p:txBody>
+      </p:sp>
+      <p:sp>
+        <p:nvSpPr>
+          <p:cNvPr id="65" name="Rectangle 64"/>
           <p:cNvSpPr/>
           <p:nvPr/>
         </p:nvSpPr>
         <p:spPr>
           <a:xfrm>
-            <a:off x="7360920" y="6144768"/>
-            <a:ext cx="164592" cy="164592"/>
+            <a:off x="6217920" y="5650992"/>
+            <a:ext cx="201168" cy="141732"/>
+          </a:xfrm>
+          <a:prstGeom prst="rect">
+            <a:avLst/>
+          </a:prstGeom>
+          <a:solidFill>
+            <a:srgbClr val="F0F6FC"/>
+          </a:solidFill>
+          <a:ln w="9525">
+            <a:solidFill>
+              <a:srgbClr val="F0F6FC"/>
+            </a:solidFill>
+          </a:ln>
+        </p:spPr>
+        <p:style>
+          <a:lnRef idx="1">
+            <a:schemeClr val="accent1"/>
+          </a:lnRef>
+          <a:fillRef idx="3">
+            <a:schemeClr val="accent1"/>
+          </a:fillRef>
+          <a:effectRef idx="2">
+            <a:schemeClr val="accent1"/>
+          </a:effectRef>
+          <a:fontRef idx="minor">
+            <a:schemeClr val="lt1"/>
+          </a:fontRef>
+        </p:style>
+        <p:txBody>
+          <a:bodyPr rtlCol="0" anchor="ctr"/>
+          <a:lstStyle/>
+          <a:p>
+            <a:pPr algn="ctr"/>
+          </a:p>
+        </p:txBody>
+      </p:sp>
+      <p:sp>
+        <p:nvSpPr>
+          <p:cNvPr id="66" name="TextBox 65"/>
+          <p:cNvSpPr txBox="1"/>
+          <p:nvPr/>
+        </p:nvSpPr>
+        <p:spPr>
+          <a:xfrm>
+            <a:off x="6464808" y="5641848"/>
+            <a:ext cx="5486400" cy="164592"/>
+          </a:xfrm>
+          <a:prstGeom prst="rect">
+            <a:avLst/>
+          </a:prstGeom>
+          <a:noFill/>
+        </p:spPr>
+        <p:txBody>
+          <a:bodyPr wrap="square">
+            <a:spAutoFit/>
+          </a:bodyPr>
+          <a:lstStyle/>
+          <a:p>
+            <a:pPr algn="l"/>
+            <a:r>
+              <a:rPr sz="750" b="0">
+                <a:solidFill>
+                  <a:srgbClr val="8B949E"/>
+                </a:solidFill>
+              </a:rPr>
+              <a:t>5  encode(text)  →  384-dim float[]  (sentence-transformers, local CPU/GPU)</a:t>
+            </a:r>
+          </a:p>
+        </p:txBody>
+      </p:sp>
+      <p:sp>
+        <p:nvSpPr>
+          <p:cNvPr id="67" name="Rectangle 66"/>
+          <p:cNvSpPr/>
+          <p:nvPr/>
+        </p:nvSpPr>
+        <p:spPr>
+          <a:xfrm>
+            <a:off x="6217920" y="5820156"/>
+            <a:ext cx="201168" cy="141732"/>
           </a:xfrm>
           <a:prstGeom prst="rect">
             <a:avLst/>
@@ -16856,14 +17632,14 @@
       </p:sp>
       <p:sp>
         <p:nvSpPr>
-          <p:cNvPr id="49" name="TextBox 48"/>
-          <p:cNvSpPr txBox="1"/>
-          <p:nvPr/>
-        </p:nvSpPr>
-        <p:spPr>
-          <a:xfrm>
-            <a:off x="7562088" y="6135624"/>
-            <a:ext cx="1920240" cy="201168"/>
+          <p:cNvPr id="68" name="TextBox 67"/>
+          <p:cNvSpPr txBox="1"/>
+          <p:nvPr/>
+        </p:nvSpPr>
+        <p:spPr>
+          <a:xfrm>
+            <a:off x="6464808" y="5811012"/>
+            <a:ext cx="5486400" cy="164592"/>
           </a:xfrm>
           <a:prstGeom prst="rect">
             <a:avLst/>
@@ -16878,26 +17654,26 @@
           <a:p>
             <a:pPr algn="l"/>
             <a:r>
-              <a:rPr sz="900" b="0">
+              <a:rPr sz="750" b="0">
                 <a:solidFill>
                   <a:srgbClr val="8B949E"/>
                 </a:solidFill>
               </a:rPr>
-              <a:t>RAG Engine</a:t>
-            </a:r>
-          </a:p>
-        </p:txBody>
-      </p:sp>
-      <p:sp>
-        <p:nvSpPr>
-          <p:cNvPr id="50" name="Rectangle 49"/>
+              <a:t>6  vector similarity search  →  top-k chunks + L2 dist  (ChromaDB)</a:t>
+            </a:r>
+          </a:p>
+        </p:txBody>
+      </p:sp>
+      <p:sp>
+        <p:nvSpPr>
+          <p:cNvPr id="69" name="Rectangle 68"/>
           <p:cNvSpPr/>
           <p:nvPr/>
         </p:nvSpPr>
         <p:spPr>
           <a:xfrm>
-            <a:off x="9692640" y="6144768"/>
-            <a:ext cx="164592" cy="164592"/>
+            <a:off x="6217920" y="5989320"/>
+            <a:ext cx="201168" cy="141732"/>
           </a:xfrm>
           <a:prstGeom prst="rect">
             <a:avLst/>
@@ -16935,14 +17711,14 @@
       </p:sp>
       <p:sp>
         <p:nvSpPr>
-          <p:cNvPr id="51" name="TextBox 50"/>
-          <p:cNvSpPr txBox="1"/>
-          <p:nvPr/>
-        </p:nvSpPr>
-        <p:spPr>
-          <a:xfrm>
-            <a:off x="9893808" y="6135624"/>
-            <a:ext cx="1920240" cy="201168"/>
+          <p:cNvPr id="70" name="TextBox 69"/>
+          <p:cNvSpPr txBox="1"/>
+          <p:nvPr/>
+        </p:nvSpPr>
+        <p:spPr>
+          <a:xfrm>
+            <a:off x="6464808" y="5980176"/>
+            <a:ext cx="5486400" cy="164592"/>
           </a:xfrm>
           <a:prstGeom prst="rect">
             <a:avLst/>
@@ -16957,12 +17733,12 @@
           <a:p>
             <a:pPr algn="l"/>
             <a:r>
-              <a:rPr sz="900" b="0">
+              <a:rPr sz="750" b="0">
                 <a:solidFill>
                   <a:srgbClr val="8B949E"/>
                 </a:solidFill>
               </a:rPr>
-              <a:t>Data Source</a:t>
+              <a:t>7  indexed at startup  →  text split → embed → stored in .chroma_db/</a:t>
             </a:r>
           </a:p>
         </p:txBody>

--- a/demo/slides.pptx
+++ b/demo/slides.pptx
@@ -15659,8 +15659,8 @@
         </p:nvSpPr>
         <p:spPr>
           <a:xfrm>
-            <a:off x="6492240" y="1828800"/>
-            <a:ext cx="2468880" cy="1005840"/>
+            <a:off x="6492240" y="1600200"/>
+            <a:ext cx="2468880" cy="777240"/>
           </a:xfrm>
           <a:prstGeom prst="rect">
             <a:avLst/>
@@ -15704,8 +15704,8 @@
         </p:nvSpPr>
         <p:spPr>
           <a:xfrm>
-            <a:off x="6537959" y="1920240"/>
-            <a:ext cx="2377440" cy="822960"/>
+            <a:off x="6537959" y="1673352"/>
+            <a:ext cx="2377440" cy="630936"/>
           </a:xfrm>
           <a:prstGeom prst="rect">
             <a:avLst/>
@@ -15740,8 +15740,8 @@
         </p:nvSpPr>
         <p:spPr>
           <a:xfrm>
-            <a:off x="9418320" y="1920240"/>
-            <a:ext cx="2560320" cy="914400"/>
+            <a:off x="6492240" y="2560320"/>
+            <a:ext cx="2468880" cy="713232"/>
           </a:xfrm>
           <a:prstGeom prst="rect">
             <a:avLst/>
@@ -15785,8 +15785,8 @@
         </p:nvSpPr>
         <p:spPr>
           <a:xfrm>
-            <a:off x="9464040" y="2011680"/>
-            <a:ext cx="2468879" cy="731520"/>
+            <a:off x="6537959" y="2633472"/>
+            <a:ext cx="2377440" cy="566928"/>
           </a:xfrm>
           <a:prstGeom prst="rect">
             <a:avLst/>
@@ -15821,7 +15821,7 @@
         </p:nvSpPr>
         <p:spPr>
           <a:xfrm>
-            <a:off x="6492240" y="3703320"/>
+            <a:off x="6492240" y="3474720"/>
             <a:ext cx="2468880" cy="658368"/>
           </a:xfrm>
           <a:prstGeom prst="rect">
@@ -15866,7 +15866,7 @@
         </p:nvSpPr>
         <p:spPr>
           <a:xfrm>
-            <a:off x="6537959" y="3776472"/>
+            <a:off x="6537959" y="3547872"/>
             <a:ext cx="2377440" cy="512063"/>
           </a:xfrm>
           <a:prstGeom prst="rect">
@@ -15901,7 +15901,7 @@
         </p:nvSpPr>
         <p:spPr>
           <a:xfrm>
-            <a:off x="6080760" y="4709160"/>
+            <a:off x="6080760" y="4617720"/>
             <a:ext cx="1737360" cy="566928"/>
           </a:xfrm>
           <a:prstGeom prst="rect">
@@ -15946,7 +15946,7 @@
         </p:nvSpPr>
         <p:spPr>
           <a:xfrm>
-            <a:off x="6108192" y="4764024"/>
+            <a:off x="6108192" y="4672583"/>
             <a:ext cx="1682495" cy="457200"/>
           </a:xfrm>
           <a:prstGeom prst="rect">
@@ -15981,7 +15981,7 @@
         </p:nvSpPr>
         <p:spPr>
           <a:xfrm>
-            <a:off x="8092440" y="4709160"/>
+            <a:off x="8092440" y="4617720"/>
             <a:ext cx="1737360" cy="566928"/>
           </a:xfrm>
           <a:prstGeom prst="rect">
@@ -16026,7 +16026,7 @@
         </p:nvSpPr>
         <p:spPr>
           <a:xfrm>
-            <a:off x="8119871" y="4764024"/>
+            <a:off x="8119871" y="4672583"/>
             <a:ext cx="1682495" cy="457200"/>
           </a:xfrm>
           <a:prstGeom prst="rect">
@@ -16061,8 +16061,8 @@
         </p:nvSpPr>
         <p:spPr>
           <a:xfrm>
-            <a:off x="9418320" y="3611880"/>
-            <a:ext cx="2560320" cy="1463040"/>
+            <a:off x="9418320" y="1600200"/>
+            <a:ext cx="2560320" cy="1874519"/>
           </a:xfrm>
           <a:prstGeom prst="rect">
             <a:avLst/>
@@ -16106,7 +16106,7 @@
         </p:nvSpPr>
         <p:spPr>
           <a:xfrm>
-            <a:off x="9491472" y="3685032"/>
+            <a:off x="9491472" y="1673352"/>
             <a:ext cx="2414015" cy="228600"/>
           </a:xfrm>
           <a:prstGeom prst="rect">
@@ -16140,8 +16140,8 @@
         </p:nvSpPr>
         <p:spPr>
           <a:xfrm>
-            <a:off x="9491472" y="3959352"/>
-            <a:ext cx="2414015" cy="1005840"/>
+            <a:off x="9491472" y="1947672"/>
+            <a:ext cx="2414015" cy="1417319"/>
           </a:xfrm>
           <a:prstGeom prst="rect">
             <a:avLst/>
@@ -16295,7 +16295,7 @@
         <p:spPr>
           <a:xfrm flipH="1">
             <a:off x="4480560" y="1325880"/>
-            <a:ext cx="1645919" cy="64008"/>
+            <a:ext cx="1554480" cy="1303020"/>
           </a:xfrm>
           <a:prstGeom prst="bentConnector3">
             <a:avLst/>
@@ -16330,7 +16330,7 @@
         </p:nvSpPr>
         <p:spPr>
           <a:xfrm>
-            <a:off x="5175504" y="1229867"/>
+            <a:off x="5129784" y="1849374"/>
             <a:ext cx="256032" cy="256032"/>
           </a:xfrm>
           <a:prstGeom prst="rect">
@@ -16375,7 +16375,7 @@
         </p:nvSpPr>
         <p:spPr>
           <a:xfrm>
-            <a:off x="5175504" y="1211580"/>
+            <a:off x="5129784" y="1831086"/>
             <a:ext cx="256032" cy="256032"/>
           </a:xfrm>
           <a:prstGeom prst="rect">
@@ -16409,7 +16409,7 @@
         </p:nvSpPr>
         <p:spPr>
           <a:xfrm>
-            <a:off x="5413248" y="1266443"/>
+            <a:off x="5385816" y="1867662"/>
             <a:ext cx="320040" cy="201168"/>
           </a:xfrm>
           <a:prstGeom prst="rect">
@@ -16631,7 +16631,7 @@
         <p:spPr>
           <a:xfrm>
             <a:off x="5760720" y="1687068"/>
-            <a:ext cx="731520" cy="644652"/>
+            <a:ext cx="731520" cy="301751"/>
           </a:xfrm>
           <a:prstGeom prst="bentConnector3">
             <a:avLst/>
@@ -16666,8 +16666,8 @@
         </p:nvCxnSpPr>
         <p:spPr>
           <a:xfrm flipV="1">
-            <a:off x="5760720" y="2331720"/>
-            <a:ext cx="731520" cy="297180"/>
+            <a:off x="5760720" y="1988819"/>
+            <a:ext cx="731520" cy="640081"/>
           </a:xfrm>
           <a:prstGeom prst="bentConnector3">
             <a:avLst/>
@@ -16702,8 +16702,8 @@
         </p:nvCxnSpPr>
         <p:spPr>
           <a:xfrm flipV="1">
-            <a:off x="5760720" y="2331720"/>
-            <a:ext cx="731520" cy="1239012"/>
+            <a:off x="5760720" y="1988819"/>
+            <a:ext cx="731520" cy="1581913"/>
           </a:xfrm>
           <a:prstGeom prst="bentConnector3">
             <a:avLst/>
@@ -16738,7 +16738,7 @@
         </p:nvSpPr>
         <p:spPr>
           <a:xfrm>
-            <a:off x="5998464" y="2352294"/>
+            <a:off x="5998464" y="2180844"/>
             <a:ext cx="256032" cy="256032"/>
           </a:xfrm>
           <a:prstGeom prst="rect">
@@ -16783,7 +16783,7 @@
         </p:nvSpPr>
         <p:spPr>
           <a:xfrm>
-            <a:off x="5998464" y="2334006"/>
+            <a:off x="5998464" y="2162556"/>
             <a:ext cx="256032" cy="256032"/>
           </a:xfrm>
           <a:prstGeom prst="rect">
@@ -16817,15 +16817,15 @@
         </p:nvCxnSpPr>
         <p:spPr>
           <a:xfrm>
-            <a:off x="8961120" y="2331720"/>
-            <a:ext cx="457200" cy="45720"/>
+            <a:off x="7726679" y="2377440"/>
+            <a:ext cx="0" cy="182880"/>
           </a:xfrm>
           <a:prstGeom prst="bentConnector3">
             <a:avLst/>
           </a:prstGeom>
           <a:ln w="15876">
             <a:solidFill>
-              <a:srgbClr val="F0F6FC"/>
+              <a:srgbClr val="F0883E"/>
             </a:solidFill>
             <a:tailEnd type="arrow" w="med" len="med"/>
           </a:ln>
@@ -16853,122 +16853,7 @@
         </p:nvSpPr>
         <p:spPr>
           <a:xfrm>
-            <a:off x="9061704" y="2226564"/>
-            <a:ext cx="256032" cy="256032"/>
-          </a:xfrm>
-          <a:prstGeom prst="rect">
-            <a:avLst/>
-          </a:prstGeom>
-          <a:solidFill>
-            <a:srgbClr val="F0F6FC"/>
-          </a:solidFill>
-          <a:ln w="9525">
-            <a:solidFill>
-              <a:srgbClr val="F0F6FC"/>
-            </a:solidFill>
-          </a:ln>
-        </p:spPr>
-        <p:style>
-          <a:lnRef idx="1">
-            <a:schemeClr val="accent1"/>
-          </a:lnRef>
-          <a:fillRef idx="3">
-            <a:schemeClr val="accent1"/>
-          </a:fillRef>
-          <a:effectRef idx="2">
-            <a:schemeClr val="accent1"/>
-          </a:effectRef>
-          <a:fontRef idx="minor">
-            <a:schemeClr val="lt1"/>
-          </a:fontRef>
-        </p:style>
-        <p:txBody>
-          <a:bodyPr rtlCol="0" anchor="ctr"/>
-          <a:lstStyle/>
-          <a:p>
-            <a:pPr algn="ctr"/>
-          </a:p>
-        </p:txBody>
-      </p:sp>
-      <p:sp>
-        <p:nvSpPr>
-          <p:cNvPr id="49" name="TextBox 48"/>
-          <p:cNvSpPr txBox="1"/>
-          <p:nvPr/>
-        </p:nvSpPr>
-        <p:spPr>
-          <a:xfrm>
-            <a:off x="9061704" y="2208276"/>
-            <a:ext cx="256032" cy="256032"/>
-          </a:xfrm>
-          <a:prstGeom prst="rect">
-            <a:avLst/>
-          </a:prstGeom>
-          <a:noFill/>
-        </p:spPr>
-        <p:txBody>
-          <a:bodyPr wrap="square">
-            <a:spAutoFit/>
-          </a:bodyPr>
-          <a:lstStyle/>
-          <a:p>
-            <a:pPr algn="ctr"/>
-            <a:r>
-              <a:rPr sz="800" b="1">
-                <a:solidFill>
-                  <a:srgbClr val="0D1117"/>
-                </a:solidFill>
-              </a:rPr>
-              <a:t>5</a:t>
-            </a:r>
-          </a:p>
-        </p:txBody>
-      </p:sp>
-      <p:cxnSp>
-        <p:nvCxnSpPr>
-          <p:cNvPr id="50" name="Connector 49"/>
-          <p:cNvCxnSpPr/>
-          <p:nvPr/>
-        </p:nvCxnSpPr>
-        <p:spPr>
-          <a:xfrm>
-            <a:off x="7726679" y="2834640"/>
-            <a:ext cx="0" cy="868680"/>
-          </a:xfrm>
-          <a:prstGeom prst="bentConnector3">
-            <a:avLst/>
-          </a:prstGeom>
-          <a:ln w="15876">
-            <a:solidFill>
-              <a:srgbClr val="F0883E"/>
-            </a:solidFill>
-            <a:tailEnd type="arrow" w="med" len="med"/>
-          </a:ln>
-        </p:spPr>
-        <p:style>
-          <a:lnRef idx="2">
-            <a:schemeClr val="accent1"/>
-          </a:lnRef>
-          <a:fillRef idx="0">
-            <a:schemeClr val="accent1"/>
-          </a:fillRef>
-          <a:effectRef idx="1">
-            <a:schemeClr val="accent1"/>
-          </a:effectRef>
-          <a:fontRef idx="minor">
-            <a:schemeClr val="tx1"/>
-          </a:fontRef>
-        </p:style>
-      </p:cxnSp>
-      <p:sp>
-        <p:nvSpPr>
-          <p:cNvPr id="51" name="Rectangle 50"/>
-          <p:cNvSpPr/>
-          <p:nvPr/>
-        </p:nvSpPr>
-        <p:spPr>
-          <a:xfrm>
-            <a:off x="7598663" y="3140964"/>
+            <a:off x="7598663" y="2340864"/>
             <a:ext cx="256032" cy="256032"/>
           </a:xfrm>
           <a:prstGeom prst="rect">
@@ -17007,13 +16892,128 @@
       </p:sp>
       <p:sp>
         <p:nvSpPr>
+          <p:cNvPr id="49" name="TextBox 48"/>
+          <p:cNvSpPr txBox="1"/>
+          <p:nvPr/>
+        </p:nvSpPr>
+        <p:spPr>
+          <a:xfrm>
+            <a:off x="7598663" y="2322576"/>
+            <a:ext cx="256032" cy="256032"/>
+          </a:xfrm>
+          <a:prstGeom prst="rect">
+            <a:avLst/>
+          </a:prstGeom>
+          <a:noFill/>
+        </p:spPr>
+        <p:txBody>
+          <a:bodyPr wrap="square">
+            <a:spAutoFit/>
+          </a:bodyPr>
+          <a:lstStyle/>
+          <a:p>
+            <a:pPr algn="ctr"/>
+            <a:r>
+              <a:rPr sz="800" b="1">
+                <a:solidFill>
+                  <a:srgbClr val="0D1117"/>
+                </a:solidFill>
+              </a:rPr>
+              <a:t>5</a:t>
+            </a:r>
+          </a:p>
+        </p:txBody>
+      </p:sp>
+      <p:cxnSp>
+        <p:nvCxnSpPr>
+          <p:cNvPr id="50" name="Connector 49"/>
+          <p:cNvCxnSpPr/>
+          <p:nvPr/>
+        </p:nvCxnSpPr>
+        <p:spPr>
+          <a:xfrm>
+            <a:off x="7726679" y="3273552"/>
+            <a:ext cx="0" cy="201168"/>
+          </a:xfrm>
+          <a:prstGeom prst="bentConnector3">
+            <a:avLst/>
+          </a:prstGeom>
+          <a:ln w="15876">
+            <a:solidFill>
+              <a:srgbClr val="58A6FF"/>
+            </a:solidFill>
+            <a:tailEnd type="arrow" w="med" len="med"/>
+          </a:ln>
+        </p:spPr>
+        <p:style>
+          <a:lnRef idx="2">
+            <a:schemeClr val="accent1"/>
+          </a:lnRef>
+          <a:fillRef idx="0">
+            <a:schemeClr val="accent1"/>
+          </a:fillRef>
+          <a:effectRef idx="1">
+            <a:schemeClr val="accent1"/>
+          </a:effectRef>
+          <a:fontRef idx="minor">
+            <a:schemeClr val="tx1"/>
+          </a:fontRef>
+        </p:style>
+      </p:cxnSp>
+      <p:sp>
+        <p:nvSpPr>
+          <p:cNvPr id="51" name="Rectangle 50"/>
+          <p:cNvSpPr/>
+          <p:nvPr/>
+        </p:nvSpPr>
+        <p:spPr>
+          <a:xfrm>
+            <a:off x="7598663" y="3246120"/>
+            <a:ext cx="256032" cy="256032"/>
+          </a:xfrm>
+          <a:prstGeom prst="rect">
+            <a:avLst/>
+          </a:prstGeom>
+          <a:solidFill>
+            <a:srgbClr val="58A6FF"/>
+          </a:solidFill>
+          <a:ln w="9525">
+            <a:solidFill>
+              <a:srgbClr val="58A6FF"/>
+            </a:solidFill>
+          </a:ln>
+        </p:spPr>
+        <p:style>
+          <a:lnRef idx="1">
+            <a:schemeClr val="accent1"/>
+          </a:lnRef>
+          <a:fillRef idx="3">
+            <a:schemeClr val="accent1"/>
+          </a:fillRef>
+          <a:effectRef idx="2">
+            <a:schemeClr val="accent1"/>
+          </a:effectRef>
+          <a:fontRef idx="minor">
+            <a:schemeClr val="lt1"/>
+          </a:fontRef>
+        </p:style>
+        <p:txBody>
+          <a:bodyPr rtlCol="0" anchor="ctr"/>
+          <a:lstStyle/>
+          <a:p>
+            <a:pPr algn="ctr"/>
+          </a:p>
+        </p:txBody>
+      </p:sp>
+      <p:sp>
+        <p:nvSpPr>
           <p:cNvPr id="52" name="TextBox 51"/>
           <p:cNvSpPr txBox="1"/>
           <p:nvPr/>
         </p:nvSpPr>
         <p:spPr>
           <a:xfrm>
-            <a:off x="7598663" y="3122676"/>
+            <a:off x="7598663" y="3227832"/>
             <a:ext cx="256032" cy="256032"/>
           </a:xfrm>
           <a:prstGeom prst="rect">
@@ -17047,8 +17047,8 @@
         </p:nvCxnSpPr>
         <p:spPr>
           <a:xfrm flipV="1">
-            <a:off x="6949440" y="4361688"/>
-            <a:ext cx="365759" cy="347472"/>
+            <a:off x="6949440" y="3273552"/>
+            <a:ext cx="411479" cy="1344168"/>
           </a:xfrm>
           <a:prstGeom prst="bentConnector3">
             <a:avLst/>
@@ -17083,8 +17083,8 @@
         </p:nvCxnSpPr>
         <p:spPr>
           <a:xfrm flipH="1" flipV="1">
-            <a:off x="8138159" y="4361688"/>
-            <a:ext cx="822960" cy="347472"/>
+            <a:off x="8092440" y="3273552"/>
+            <a:ext cx="868679" cy="1344168"/>
           </a:xfrm>
           <a:prstGeom prst="bentConnector3">
             <a:avLst/>
@@ -17119,7 +17119,7 @@
         </p:nvSpPr>
         <p:spPr>
           <a:xfrm>
-            <a:off x="7004304" y="4407408"/>
+            <a:off x="7027164" y="3817620"/>
             <a:ext cx="256032" cy="256032"/>
           </a:xfrm>
           <a:prstGeom prst="rect">
@@ -17164,7 +17164,7 @@
         </p:nvSpPr>
         <p:spPr>
           <a:xfrm>
-            <a:off x="7004304" y="4389120"/>
+            <a:off x="7027164" y="3799331"/>
             <a:ext cx="256032" cy="256032"/>
           </a:xfrm>
           <a:prstGeom prst="rect">
@@ -17501,7 +17501,7 @@
                   <a:srgbClr val="8B949E"/>
                 </a:solidFill>
               </a:rPr>
-              <a:t>4  query(feature_request)  →  chunks + L2 distances  (internal, per-agent)</a:t>
+              <a:t>4  query(feature_request)  →  chunks + L2 distances  (internal RAG call)</a:t>
             </a:r>
           </a:p>
         </p:txBody>
@@ -17515,85 +17515,6 @@
         <p:spPr>
           <a:xfrm>
             <a:off x="6217920" y="5650992"/>
-            <a:ext cx="201168" cy="141732"/>
-          </a:xfrm>
-          <a:prstGeom prst="rect">
-            <a:avLst/>
-          </a:prstGeom>
-          <a:solidFill>
-            <a:srgbClr val="F0F6FC"/>
-          </a:solidFill>
-          <a:ln w="9525">
-            <a:solidFill>
-              <a:srgbClr val="F0F6FC"/>
-            </a:solidFill>
-          </a:ln>
-        </p:spPr>
-        <p:style>
-          <a:lnRef idx="1">
-            <a:schemeClr val="accent1"/>
-          </a:lnRef>
-          <a:fillRef idx="3">
-            <a:schemeClr val="accent1"/>
-          </a:fillRef>
-          <a:effectRef idx="2">
-            <a:schemeClr val="accent1"/>
-          </a:effectRef>
-          <a:fontRef idx="minor">
-            <a:schemeClr val="lt1"/>
-          </a:fontRef>
-        </p:style>
-        <p:txBody>
-          <a:bodyPr rtlCol="0" anchor="ctr"/>
-          <a:lstStyle/>
-          <a:p>
-            <a:pPr algn="ctr"/>
-          </a:p>
-        </p:txBody>
-      </p:sp>
-      <p:sp>
-        <p:nvSpPr>
-          <p:cNvPr id="66" name="TextBox 65"/>
-          <p:cNvSpPr txBox="1"/>
-          <p:nvPr/>
-        </p:nvSpPr>
-        <p:spPr>
-          <a:xfrm>
-            <a:off x="6464808" y="5641848"/>
-            <a:ext cx="5486400" cy="164592"/>
-          </a:xfrm>
-          <a:prstGeom prst="rect">
-            <a:avLst/>
-          </a:prstGeom>
-          <a:noFill/>
-        </p:spPr>
-        <p:txBody>
-          <a:bodyPr wrap="square">
-            <a:spAutoFit/>
-          </a:bodyPr>
-          <a:lstStyle/>
-          <a:p>
-            <a:pPr algn="l"/>
-            <a:r>
-              <a:rPr sz="750" b="0">
-                <a:solidFill>
-                  <a:srgbClr val="8B949E"/>
-                </a:solidFill>
-              </a:rPr>
-              <a:t>5  encode(text)  →  384-dim float[]  (sentence-transformers, local CPU/GPU)</a:t>
-            </a:r>
-          </a:p>
-        </p:txBody>
-      </p:sp>
-      <p:sp>
-        <p:nvSpPr>
-          <p:cNvPr id="67" name="Rectangle 66"/>
-          <p:cNvSpPr/>
-          <p:nvPr/>
-        </p:nvSpPr>
-        <p:spPr>
-          <a:xfrm>
-            <a:off x="6217920" y="5820156"/>
             <a:ext cx="201168" cy="141732"/>
           </a:xfrm>
           <a:prstGeom prst="rect">
@@ -17632,6 +17553,85 @@
       </p:sp>
       <p:sp>
         <p:nvSpPr>
+          <p:cNvPr id="66" name="TextBox 65"/>
+          <p:cNvSpPr txBox="1"/>
+          <p:nvPr/>
+        </p:nvSpPr>
+        <p:spPr>
+          <a:xfrm>
+            <a:off x="6464808" y="5641848"/>
+            <a:ext cx="5486400" cy="164592"/>
+          </a:xfrm>
+          <a:prstGeom prst="rect">
+            <a:avLst/>
+          </a:prstGeom>
+          <a:noFill/>
+        </p:spPr>
+        <p:txBody>
+          <a:bodyPr wrap="square">
+            <a:spAutoFit/>
+          </a:bodyPr>
+          <a:lstStyle/>
+          <a:p>
+            <a:pPr algn="l"/>
+            <a:r>
+              <a:rPr sz="750" b="0">
+                <a:solidFill>
+                  <a:srgbClr val="8B949E"/>
+                </a:solidFill>
+              </a:rPr>
+              <a:t>5  text chunks / query text  →  384-dim float[]  (RAG → Embedding Model)</a:t>
+            </a:r>
+          </a:p>
+        </p:txBody>
+      </p:sp>
+      <p:sp>
+        <p:nvSpPr>
+          <p:cNvPr id="67" name="Rectangle 66"/>
+          <p:cNvSpPr/>
+          <p:nvPr/>
+        </p:nvSpPr>
+        <p:spPr>
+          <a:xfrm>
+            <a:off x="6217920" y="5820156"/>
+            <a:ext cx="201168" cy="141732"/>
+          </a:xfrm>
+          <a:prstGeom prst="rect">
+            <a:avLst/>
+          </a:prstGeom>
+          <a:solidFill>
+            <a:srgbClr val="58A6FF"/>
+          </a:solidFill>
+          <a:ln w="9525">
+            <a:solidFill>
+              <a:srgbClr val="58A6FF"/>
+            </a:solidFill>
+          </a:ln>
+        </p:spPr>
+        <p:style>
+          <a:lnRef idx="1">
+            <a:schemeClr val="accent1"/>
+          </a:lnRef>
+          <a:fillRef idx="3">
+            <a:schemeClr val="accent1"/>
+          </a:fillRef>
+          <a:effectRef idx="2">
+            <a:schemeClr val="accent1"/>
+          </a:effectRef>
+          <a:fontRef idx="minor">
+            <a:schemeClr val="lt1"/>
+          </a:fontRef>
+        </p:style>
+        <p:txBody>
+          <a:bodyPr rtlCol="0" anchor="ctr"/>
+          <a:lstStyle/>
+          <a:p>
+            <a:pPr algn="ctr"/>
+          </a:p>
+        </p:txBody>
+      </p:sp>
+      <p:sp>
+        <p:nvSpPr>
           <p:cNvPr id="68" name="TextBox 67"/>
           <p:cNvSpPr txBox="1"/>
           <p:nvPr/>
@@ -17659,7 +17659,7 @@
                   <a:srgbClr val="8B949E"/>
                 </a:solidFill>
               </a:rPr>
-              <a:t>6  vector similarity search  →  top-k chunks + L2 dist  (ChromaDB)</a:t>
+              <a:t>6  vectors → store (index) / search (query)  →  top-k chunks + L2 dist  (ChromaDB)</a:t>
             </a:r>
           </a:p>
         </p:txBody>
@@ -17738,7 +17738,7 @@
                   <a:srgbClr val="8B949E"/>
                 </a:solidFill>
               </a:rPr>
-              <a:t>7  indexed at startup  →  text split → embed → stored in .chroma_db/</a:t>
+              <a:t>7  startup indexing: docs+src → chunk → Embedding → vectors → ChromaDB</a:t>
             </a:r>
           </a:p>
         </p:txBody>

--- a/demo/slides.pptx
+++ b/demo/slides.pptx
@@ -4550,9 +4550,89 @@
           </a:p>
         </p:txBody>
       </p:sp>
+      <p:sp>
+        <p:nvSpPr>
+          <p:cNvPr id="22" name="Rectangle 21"/>
+          <p:cNvSpPr/>
+          <p:nvPr/>
+        </p:nvSpPr>
+        <p:spPr>
+          <a:xfrm>
+            <a:off x="7955279" y="2670048"/>
+            <a:ext cx="3977639" cy="384048"/>
+          </a:xfrm>
+          <a:prstGeom prst="rect">
+            <a:avLst/>
+          </a:prstGeom>
+          <a:solidFill>
+            <a:srgbClr val="0D1422"/>
+          </a:solidFill>
+          <a:ln w="9525">
+            <a:solidFill>
+              <a:srgbClr val="58A6FF"/>
+            </a:solidFill>
+          </a:ln>
+        </p:spPr>
+        <p:style>
+          <a:lnRef idx="1">
+            <a:schemeClr val="accent1"/>
+          </a:lnRef>
+          <a:fillRef idx="3">
+            <a:schemeClr val="accent1"/>
+          </a:fillRef>
+          <a:effectRef idx="2">
+            <a:schemeClr val="accent1"/>
+          </a:effectRef>
+          <a:fontRef idx="minor">
+            <a:schemeClr val="lt1"/>
+          </a:fontRef>
+        </p:style>
+        <p:txBody>
+          <a:bodyPr rtlCol="0" anchor="ctr"/>
+          <a:lstStyle/>
+          <a:p>
+            <a:pPr algn="ctr"/>
+          </a:p>
+        </p:txBody>
+      </p:sp>
+      <p:sp>
+        <p:nvSpPr>
+          <p:cNvPr id="23" name="TextBox 22"/>
+          <p:cNvSpPr txBox="1"/>
+          <p:nvPr/>
+        </p:nvSpPr>
+        <p:spPr>
+          <a:xfrm>
+            <a:off x="8046720" y="2688336"/>
+            <a:ext cx="3794760" cy="329184"/>
+          </a:xfrm>
+          <a:prstGeom prst="rect">
+            <a:avLst/>
+          </a:prstGeom>
+          <a:noFill/>
+        </p:spPr>
+        <p:txBody>
+          <a:bodyPr wrap="square">
+            <a:spAutoFit/>
+          </a:bodyPr>
+          <a:lstStyle/>
+          <a:p>
+            <a:pPr algn="ctr"/>
+            <a:r>
+              <a:rPr sz="750" b="0">
+                <a:solidFill>
+                  <a:srgbClr val="58A6FF"/>
+                </a:solidFill>
+              </a:rPr>
+              <a:t>model loaded fresh per subprocess call  ·  ~5-15 s each  ·  ~300 MB RAM each
+8 calls for 3 repos → ~40-120 s model-load overhead on cold start</a:t>
+            </a:r>
+          </a:p>
+        </p:txBody>
+      </p:sp>
       <p:cxnSp>
         <p:nvCxnSpPr>
-          <p:cNvPr id="22" name="Connector 21"/>
+          <p:cNvPr id="24" name="Connector 23"/>
           <p:cNvCxnSpPr/>
           <p:nvPr/>
         </p:nvCxnSpPr>
@@ -4588,7 +4668,7 @@
       </p:cxnSp>
       <p:sp>
         <p:nvSpPr>
-          <p:cNvPr id="23" name="Rectangle 22"/>
+          <p:cNvPr id="25" name="Rectangle 24"/>
           <p:cNvSpPr/>
           <p:nvPr/>
         </p:nvSpPr>
@@ -4633,7 +4713,7 @@
       </p:sp>
       <p:sp>
         <p:nvSpPr>
-          <p:cNvPr id="24" name="TextBox 23"/>
+          <p:cNvPr id="26" name="TextBox 25"/>
           <p:cNvSpPr txBox="1"/>
           <p:nvPr/>
         </p:nvSpPr>
@@ -4667,7 +4747,7 @@
       </p:sp>
       <p:sp>
         <p:nvSpPr>
-          <p:cNvPr id="25" name="TextBox 24"/>
+          <p:cNvPr id="27" name="TextBox 26"/>
           <p:cNvSpPr txBox="1"/>
           <p:nvPr/>
         </p:nvSpPr>
@@ -4701,7 +4781,7 @@
       </p:sp>
       <p:cxnSp>
         <p:nvCxnSpPr>
-          <p:cNvPr id="26" name="Connector 25"/>
+          <p:cNvPr id="28" name="Connector 27"/>
           <p:cNvCxnSpPr/>
           <p:nvPr/>
         </p:nvCxnSpPr>
@@ -4737,7 +4817,7 @@
       </p:cxnSp>
       <p:sp>
         <p:nvSpPr>
-          <p:cNvPr id="27" name="Rectangle 26"/>
+          <p:cNvPr id="29" name="Rectangle 28"/>
           <p:cNvSpPr/>
           <p:nvPr/>
         </p:nvSpPr>
@@ -4782,7 +4862,7 @@
       </p:sp>
       <p:sp>
         <p:nvSpPr>
-          <p:cNvPr id="28" name="TextBox 27"/>
+          <p:cNvPr id="30" name="TextBox 29"/>
           <p:cNvSpPr txBox="1"/>
           <p:nvPr/>
         </p:nvSpPr>
@@ -4816,7 +4896,7 @@
       </p:sp>
       <p:sp>
         <p:nvSpPr>
-          <p:cNvPr id="29" name="TextBox 28"/>
+          <p:cNvPr id="31" name="TextBox 30"/>
           <p:cNvSpPr txBox="1"/>
           <p:nvPr/>
         </p:nvSpPr>
@@ -4850,7 +4930,7 @@
       </p:sp>
       <p:sp>
         <p:nvSpPr>
-          <p:cNvPr id="30" name="Rectangle 29"/>
+          <p:cNvPr id="32" name="Rectangle 31"/>
           <p:cNvSpPr/>
           <p:nvPr/>
         </p:nvSpPr>
@@ -4895,7 +4975,7 @@
       </p:sp>
       <p:sp>
         <p:nvSpPr>
-          <p:cNvPr id="31" name="TextBox 30"/>
+          <p:cNvPr id="33" name="TextBox 32"/>
           <p:cNvSpPr txBox="1"/>
           <p:nvPr/>
         </p:nvSpPr>
@@ -4929,7 +5009,7 @@
       </p:sp>
       <p:sp>
         <p:nvSpPr>
-          <p:cNvPr id="32" name="TextBox 31"/>
+          <p:cNvPr id="34" name="TextBox 33"/>
           <p:cNvSpPr txBox="1"/>
           <p:nvPr/>
         </p:nvSpPr>
@@ -4963,7 +5043,7 @@
       </p:sp>
       <p:sp>
         <p:nvSpPr>
-          <p:cNvPr id="33" name="Rectangle 32"/>
+          <p:cNvPr id="35" name="Rectangle 34"/>
           <p:cNvSpPr/>
           <p:nvPr/>
         </p:nvSpPr>
@@ -5008,7 +5088,7 @@
       </p:sp>
       <p:sp>
         <p:nvSpPr>
-          <p:cNvPr id="34" name="TextBox 33"/>
+          <p:cNvPr id="36" name="TextBox 35"/>
           <p:cNvSpPr txBox="1"/>
           <p:nvPr/>
         </p:nvSpPr>
@@ -5042,7 +5122,7 @@
       </p:sp>
       <p:sp>
         <p:nvSpPr>
-          <p:cNvPr id="35" name="TextBox 34"/>
+          <p:cNvPr id="37" name="TextBox 36"/>
           <p:cNvSpPr txBox="1"/>
           <p:nvPr/>
         </p:nvSpPr>
@@ -5076,7 +5156,7 @@
       </p:sp>
       <p:sp>
         <p:nvSpPr>
-          <p:cNvPr id="36" name="Rectangle 35"/>
+          <p:cNvPr id="38" name="Rectangle 37"/>
           <p:cNvSpPr/>
           <p:nvPr/>
         </p:nvSpPr>
@@ -5121,7 +5201,7 @@
       </p:sp>
       <p:sp>
         <p:nvSpPr>
-          <p:cNvPr id="37" name="TextBox 36"/>
+          <p:cNvPr id="39" name="TextBox 38"/>
           <p:cNvSpPr txBox="1"/>
           <p:nvPr/>
         </p:nvSpPr>
@@ -5155,7 +5235,7 @@
       </p:sp>
       <p:sp>
         <p:nvSpPr>
-          <p:cNvPr id="38" name="TextBox 37"/>
+          <p:cNvPr id="40" name="TextBox 39"/>
           <p:cNvSpPr txBox="1"/>
           <p:nvPr/>
         </p:nvSpPr>
@@ -5189,7 +5269,7 @@
       </p:sp>
       <p:sp>
         <p:nvSpPr>
-          <p:cNvPr id="39" name="Rectangle 38"/>
+          <p:cNvPr id="41" name="Rectangle 40"/>
           <p:cNvSpPr/>
           <p:nvPr/>
         </p:nvSpPr>
@@ -5234,7 +5314,7 @@
       </p:sp>
       <p:sp>
         <p:nvSpPr>
-          <p:cNvPr id="40" name="TextBox 39"/>
+          <p:cNvPr id="42" name="TextBox 41"/>
           <p:cNvSpPr txBox="1"/>
           <p:nvPr/>
         </p:nvSpPr>
@@ -5268,7 +5348,7 @@
       </p:sp>
       <p:sp>
         <p:nvSpPr>
-          <p:cNvPr id="41" name="TextBox 40"/>
+          <p:cNvPr id="43" name="TextBox 42"/>
           <p:cNvSpPr txBox="1"/>
           <p:nvPr/>
         </p:nvSpPr>
@@ -5305,7 +5385,7 @@
       </p:sp>
       <p:sp>
         <p:nvSpPr>
-          <p:cNvPr id="42" name="Rectangle 41"/>
+          <p:cNvPr id="44" name="Rectangle 43"/>
           <p:cNvSpPr/>
           <p:nvPr/>
         </p:nvSpPr>
@@ -5350,7 +5430,7 @@
       </p:sp>
       <p:sp>
         <p:nvSpPr>
-          <p:cNvPr id="43" name="TextBox 42"/>
+          <p:cNvPr id="45" name="TextBox 44"/>
           <p:cNvSpPr txBox="1"/>
           <p:nvPr/>
         </p:nvSpPr>
@@ -5384,7 +5464,7 @@
       </p:sp>
       <p:sp>
         <p:nvSpPr>
-          <p:cNvPr id="44" name="TextBox 43"/>
+          <p:cNvPr id="46" name="TextBox 45"/>
           <p:cNvSpPr txBox="1"/>
           <p:nvPr/>
         </p:nvSpPr>
@@ -5419,7 +5499,7 @@
       </p:sp>
       <p:sp>
         <p:nvSpPr>
-          <p:cNvPr id="45" name="Rectangle 44"/>
+          <p:cNvPr id="47" name="Rectangle 46"/>
           <p:cNvSpPr/>
           <p:nvPr/>
         </p:nvSpPr>
@@ -5464,7 +5544,7 @@
       </p:sp>
       <p:sp>
         <p:nvSpPr>
-          <p:cNvPr id="46" name="TextBox 45"/>
+          <p:cNvPr id="48" name="TextBox 47"/>
           <p:cNvSpPr txBox="1"/>
           <p:nvPr/>
         </p:nvSpPr>
@@ -5498,7 +5578,7 @@
       </p:sp>
       <p:sp>
         <p:nvSpPr>
-          <p:cNvPr id="47" name="TextBox 46"/>
+          <p:cNvPr id="49" name="TextBox 48"/>
           <p:cNvSpPr txBox="1"/>
           <p:nvPr/>
         </p:nvSpPr>
@@ -5530,9 +5610,88 @@
           </a:p>
         </p:txBody>
       </p:sp>
+      <p:sp>
+        <p:nvSpPr>
+          <p:cNvPr id="50" name="Rectangle 49"/>
+          <p:cNvSpPr/>
+          <p:nvPr/>
+        </p:nvSpPr>
+        <p:spPr>
+          <a:xfrm>
+            <a:off x="256032" y="4261104"/>
+            <a:ext cx="6492240" cy="192024"/>
+          </a:xfrm>
+          <a:prstGeom prst="rect">
+            <a:avLst/>
+          </a:prstGeom>
+          <a:solidFill>
+            <a:srgbClr val="0D1422"/>
+          </a:solidFill>
+          <a:ln w="9525">
+            <a:solidFill>
+              <a:srgbClr val="58A6FF"/>
+            </a:solidFill>
+          </a:ln>
+        </p:spPr>
+        <p:style>
+          <a:lnRef idx="1">
+            <a:schemeClr val="accent1"/>
+          </a:lnRef>
+          <a:fillRef idx="3">
+            <a:schemeClr val="accent1"/>
+          </a:fillRef>
+          <a:effectRef idx="2">
+            <a:schemeClr val="accent1"/>
+          </a:effectRef>
+          <a:fontRef idx="minor">
+            <a:schemeClr val="lt1"/>
+          </a:fontRef>
+        </p:style>
+        <p:txBody>
+          <a:bodyPr rtlCol="0" anchor="ctr"/>
+          <a:lstStyle/>
+          <a:p>
+            <a:pPr algn="ctr"/>
+          </a:p>
+        </p:txBody>
+      </p:sp>
+      <p:sp>
+        <p:nvSpPr>
+          <p:cNvPr id="51" name="TextBox 50"/>
+          <p:cNvSpPr txBox="1"/>
+          <p:nvPr/>
+        </p:nvSpPr>
+        <p:spPr>
+          <a:xfrm>
+            <a:off x="347472" y="4270248"/>
+            <a:ext cx="6309360" cy="155448"/>
+          </a:xfrm>
+          <a:prstGeom prst="rect">
+            <a:avLst/>
+          </a:prstGeom>
+          <a:noFill/>
+        </p:spPr>
+        <p:txBody>
+          <a:bodyPr wrap="square">
+            <a:spAutoFit/>
+          </a:bodyPr>
+          <a:lstStyle/>
+          <a:p>
+            <a:pPr algn="ctr"/>
+            <a:r>
+              <a:rPr sz="700" b="0">
+                <a:solidFill>
+                  <a:srgbClr val="58A6FF"/>
+                </a:solidFill>
+              </a:rPr>
+              <a:t>each ephemeral mcp_server subprocess loads all-MiniLM-L6-v2 fresh  ·  ~5-15 s per subprocess  ·  ~300 MB RAM per process</a:t>
+            </a:r>
+          </a:p>
+        </p:txBody>
+      </p:sp>
       <p:cxnSp>
         <p:nvCxnSpPr>
-          <p:cNvPr id="48" name="Connector 47"/>
+          <p:cNvPr id="52" name="Connector 51"/>
           <p:cNvCxnSpPr/>
           <p:nvPr/>
         </p:nvCxnSpPr>
@@ -5568,7 +5727,7 @@
       </p:cxnSp>
       <p:sp>
         <p:nvSpPr>
-          <p:cNvPr id="49" name="Rectangle 48"/>
+          <p:cNvPr id="53" name="Rectangle 52"/>
           <p:cNvSpPr/>
           <p:nvPr/>
         </p:nvSpPr>
@@ -5613,7 +5772,7 @@
       </p:sp>
       <p:sp>
         <p:nvSpPr>
-          <p:cNvPr id="50" name="TextBox 49"/>
+          <p:cNvPr id="54" name="TextBox 53"/>
           <p:cNvSpPr txBox="1"/>
           <p:nvPr/>
         </p:nvSpPr>
@@ -5647,7 +5806,7 @@
       </p:sp>
       <p:sp>
         <p:nvSpPr>
-          <p:cNvPr id="51" name="TextBox 50"/>
+          <p:cNvPr id="55" name="TextBox 54"/>
           <p:cNvSpPr txBox="1"/>
           <p:nvPr/>
         </p:nvSpPr>
@@ -5681,7 +5840,7 @@
       </p:sp>
       <p:cxnSp>
         <p:nvCxnSpPr>
-          <p:cNvPr id="52" name="Connector 51"/>
+          <p:cNvPr id="56" name="Connector 55"/>
           <p:cNvCxnSpPr/>
           <p:nvPr/>
         </p:nvCxnSpPr>
@@ -5717,7 +5876,7 @@
       </p:cxnSp>
       <p:sp>
         <p:nvSpPr>
-          <p:cNvPr id="53" name="Rectangle 52"/>
+          <p:cNvPr id="57" name="Rectangle 56"/>
           <p:cNvSpPr/>
           <p:nvPr/>
         </p:nvSpPr>
@@ -5762,7 +5921,7 @@
       </p:sp>
       <p:sp>
         <p:nvSpPr>
-          <p:cNvPr id="54" name="TextBox 53"/>
+          <p:cNvPr id="58" name="TextBox 57"/>
           <p:cNvSpPr txBox="1"/>
           <p:nvPr/>
         </p:nvSpPr>
@@ -5796,7 +5955,7 @@
       </p:sp>
       <p:sp>
         <p:nvSpPr>
-          <p:cNvPr id="55" name="TextBox 54"/>
+          <p:cNvPr id="59" name="TextBox 58"/>
           <p:cNvSpPr txBox="1"/>
           <p:nvPr/>
         </p:nvSpPr>
@@ -5830,7 +5989,7 @@
       </p:sp>
       <p:cxnSp>
         <p:nvCxnSpPr>
-          <p:cNvPr id="56" name="Connector 55"/>
+          <p:cNvPr id="60" name="Connector 59"/>
           <p:cNvCxnSpPr/>
           <p:nvPr/>
         </p:nvCxnSpPr>
@@ -5866,7 +6025,7 @@
       </p:cxnSp>
       <p:sp>
         <p:nvSpPr>
-          <p:cNvPr id="57" name="Rectangle 56"/>
+          <p:cNvPr id="61" name="Rectangle 60"/>
           <p:cNvSpPr/>
           <p:nvPr/>
         </p:nvSpPr>
@@ -5911,7 +6070,7 @@
       </p:sp>
       <p:sp>
         <p:nvSpPr>
-          <p:cNvPr id="58" name="TextBox 57"/>
+          <p:cNvPr id="62" name="TextBox 61"/>
           <p:cNvSpPr txBox="1"/>
           <p:nvPr/>
         </p:nvSpPr>
@@ -5945,7 +6104,7 @@
       </p:sp>
       <p:sp>
         <p:nvSpPr>
-          <p:cNvPr id="59" name="TextBox 58"/>
+          <p:cNvPr id="63" name="TextBox 62"/>
           <p:cNvSpPr txBox="1"/>
           <p:nvPr/>
         </p:nvSpPr>
@@ -5979,7 +6138,7 @@
       </p:sp>
       <p:cxnSp>
         <p:nvCxnSpPr>
-          <p:cNvPr id="60" name="Connector 59"/>
+          <p:cNvPr id="64" name="Connector 63"/>
           <p:cNvCxnSpPr/>
           <p:nvPr/>
         </p:nvCxnSpPr>
@@ -6015,7 +6174,7 @@
       </p:cxnSp>
       <p:sp>
         <p:nvSpPr>
-          <p:cNvPr id="61" name="Rectangle 60"/>
+          <p:cNvPr id="65" name="Rectangle 64"/>
           <p:cNvSpPr/>
           <p:nvPr/>
         </p:nvSpPr>
@@ -6060,7 +6219,7 @@
       </p:sp>
       <p:sp>
         <p:nvSpPr>
-          <p:cNvPr id="62" name="TextBox 61"/>
+          <p:cNvPr id="66" name="TextBox 65"/>
           <p:cNvSpPr txBox="1"/>
           <p:nvPr/>
         </p:nvSpPr>
@@ -6094,7 +6253,7 @@
       </p:sp>
       <p:sp>
         <p:nvSpPr>
-          <p:cNvPr id="63" name="TextBox 62"/>
+          <p:cNvPr id="67" name="TextBox 66"/>
           <p:cNvSpPr txBox="1"/>
           <p:nvPr/>
         </p:nvSpPr>
@@ -6128,7 +6287,7 @@
       </p:sp>
       <p:cxnSp>
         <p:nvCxnSpPr>
-          <p:cNvPr id="64" name="Connector 63"/>
+          <p:cNvPr id="68" name="Connector 67"/>
           <p:cNvCxnSpPr/>
           <p:nvPr/>
         </p:nvCxnSpPr>
@@ -6164,7 +6323,7 @@
       </p:cxnSp>
       <p:sp>
         <p:nvSpPr>
-          <p:cNvPr id="65" name="TextBox 64"/>
+          <p:cNvPr id="69" name="TextBox 68"/>
           <p:cNvSpPr txBox="1"/>
           <p:nvPr/>
         </p:nvSpPr>
@@ -6198,7 +6357,7 @@
       </p:sp>
       <p:cxnSp>
         <p:nvCxnSpPr>
-          <p:cNvPr id="66" name="Connector 65"/>
+          <p:cNvPr id="70" name="Connector 69"/>
           <p:cNvCxnSpPr/>
           <p:nvPr/>
         </p:nvCxnSpPr>
@@ -6234,7 +6393,7 @@
       </p:cxnSp>
       <p:sp>
         <p:nvSpPr>
-          <p:cNvPr id="67" name="TextBox 66"/>
+          <p:cNvPr id="71" name="TextBox 70"/>
           <p:cNvSpPr txBox="1"/>
           <p:nvPr/>
         </p:nvSpPr>
@@ -6355,7 +6514,7 @@
                   <a:srgbClr val="F0F6FC"/>
                 </a:solidFill>
               </a:rPr>
-              <a:t>Permanent MCP Servers  ·  Streaming stdio Pipes  ·  Ephemeral Routing Subprocesses</a:t>
+              <a:t>VS Code spawns 4 permanent servers per window  ·  router spawns ephemeral peer subprocesses only during routing calls</a:t>
             </a:r>
           </a:p>
         </p:txBody>
@@ -6583,7 +6742,7 @@
                   <a:srgbClr val="8B949E"/>
                 </a:solidFill>
               </a:rPr>
-              <a:t>permanent · stdio pipe</a:t>
+              <a:t>permanent · model loaded once at startup</a:t>
             </a:r>
           </a:p>
         </p:txBody>
@@ -6696,7 +6855,7 @@
                   <a:srgbClr val="8B949E"/>
                 </a:solidFill>
               </a:rPr>
-              <a:t>permanent · stdio pipe</a:t>
+              <a:t>permanent · model loaded once at startup</a:t>
             </a:r>
           </a:p>
         </p:txBody>
@@ -6809,7 +6968,7 @@
                   <a:srgbClr val="8B949E"/>
                 </a:solidFill>
               </a:rPr>
-              <a:t>permanent · stdio pipe</a:t>
+              <a:t>permanent · model loaded once at startup</a:t>
             </a:r>
           </a:p>
         </p:txBody>
@@ -6922,7 +7081,7 @@
                   <a:srgbClr val="8B949E"/>
                 </a:solidFill>
               </a:rPr>
-              <a:t>permanent · stdio pipe</a:t>
+              <a:t>permanent · model loaded once at startup</a:t>
             </a:r>
           </a:p>
         </p:txBody>
@@ -7115,7 +7274,7 @@
                   <a:srgbClr val="8B949E"/>
                 </a:solidFill>
               </a:rPr>
-              <a:t>permanent · stdio pipe</a:t>
+              <a:t>permanent · model loaded once at startup</a:t>
             </a:r>
           </a:p>
         </p:txBody>
@@ -7228,7 +7387,7 @@
                   <a:srgbClr val="8B949E"/>
                 </a:solidFill>
               </a:rPr>
-              <a:t>permanent · stdio pipe</a:t>
+              <a:t>permanent · model loaded once at startup</a:t>
             </a:r>
           </a:p>
         </p:txBody>
@@ -7341,7 +7500,7 @@
                   <a:srgbClr val="8B949E"/>
                 </a:solidFill>
               </a:rPr>
-              <a:t>permanent · stdio pipe</a:t>
+              <a:t>permanent · model loaded once at startup</a:t>
             </a:r>
           </a:p>
         </p:txBody>
@@ -7454,7 +7613,7 @@
                   <a:srgbClr val="8B949E"/>
                 </a:solidFill>
               </a:rPr>
-              <a:t>permanent · stdio pipe</a:t>
+              <a:t>permanent · model loaded once at startup</a:t>
             </a:r>
           </a:p>
         </p:txBody>
@@ -7647,7 +7806,7 @@
                   <a:srgbClr val="8B949E"/>
                 </a:solidFill>
               </a:rPr>
-              <a:t>permanent · stdio pipe</a:t>
+              <a:t>permanent · model loaded once at startup</a:t>
             </a:r>
           </a:p>
         </p:txBody>
@@ -7760,7 +7919,7 @@
                   <a:srgbClr val="8B949E"/>
                 </a:solidFill>
               </a:rPr>
-              <a:t>permanent · stdio pipe</a:t>
+              <a:t>permanent · model loaded once at startup</a:t>
             </a:r>
           </a:p>
         </p:txBody>
@@ -7873,7 +8032,7 @@
                   <a:srgbClr val="8B949E"/>
                 </a:solidFill>
               </a:rPr>
-              <a:t>permanent · stdio pipe</a:t>
+              <a:t>permanent · model loaded once at startup</a:t>
             </a:r>
           </a:p>
         </p:txBody>
@@ -7986,7 +8145,7 @@
                   <a:srgbClr val="8B949E"/>
                 </a:solidFill>
               </a:rPr>
-              <a:t>permanent · stdio pipe</a:t>
+              <a:t>permanent · model loaded once at startup</a:t>
             </a:r>
           </a:p>
         </p:txBody>
@@ -8179,7 +8338,7 @@
                   <a:srgbClr val="8B949E"/>
                 </a:solidFill>
               </a:rPr>
-              <a:t>permanent · stdio pipe</a:t>
+              <a:t>permanent · model loaded once at startup</a:t>
             </a:r>
           </a:p>
         </p:txBody>
@@ -8292,7 +8451,7 @@
                   <a:srgbClr val="8B949E"/>
                 </a:solidFill>
               </a:rPr>
-              <a:t>permanent · stdio pipe</a:t>
+              <a:t>permanent · model loaded once at startup</a:t>
             </a:r>
           </a:p>
         </p:txBody>
@@ -8405,7 +8564,7 @@
                   <a:srgbClr val="8B949E"/>
                 </a:solidFill>
               </a:rPr>
-              <a:t>permanent · stdio pipe</a:t>
+              <a:t>permanent · model loaded once at startup</a:t>
             </a:r>
           </a:p>
         </p:txBody>
@@ -8518,7 +8677,7 @@
                   <a:srgbClr val="8B949E"/>
                 </a:solidFill>
               </a:rPr>
-              <a:t>permanent · stdio pipe</a:t>
+              <a:t>permanent · model loaded once at startup</a:t>
             </a:r>
           </a:p>
         </p:txBody>
@@ -8526,6 +8685,85 @@
       <p:sp>
         <p:nvSpPr>
           <p:cNvPr id="61" name="Rectangle 60"/>
+          <p:cNvSpPr/>
+          <p:nvPr/>
+        </p:nvSpPr>
+        <p:spPr>
+          <a:xfrm>
+            <a:off x="201168" y="4544568"/>
+            <a:ext cx="11887200" cy="155448"/>
+          </a:xfrm>
+          <a:prstGeom prst="rect">
+            <a:avLst/>
+          </a:prstGeom>
+          <a:solidFill>
+            <a:srgbClr val="0D1422"/>
+          </a:solidFill>
+          <a:ln w="9525">
+            <a:solidFill>
+              <a:srgbClr val="58A6FF"/>
+            </a:solidFill>
+          </a:ln>
+        </p:spPr>
+        <p:style>
+          <a:lnRef idx="1">
+            <a:schemeClr val="accent1"/>
+          </a:lnRef>
+          <a:fillRef idx="3">
+            <a:schemeClr val="accent1"/>
+          </a:fillRef>
+          <a:effectRef idx="2">
+            <a:schemeClr val="accent1"/>
+          </a:effectRef>
+          <a:fontRef idx="minor">
+            <a:schemeClr val="lt1"/>
+          </a:fontRef>
+        </p:style>
+        <p:txBody>
+          <a:bodyPr rtlCol="0" anchor="ctr"/>
+          <a:lstStyle/>
+          <a:p>
+            <a:pPr algn="ctr"/>
+          </a:p>
+        </p:txBody>
+      </p:sp>
+      <p:sp>
+        <p:nvSpPr>
+          <p:cNvPr id="62" name="TextBox 61"/>
+          <p:cNvSpPr txBox="1"/>
+          <p:nvPr/>
+        </p:nvSpPr>
+        <p:spPr>
+          <a:xfrm>
+            <a:off x="320040" y="4553712"/>
+            <a:ext cx="11658600" cy="128016"/>
+          </a:xfrm>
+          <a:prstGeom prst="rect">
+            <a:avLst/>
+          </a:prstGeom>
+          <a:noFill/>
+        </p:spPr>
+        <p:txBody>
+          <a:bodyPr wrap="square">
+            <a:spAutoFit/>
+          </a:bodyPr>
+          <a:lstStyle/>
+          <a:p>
+            <a:pPr algn="ctr"/>
+            <a:r>
+              <a:rPr sz="700" b="0">
+                <a:solidFill>
+                  <a:srgbClr val="58A6FF"/>
+                </a:solidFill>
+              </a:rPr>
+              <a:t>all-MiniLM-L6-v2 loaded ONCE at VS Code startup per process  ·  model stays in RAM for ALL Copilot queries  ·  16 procs × ~300 MB ≈ 4.8 GB total</a:t>
+            </a:r>
+          </a:p>
+        </p:txBody>
+      </p:sp>
+      <p:sp>
+        <p:nvSpPr>
+          <p:cNvPr id="63" name="Rectangle 62"/>
           <p:cNvSpPr/>
           <p:nvPr/>
         </p:nvSpPr>
@@ -8570,7 +8808,7 @@
       </p:sp>
       <p:sp>
         <p:nvSpPr>
-          <p:cNvPr id="62" name="TextBox 61"/>
+          <p:cNvPr id="64" name="TextBox 63"/>
           <p:cNvSpPr txBox="1"/>
           <p:nvPr/>
         </p:nvSpPr>
@@ -8604,7 +8842,7 @@
       </p:sp>
       <p:sp>
         <p:nvSpPr>
-          <p:cNvPr id="63" name="Rectangle 62"/>
+          <p:cNvPr id="65" name="Rectangle 64"/>
           <p:cNvSpPr/>
           <p:nvPr/>
         </p:nvSpPr>
@@ -8649,7 +8887,7 @@
       </p:sp>
       <p:sp>
         <p:nvSpPr>
-          <p:cNvPr id="64" name="TextBox 63"/>
+          <p:cNvPr id="66" name="TextBox 65"/>
           <p:cNvSpPr txBox="1"/>
           <p:nvPr/>
         </p:nvSpPr>
@@ -8683,7 +8921,7 @@
       </p:sp>
       <p:sp>
         <p:nvSpPr>
-          <p:cNvPr id="65" name="Rectangle 64"/>
+          <p:cNvPr id="67" name="Rectangle 66"/>
           <p:cNvSpPr/>
           <p:nvPr/>
         </p:nvSpPr>
@@ -8728,7 +8966,7 @@
       </p:sp>
       <p:sp>
         <p:nvSpPr>
-          <p:cNvPr id="66" name="TextBox 65"/>
+          <p:cNvPr id="68" name="TextBox 67"/>
           <p:cNvSpPr txBox="1"/>
           <p:nvPr/>
         </p:nvSpPr>
@@ -8763,7 +9001,7 @@
       </p:sp>
       <p:sp>
         <p:nvSpPr>
-          <p:cNvPr id="67" name="Rectangle 66"/>
+          <p:cNvPr id="69" name="Rectangle 68"/>
           <p:cNvSpPr/>
           <p:nvPr/>
         </p:nvSpPr>
@@ -8808,7 +9046,7 @@
       </p:sp>
       <p:sp>
         <p:nvSpPr>
-          <p:cNvPr id="68" name="TextBox 67"/>
+          <p:cNvPr id="70" name="TextBox 69"/>
           <p:cNvSpPr txBox="1"/>
           <p:nvPr/>
         </p:nvSpPr>
@@ -8843,7 +9081,7 @@
       </p:sp>
       <p:sp>
         <p:nvSpPr>
-          <p:cNvPr id="69" name="Rectangle 68"/>
+          <p:cNvPr id="71" name="Rectangle 70"/>
           <p:cNvSpPr/>
           <p:nvPr/>
         </p:nvSpPr>
@@ -8888,7 +9126,7 @@
       </p:sp>
       <p:sp>
         <p:nvSpPr>
-          <p:cNvPr id="70" name="TextBox 69"/>
+          <p:cNvPr id="72" name="TextBox 71"/>
           <p:cNvSpPr txBox="1"/>
           <p:nvPr/>
         </p:nvSpPr>
@@ -8923,7 +9161,7 @@
       </p:sp>
       <p:sp>
         <p:nvSpPr>
-          <p:cNvPr id="71" name="Rectangle 70"/>
+          <p:cNvPr id="73" name="Rectangle 72"/>
           <p:cNvSpPr/>
           <p:nvPr/>
         </p:nvSpPr>
@@ -8968,7 +9206,7 @@
       </p:sp>
       <p:sp>
         <p:nvSpPr>
-          <p:cNvPr id="72" name="TextBox 71"/>
+          <p:cNvPr id="74" name="TextBox 73"/>
           <p:cNvSpPr txBox="1"/>
           <p:nvPr/>
         </p:nvSpPr>
@@ -9003,7 +9241,7 @@
       </p:sp>
       <p:sp>
         <p:nvSpPr>
-          <p:cNvPr id="73" name="Rectangle 72"/>
+          <p:cNvPr id="75" name="Rectangle 74"/>
           <p:cNvSpPr/>
           <p:nvPr/>
         </p:nvSpPr>
@@ -9048,7 +9286,7 @@
       </p:sp>
       <p:sp>
         <p:nvSpPr>
-          <p:cNvPr id="74" name="TextBox 73"/>
+          <p:cNvPr id="76" name="TextBox 75"/>
           <p:cNvSpPr txBox="1"/>
           <p:nvPr/>
         </p:nvSpPr>
@@ -9083,7 +9321,7 @@
       </p:sp>
       <p:cxnSp>
         <p:nvCxnSpPr>
-          <p:cNvPr id="75" name="Connector 74"/>
+          <p:cNvPr id="77" name="Connector 76"/>
           <p:cNvCxnSpPr/>
           <p:nvPr/>
         </p:nvCxnSpPr>
@@ -9119,7 +9357,7 @@
       </p:cxnSp>
       <p:sp>
         <p:nvSpPr>
-          <p:cNvPr id="76" name="TextBox 75"/>
+          <p:cNvPr id="78" name="TextBox 77"/>
           <p:cNvSpPr txBox="1"/>
           <p:nvPr/>
         </p:nvSpPr>
@@ -9154,7 +9392,7 @@
       </p:sp>
       <p:cxnSp>
         <p:nvCxnSpPr>
-          <p:cNvPr id="77" name="Connector 76"/>
+          <p:cNvPr id="79" name="Connector 78"/>
           <p:cNvCxnSpPr/>
           <p:nvPr/>
         </p:nvCxnSpPr>
@@ -9190,7 +9428,7 @@
       </p:cxnSp>
       <p:sp>
         <p:nvSpPr>
-          <p:cNvPr id="78" name="TextBox 77"/>
+          <p:cNvPr id="80" name="TextBox 79"/>
           <p:cNvSpPr txBox="1"/>
           <p:nvPr/>
         </p:nvSpPr>
@@ -9225,7 +9463,7 @@
       </p:sp>
       <p:cxnSp>
         <p:nvCxnSpPr>
-          <p:cNvPr id="79" name="Connector 78"/>
+          <p:cNvPr id="81" name="Connector 80"/>
           <p:cNvCxnSpPr/>
           <p:nvPr/>
         </p:nvCxnSpPr>
@@ -9261,7 +9499,7 @@
       </p:cxnSp>
       <p:sp>
         <p:nvSpPr>
-          <p:cNvPr id="80" name="TextBox 79"/>
+          <p:cNvPr id="82" name="TextBox 81"/>
           <p:cNvSpPr txBox="1"/>
           <p:nvPr/>
         </p:nvSpPr>
@@ -9296,7 +9534,7 @@
       </p:sp>
       <p:cxnSp>
         <p:nvCxnSpPr>
-          <p:cNvPr id="81" name="Connector 80"/>
+          <p:cNvPr id="83" name="Connector 82"/>
           <p:cNvCxnSpPr/>
           <p:nvPr/>
         </p:nvCxnSpPr>
@@ -9332,7 +9570,7 @@
       </p:cxnSp>
       <p:sp>
         <p:nvSpPr>
-          <p:cNvPr id="82" name="TextBox 81"/>
+          <p:cNvPr id="84" name="TextBox 83"/>
           <p:cNvSpPr txBox="1"/>
           <p:nvPr/>
         </p:nvSpPr>
@@ -9367,7 +9605,7 @@
       </p:sp>
       <p:sp>
         <p:nvSpPr>
-          <p:cNvPr id="83" name="TextBox 82"/>
+          <p:cNvPr id="85" name="TextBox 84"/>
           <p:cNvSpPr txBox="1"/>
           <p:nvPr/>
         </p:nvSpPr>
@@ -21398,6 +21636,85 @@
         </p:nvSpPr>
         <p:spPr>
           <a:xfrm>
+            <a:off x="3703320" y="4233672"/>
+            <a:ext cx="4800600" cy="274320"/>
+          </a:xfrm>
+          <a:prstGeom prst="rect">
+            <a:avLst/>
+          </a:prstGeom>
+          <a:solidFill>
+            <a:srgbClr val="0D182A"/>
+          </a:solidFill>
+          <a:ln w="9525">
+            <a:solidFill>
+              <a:srgbClr val="58A6FF"/>
+            </a:solidFill>
+          </a:ln>
+        </p:spPr>
+        <p:style>
+          <a:lnRef idx="1">
+            <a:schemeClr val="accent1"/>
+          </a:lnRef>
+          <a:fillRef idx="3">
+            <a:schemeClr val="accent1"/>
+          </a:fillRef>
+          <a:effectRef idx="2">
+            <a:schemeClr val="accent1"/>
+          </a:effectRef>
+          <a:fontRef idx="minor">
+            <a:schemeClr val="lt1"/>
+          </a:fontRef>
+        </p:style>
+        <p:txBody>
+          <a:bodyPr rtlCol="0" anchor="ctr"/>
+          <a:lstStyle/>
+          <a:p>
+            <a:pPr algn="ctr"/>
+          </a:p>
+        </p:txBody>
+      </p:sp>
+      <p:sp>
+        <p:nvSpPr>
+          <p:cNvPr id="21" name="TextBox 20"/>
+          <p:cNvSpPr txBox="1"/>
+          <p:nvPr/>
+        </p:nvSpPr>
+        <p:spPr>
+          <a:xfrm>
+            <a:off x="3794759" y="4251960"/>
+            <a:ext cx="4617720" cy="201168"/>
+          </a:xfrm>
+          <a:prstGeom prst="rect">
+            <a:avLst/>
+          </a:prstGeom>
+          <a:noFill/>
+        </p:spPr>
+        <p:txBody>
+          <a:bodyPr wrap="square">
+            <a:spAutoFit/>
+          </a:bodyPr>
+          <a:lstStyle/>
+          <a:p>
+            <a:pPr algn="ctr"/>
+            <a:r>
+              <a:rPr sz="800" b="0">
+                <a:solidFill>
+                  <a:srgbClr val="58A6FF"/>
+                </a:solidFill>
+              </a:rPr>
+              <a:t>LOAD  SentenceTransformer('all-MiniLM-L6-v2')  ·  ~5-15 s  ·  ~300 MB RAM  ·  paid once at mcp_server process start, before any encoding</a:t>
+            </a:r>
+          </a:p>
+        </p:txBody>
+      </p:sp>
+      <p:sp>
+        <p:nvSpPr>
+          <p:cNvPr id="22" name="Rectangle 21"/>
+          <p:cNvSpPr/>
+          <p:nvPr/>
+        </p:nvSpPr>
+        <p:spPr>
+          <a:xfrm>
             <a:off x="3703320" y="4572000"/>
             <a:ext cx="4800600" cy="777240"/>
           </a:xfrm>
@@ -21437,7 +21754,7 @@
       </p:sp>
       <p:sp>
         <p:nvSpPr>
-          <p:cNvPr id="21" name="TextBox 20"/>
+          <p:cNvPr id="23" name="TextBox 22"/>
           <p:cNvSpPr txBox="1"/>
           <p:nvPr/>
         </p:nvSpPr>
@@ -21471,7 +21788,7 @@
       </p:sp>
       <p:sp>
         <p:nvSpPr>
-          <p:cNvPr id="22" name="TextBox 21"/>
+          <p:cNvPr id="24" name="TextBox 23"/>
           <p:cNvSpPr txBox="1"/>
           <p:nvPr/>
         </p:nvSpPr>
@@ -21506,7 +21823,7 @@
       </p:sp>
       <p:sp>
         <p:nvSpPr>
-          <p:cNvPr id="23" name="Rectangle 22"/>
+          <p:cNvPr id="25" name="Rectangle 24"/>
           <p:cNvSpPr/>
           <p:nvPr/>
         </p:nvSpPr>
@@ -21551,7 +21868,7 @@
       </p:sp>
       <p:sp>
         <p:nvSpPr>
-          <p:cNvPr id="24" name="TextBox 23"/>
+          <p:cNvPr id="26" name="TextBox 25"/>
           <p:cNvSpPr txBox="1"/>
           <p:nvPr/>
         </p:nvSpPr>
@@ -21585,7 +21902,7 @@
       </p:sp>
       <p:sp>
         <p:nvSpPr>
-          <p:cNvPr id="25" name="TextBox 24"/>
+          <p:cNvPr id="27" name="TextBox 26"/>
           <p:cNvSpPr txBox="1"/>
           <p:nvPr/>
         </p:nvSpPr>
@@ -21620,7 +21937,7 @@
       </p:sp>
       <p:cxnSp>
         <p:nvCxnSpPr>
-          <p:cNvPr id="26" name="Connector 25"/>
+          <p:cNvPr id="28" name="Connector 27"/>
           <p:cNvCxnSpPr/>
           <p:nvPr/>
         </p:nvCxnSpPr>
@@ -21656,7 +21973,7 @@
       </p:cxnSp>
       <p:sp>
         <p:nvSpPr>
-          <p:cNvPr id="27" name="Rectangle 26"/>
+          <p:cNvPr id="29" name="Rectangle 28"/>
           <p:cNvSpPr/>
           <p:nvPr/>
         </p:nvSpPr>
@@ -21701,7 +22018,7 @@
       </p:sp>
       <p:sp>
         <p:nvSpPr>
-          <p:cNvPr id="28" name="TextBox 27"/>
+          <p:cNvPr id="30" name="TextBox 29"/>
           <p:cNvSpPr txBox="1"/>
           <p:nvPr/>
         </p:nvSpPr>
@@ -21735,7 +22052,7 @@
       </p:sp>
       <p:sp>
         <p:nvSpPr>
-          <p:cNvPr id="29" name="TextBox 28"/>
+          <p:cNvPr id="31" name="TextBox 30"/>
           <p:cNvSpPr txBox="1"/>
           <p:nvPr/>
         </p:nvSpPr>
@@ -21769,7 +22086,7 @@
       </p:sp>
       <p:cxnSp>
         <p:nvCxnSpPr>
-          <p:cNvPr id="30" name="Connector 29"/>
+          <p:cNvPr id="32" name="Connector 31"/>
           <p:cNvCxnSpPr/>
           <p:nvPr/>
         </p:nvCxnSpPr>
@@ -21805,7 +22122,7 @@
       </p:cxnSp>
       <p:sp>
         <p:nvSpPr>
-          <p:cNvPr id="31" name="Rectangle 30"/>
+          <p:cNvPr id="33" name="Rectangle 32"/>
           <p:cNvSpPr/>
           <p:nvPr/>
         </p:nvSpPr>
@@ -21850,7 +22167,7 @@
       </p:sp>
       <p:sp>
         <p:nvSpPr>
-          <p:cNvPr id="32" name="TextBox 31"/>
+          <p:cNvPr id="34" name="TextBox 33"/>
           <p:cNvSpPr txBox="1"/>
           <p:nvPr/>
         </p:nvSpPr>
@@ -21884,7 +22201,7 @@
       </p:sp>
       <p:sp>
         <p:nvSpPr>
-          <p:cNvPr id="33" name="TextBox 32"/>
+          <p:cNvPr id="35" name="TextBox 34"/>
           <p:cNvSpPr txBox="1"/>
           <p:nvPr/>
         </p:nvSpPr>
@@ -21918,7 +22235,7 @@
       </p:sp>
       <p:cxnSp>
         <p:nvCxnSpPr>
-          <p:cNvPr id="34" name="Connector 33"/>
+          <p:cNvPr id="36" name="Connector 35"/>
           <p:cNvCxnSpPr/>
           <p:nvPr/>
         </p:nvCxnSpPr>
@@ -21954,7 +22271,7 @@
       </p:cxnSp>
       <p:sp>
         <p:nvSpPr>
-          <p:cNvPr id="35" name="TextBox 34"/>
+          <p:cNvPr id="37" name="TextBox 36"/>
           <p:cNvSpPr txBox="1"/>
           <p:nvPr/>
         </p:nvSpPr>
@@ -21988,7 +22305,7 @@
       </p:sp>
       <p:cxnSp>
         <p:nvCxnSpPr>
-          <p:cNvPr id="36" name="Connector 35"/>
+          <p:cNvPr id="38" name="Connector 37"/>
           <p:cNvCxnSpPr/>
           <p:nvPr/>
         </p:nvCxnSpPr>
@@ -22024,7 +22341,7 @@
       </p:cxnSp>
       <p:sp>
         <p:nvSpPr>
-          <p:cNvPr id="37" name="Rectangle 36"/>
+          <p:cNvPr id="39" name="Rectangle 38"/>
           <p:cNvSpPr/>
           <p:nvPr/>
         </p:nvSpPr>
@@ -22069,7 +22386,7 @@
       </p:sp>
       <p:sp>
         <p:nvSpPr>
-          <p:cNvPr id="38" name="TextBox 37"/>
+          <p:cNvPr id="40" name="TextBox 39"/>
           <p:cNvSpPr txBox="1"/>
           <p:nvPr/>
         </p:nvSpPr>
@@ -22103,7 +22420,7 @@
       </p:sp>
       <p:sp>
         <p:nvSpPr>
-          <p:cNvPr id="39" name="TextBox 38"/>
+          <p:cNvPr id="41" name="TextBox 40"/>
           <p:cNvSpPr txBox="1"/>
           <p:nvPr/>
         </p:nvSpPr>
@@ -22137,7 +22454,7 @@
       </p:sp>
       <p:cxnSp>
         <p:nvCxnSpPr>
-          <p:cNvPr id="40" name="Connector 39"/>
+          <p:cNvPr id="42" name="Connector 41"/>
           <p:cNvCxnSpPr/>
           <p:nvPr/>
         </p:nvCxnSpPr>
@@ -22173,7 +22490,7 @@
       </p:cxnSp>
       <p:sp>
         <p:nvSpPr>
-          <p:cNvPr id="41" name="TextBox 40"/>
+          <p:cNvPr id="43" name="TextBox 42"/>
           <p:cNvSpPr txBox="1"/>
           <p:nvPr/>
         </p:nvSpPr>
@@ -22207,7 +22524,7 @@
       </p:sp>
       <p:cxnSp>
         <p:nvCxnSpPr>
-          <p:cNvPr id="42" name="Connector 41"/>
+          <p:cNvPr id="44" name="Connector 43"/>
           <p:cNvCxnSpPr/>
           <p:nvPr/>
         </p:nvCxnSpPr>
@@ -22243,7 +22560,7 @@
       </p:cxnSp>
       <p:sp>
         <p:nvSpPr>
-          <p:cNvPr id="43" name="Rectangle 42"/>
+          <p:cNvPr id="45" name="Rectangle 44"/>
           <p:cNvSpPr/>
           <p:nvPr/>
         </p:nvSpPr>
@@ -22288,7 +22605,7 @@
       </p:sp>
       <p:sp>
         <p:nvSpPr>
-          <p:cNvPr id="44" name="TextBox 43"/>
+          <p:cNvPr id="46" name="TextBox 45"/>
           <p:cNvSpPr txBox="1"/>
           <p:nvPr/>
         </p:nvSpPr>
@@ -22322,7 +22639,7 @@
       </p:sp>
       <p:sp>
         <p:nvSpPr>
-          <p:cNvPr id="45" name="TextBox 44"/>
+          <p:cNvPr id="47" name="TextBox 46"/>
           <p:cNvSpPr txBox="1"/>
           <p:nvPr/>
         </p:nvSpPr>
@@ -22356,7 +22673,7 @@
       </p:sp>
       <p:cxnSp>
         <p:nvCxnSpPr>
-          <p:cNvPr id="46" name="Connector 45"/>
+          <p:cNvPr id="48" name="Connector 47"/>
           <p:cNvCxnSpPr/>
           <p:nvPr/>
         </p:nvCxnSpPr>
@@ -22392,7 +22709,7 @@
       </p:cxnSp>
       <p:sp>
         <p:nvSpPr>
-          <p:cNvPr id="47" name="Rectangle 46"/>
+          <p:cNvPr id="49" name="Rectangle 48"/>
           <p:cNvSpPr/>
           <p:nvPr/>
         </p:nvSpPr>
@@ -22437,7 +22754,7 @@
       </p:sp>
       <p:sp>
         <p:nvSpPr>
-          <p:cNvPr id="48" name="TextBox 47"/>
+          <p:cNvPr id="50" name="TextBox 49"/>
           <p:cNvSpPr txBox="1"/>
           <p:nvPr/>
         </p:nvSpPr>
@@ -22471,7 +22788,7 @@
       </p:sp>
       <p:sp>
         <p:nvSpPr>
-          <p:cNvPr id="49" name="TextBox 48"/>
+          <p:cNvPr id="51" name="TextBox 50"/>
           <p:cNvSpPr txBox="1"/>
           <p:nvPr/>
         </p:nvSpPr>
